--- a/Pathfinder_Presentation_Dileep_Bommali.pptx
+++ b/Pathfinder_Presentation_Dileep_Bommali.pptx
@@ -861,7 +861,7 @@
           <a:lstStyle/>
           <a:p>
             <a:r>
-              <a:t>Rather than guessing based on grades, our ML engine analyzes 12 holistic dimensions. It generates exact probability scores and pinpoints high-impact actions to improve student outcomes.</a:t>
+              <a:t>Rather than guessing based on grades, our ML engine analyzes 8 holistic dimensions across 972 real records. It generates exact probability scores and pinpoints high-impact actions to improve student outcomes.</a:t>
             </a:r>
           </a:p>
         </p:txBody>
@@ -4313,7 +4313,7 @@
               </a:defRPr>
             </a:pPr>
             <a:r>
-              <a:t>Stack: React 18 • TypeScript • FastAPI • Scikit-Learn • Google Gemini AI • ThreeUI WebGL</a:t>
+              <a:t>Stack: React 19 • TypeScript • FastAPI • Scikit-Learn • Google Gemini AI • ThreeUI WebGL</a:t>
             </a:r>
           </a:p>
           <a:p>
@@ -5870,26 +5870,26 @@
           </a:p>
           <a:p>
             <a:pPr>
-              <a:defRPr sz="1900" b="1">
+              <a:defRPr sz="1800" b="1">
                 <a:solidFill>
                   <a:srgbClr val="00E5FF"/>
                 </a:solidFill>
               </a:defRPr>
             </a:pPr>
             <a:r>
-              <a:t>React 18 &amp; TypeScript</a:t>
-            </a:r>
-          </a:p>
-          <a:p>
-            <a:pPr>
-              <a:defRPr sz="1400">
+              <a:t>React 19 &amp; TypeScript</a:t>
+            </a:r>
+          </a:p>
+          <a:p>
+            <a:pPr>
+              <a:defRPr sz="1300">
                 <a:solidFill>
                   <a:srgbClr val="F8FAFC"/>
                 </a:solidFill>
               </a:defRPr>
             </a:pPr>
             <a:r>
-              <a:t>Vite build system, Tailwind CSS, Framer Motion micro-interactions, ThreeUI Void Field WebGL shaders.</a:t>
+              <a:t>Vite 7 build system, Tailwind CSS v4, Framer Motion, 15 specialized modules, ThreeUI 3D WebGL background shaders.</a:t>
             </a:r>
           </a:p>
         </p:txBody>
@@ -5969,31 +5969,31 @@
               </a:defRPr>
             </a:pPr>
             <a:r>
-              <a:t>API GATEWAY</a:t>
-            </a:r>
-          </a:p>
-          <a:p>
-            <a:pPr>
-              <a:defRPr sz="1900" b="1">
+              <a:t>API &amp; GATEWAY TIER</a:t>
+            </a:r>
+          </a:p>
+          <a:p>
+            <a:pPr>
+              <a:defRPr sz="1800" b="1">
                 <a:solidFill>
                   <a:srgbClr val="00E5FF"/>
                 </a:solidFill>
               </a:defRPr>
             </a:pPr>
             <a:r>
-              <a:t>FastAPI &amp; Uvicorn</a:t>
-            </a:r>
-          </a:p>
-          <a:p>
-            <a:pPr>
-              <a:defRPr sz="1400">
+              <a:t>FastAPI &amp; SQLite WAL</a:t>
+            </a:r>
+          </a:p>
+          <a:p>
+            <a:pPr>
+              <a:defRPr sz="1300">
                 <a:solidFill>
                   <a:srgbClr val="F8FAFC"/>
                 </a:solidFill>
               </a:defRPr>
             </a:pPr>
             <a:r>
-              <a:t>High-throughput asynchronous Python gateway, strict Pydantic schemas, CORS security, JWT session management.</a:t>
+              <a:t>High-throughput asynchronous Python gateway, SQLite in WAL mode with repository pattern, sub-20ms queries, JWT security.</a:t>
             </a:r>
           </a:p>
         </p:txBody>
@@ -6073,12 +6073,12 @@
               </a:defRPr>
             </a:pPr>
             <a:r>
-              <a:t>INTELLIGENCE ENGINE</a:t>
-            </a:r>
-          </a:p>
-          <a:p>
-            <a:pPr>
-              <a:defRPr sz="1900" b="1">
+              <a:t>INTELLIGENCE TIER</a:t>
+            </a:r>
+          </a:p>
+          <a:p>
+            <a:pPr>
+              <a:defRPr sz="1800" b="1">
                 <a:solidFill>
                   <a:srgbClr val="00E5FF"/>
                 </a:solidFill>
@@ -6090,14 +6090,14 @@
           </a:p>
           <a:p>
             <a:pPr>
-              <a:defRPr sz="1400">
+              <a:defRPr sz="1300">
                 <a:solidFill>
                   <a:srgbClr val="F8FAFC"/>
                 </a:solidFill>
               </a:defRPr>
             </a:pPr>
             <a:r>
-              <a:t>Ensemble Random Forest &amp; Gradient Boosted placement classifier, Google Gemini 2.5 Flash roadmap generator.</a:t>
+              <a:t>Calibrated Random Forest model (88% accuracy, 972 cohort records), Google Gemini 2.0 Flash bilingual AI Coach.</a:t>
             </a:r>
           </a:p>
         </p:txBody>
@@ -6228,7 +6228,7 @@
               </a:defRPr>
             </a:pPr>
             <a:r>
-              <a:t>Quantitative ML Placement Prediction</a:t>
+              <a:t>Quantitative ML Placement Prediction (972 Records)</a:t>
             </a:r>
           </a:p>
         </p:txBody>
@@ -6313,19 +6313,19 @@
           </a:p>
           <a:p>
             <a:pPr>
-              <a:defRPr sz="1400">
+              <a:defRPr sz="1300">
                 <a:solidFill>
                   <a:srgbClr val="F8FAFC"/>
                 </a:solidFill>
               </a:defRPr>
             </a:pPr>
             <a:r>
-              <a:t>• Academic standing: CGPA, core credits, backlogs</a:t>
-            </a:r>
-          </a:p>
-          <a:p>
-            <a:pPr>
-              <a:defRPr sz="1400">
+              <a:t>• Academic standing: CGPA, core credits, active backlogs</a:t>
+            </a:r>
+          </a:p>
+          <a:p>
+            <a:pPr>
+              <a:defRPr sz="1300">
                 <a:solidFill>
                   <a:srgbClr val="F8FAFC"/>
                 </a:solidFill>
@@ -6337,38 +6337,38 @@
           </a:p>
           <a:p>
             <a:pPr>
-              <a:defRPr sz="1400">
+              <a:defRPr sz="1300">
                 <a:solidFill>
                   <a:srgbClr val="F8FAFC"/>
                 </a:solidFill>
               </a:defRPr>
             </a:pPr>
             <a:r>
-              <a:t>• Algorithmic aptitude: LeetCode/CodeChef ratings, DSA rank</a:t>
-            </a:r>
-          </a:p>
-          <a:p>
-            <a:pPr>
-              <a:defRPr sz="1400">
+              <a:t>• Algorithmic aptitude: LeetCode/DSA problem count &amp; rank</a:t>
+            </a:r>
+          </a:p>
+          <a:p>
+            <a:pPr>
+              <a:defRPr sz="1300">
                 <a:solidFill>
                   <a:srgbClr val="F8FAFC"/>
                 </a:solidFill>
               </a:defRPr>
             </a:pPr>
             <a:r>
-              <a:t>• Competitions: Hackathon wins, research publications</a:t>
-            </a:r>
-          </a:p>
-          <a:p>
-            <a:pPr>
-              <a:defRPr sz="1400">
+              <a:t>• Competitions: Hackathon wins, certifications, GitHub portfolio</a:t>
+            </a:r>
+          </a:p>
+          <a:p>
+            <a:pPr>
+              <a:defRPr sz="1300">
                 <a:solidFill>
                   <a:srgbClr val="F8FAFC"/>
                 </a:solidFill>
               </a:defRPr>
             </a:pPr>
             <a:r>
-              <a:t>• Communication &amp; soft skills: Mock interview ratings</a:t>
+              <a:t>• Communication &amp; soft skills: Placement interview rubric scores</a:t>
             </a:r>
           </a:p>
         </p:txBody>
@@ -6448,67 +6448,67 @@
               </a:defRPr>
             </a:pPr>
             <a:r>
-              <a:t>Ensemble Classifier &amp; Inference</a:t>
-            </a:r>
-          </a:p>
-          <a:p>
-            <a:pPr>
-              <a:defRPr sz="1400">
+              <a:t>Calibrated Random Forest Engine</a:t>
+            </a:r>
+          </a:p>
+          <a:p>
+            <a:pPr>
+              <a:defRPr sz="1300">
                 <a:solidFill>
                   <a:srgbClr val="F8FAFC"/>
                 </a:solidFill>
               </a:defRPr>
             </a:pPr>
             <a:r>
-              <a:t>• Dual-engine Voting Classifier (Random Forest + Gradient Boosting)</a:t>
-            </a:r>
-          </a:p>
-          <a:p>
-            <a:pPr>
-              <a:defRPr sz="1400">
+              <a:t>• Trained on 972 historical student placement records across 9 branches</a:t>
+            </a:r>
+          </a:p>
+          <a:p>
+            <a:pPr>
+              <a:defRPr sz="1300">
                 <a:solidFill>
                   <a:srgbClr val="F8FAFC"/>
                 </a:solidFill>
               </a:defRPr>
             </a:pPr>
             <a:r>
-              <a:t>• Outputs probabilistic placement odds (0 - 100%)</a:t>
-            </a:r>
-          </a:p>
-          <a:p>
-            <a:pPr>
-              <a:defRPr sz="1400">
+              <a:t>• Random Forest Classifier with 120 decision trees (88% test accuracy)</a:t>
+            </a:r>
+          </a:p>
+          <a:p>
+            <a:pPr>
+              <a:defRPr sz="1300">
                 <a:solidFill>
                   <a:srgbClr val="F8FAFC"/>
                 </a:solidFill>
               </a:defRPr>
             </a:pPr>
             <a:r>
+              <a:t>• Outputs probabilistic placement odds (0 - 100%) and salary tier (LPA)</a:t>
+            </a:r>
+          </a:p>
+          <a:p>
+            <a:pPr>
+              <a:defRPr sz="1300">
+                <a:solidFill>
+                  <a:srgbClr val="F8FAFC"/>
+                </a:solidFill>
+              </a:defRPr>
+            </a:pPr>
+            <a:r>
               <a:t>• Feature importance scoring highlights priority growth areas</a:t>
             </a:r>
           </a:p>
           <a:p>
             <a:pPr>
-              <a:defRPr sz="1400">
+              <a:defRPr sz="1300">
                 <a:solidFill>
                   <a:srgbClr val="F8FAFC"/>
                 </a:solidFill>
               </a:defRPr>
             </a:pPr>
             <a:r>
-              <a:t>• Instant inference latency (&lt; 45ms per prediction)</a:t>
-            </a:r>
-          </a:p>
-          <a:p>
-            <a:pPr>
-              <a:defRPr sz="1400">
-                <a:solidFill>
-                  <a:srgbClr val="F8FAFC"/>
-                </a:solidFill>
-              </a:defRPr>
-            </a:pPr>
-            <a:r>
-              <a:t>• Confidence intervals &amp; risk mitigation factors provided</a:t>
+              <a:t>• Sub-45ms ultra-low inference latency per candidate prediction</a:t>
             </a:r>
           </a:p>
         </p:txBody>
@@ -6639,7 +6639,7 @@
               </a:defRPr>
             </a:pPr>
             <a:r>
-              <a:t>Adaptive Skill-Gap Analysis &amp; Gemini Roadmaps</a:t>
+              <a:t>Screen-Aware Bilingual Gemini AI Coach</a:t>
             </a:r>
           </a:p>
         </p:txBody>
@@ -6719,7 +6719,7 @@
               </a:defRPr>
             </a:pPr>
             <a:r>
-              <a:t>TARGET ROLE CATALOG</a:t>
+              <a:t>LIVE UI SYNCHRONIZED</a:t>
             </a:r>
           </a:p>
           <a:p>
@@ -6731,7 +6731,7 @@
               </a:defRPr>
             </a:pPr>
             <a:r>
-              <a:t>Dynamic Role Benchmarks</a:t>
+              <a:t>Screen-Aware Context</a:t>
             </a:r>
           </a:p>
           <a:p>
@@ -6743,7 +6743,7 @@
               </a:defRPr>
             </a:pPr>
             <a:r>
-              <a:t>Curated benchmarks for Full-Stack, Machine Learning, DevOps, Cloud Architect, and Mobile Dev roles.</a:t>
+              <a:t>The AI Coach dynamically reads the active screen, CGPA, backlogs, and gauge percentage to mentor with exact numbers.</a:t>
             </a:r>
           </a:p>
         </p:txBody>
@@ -6823,7 +6823,7 @@
               </a:defRPr>
             </a:pPr>
             <a:r>
-              <a:t>DEFICIENCY IDENTIFICATION</a:t>
+              <a:t>ENGLISH &amp; TELUGU SUPPORT</a:t>
             </a:r>
           </a:p>
           <a:p>
@@ -6835,7 +6835,7 @@
               </a:defRPr>
             </a:pPr>
             <a:r>
-              <a:t>Skill Gap Radar</a:t>
+              <a:t>Bilingual Mentorship</a:t>
             </a:r>
           </a:p>
           <a:p>
@@ -6847,7 +6847,7 @@
               </a:defRPr>
             </a:pPr>
             <a:r>
-              <a:t>Quantifies percentage gap across foundational algorithms, system design, modern frameworks, and cloud tooling.</a:t>
+              <a:t>Offers technical coaching in English, Telugu script, and Roman Telugu to eliminate language barriers for all students.</a:t>
             </a:r>
           </a:p>
         </p:txBody>
@@ -6927,7 +6927,7 @@
               </a:defRPr>
             </a:pPr>
             <a:r>
-              <a:t>AUTONOMOUS ROADMAPS</a:t>
+              <a:t>CONVERSATIONAL MEMORY</a:t>
             </a:r>
           </a:p>
           <a:p>
@@ -6939,7 +6939,7 @@
               </a:defRPr>
             </a:pPr>
             <a:r>
-              <a:t>Gemini AI Career Co-Pilot</a:t>
+              <a:t>Multi-Turn Follow-Ups</a:t>
             </a:r>
           </a:p>
           <a:p>
@@ -6951,7 +6951,7 @@
               </a:defRPr>
             </a:pPr>
             <a:r>
-              <a:t>Generates structured week-by-week learning paths with real-time conversational career and interview coaching.</a:t>
+              <a:t>Retains multi-turn dialogue context so candidates can ask in-depth follow-up questions on architecture, DSA, and viva prep.</a:t>
             </a:r>
           </a:p>
         </p:txBody>
@@ -7162,7 +7162,7 @@
               </a:defRPr>
             </a:pPr>
             <a:r>
-              <a:t>TACTILE AUTHENTICATION</a:t>
+              <a:t>ZERO-BLOCKAGE ACCESS</a:t>
             </a:r>
           </a:p>
           <a:p>
@@ -7186,7 +7186,7 @@
               </a:defRPr>
             </a:pPr>
             <a:r>
-              <a:t>Custom pull-cord lamp physics that transitions between dark and light states, backed by Google &amp; GitHub OAuth.</a:t>
+              <a:t>Tactile desk lamp with pull cord, multi-point click controls, GPU particles, and 1-click Instant Guest Mode.</a:t>
             </a:r>
           </a:p>
         </p:txBody>
@@ -7266,7 +7266,7 @@
               </a:defRPr>
             </a:pPr>
             <a:r>
-              <a:t>3D WEBGL BACKGROUND</a:t>
+              <a:t>SOFTWARE &amp; HARDWARE</a:t>
             </a:r>
           </a:p>
           <a:p>
@@ -7278,7 +7278,7 @@
               </a:defRPr>
             </a:pPr>
             <a:r>
-              <a:t>ThreeUI Void Field Shaders</a:t>
+              <a:t>23 Production Blueprints</a:t>
             </a:r>
           </a:p>
           <a:p>
@@ -7290,7 +7290,7 @@
               </a:defRPr>
             </a:pPr>
             <a:r>
-              <a:t>Hardware-accelerated reactive WebGL shader mesh producing an immersive, dark-tech aesthetic.</a:t>
+              <a:t>6 Flagship + 17 Smart India Hackathon system architectures with pipelines, pitfalls, and viva defense Q&amp;A.</a:t>
             </a:r>
           </a:p>
         </p:txBody>
@@ -7370,7 +7370,7 @@
               </a:defRPr>
             </a:pPr>
             <a:r>
-              <a:t>MODERN VISUAL HIERARCHY</a:t>
+              <a:t>SPATIAL UI ARCHITECTURE</a:t>
             </a:r>
           </a:p>
           <a:p>
@@ -7382,7 +7382,7 @@
               </a:defRPr>
             </a:pPr>
             <a:r>
-              <a:t>Glassmorphism &amp; Micro-Motion</a:t>
+              <a:t>15 Specialized Modules</a:t>
             </a:r>
           </a:p>
           <a:p>
@@ -7394,7 +7394,7 @@
               </a:defRPr>
             </a:pPr>
             <a:r>
-              <a:t>Fluid card layouts, accessible color contrast ratios, dynamic Recharts data visualizations, and mobile responsiveness.</a:t>
+              <a:t>Overview, Cohort Analytics, What-If Simulator, Resume Studio, Digital Twin, and 3D WebGL background shaders.</a:t>
             </a:r>
           </a:p>
         </p:txBody>
@@ -8048,7 +8048,7 @@
               </a:defRPr>
             </a:pPr>
             <a:r>
-              <a:t>✓ 0 Syntax Errors</a:t>
+              <a:t>✓ 972 Placement Records</a:t>
             </a:r>
           </a:p>
           <a:p>
@@ -8060,7 +8060,7 @@
               </a:defRPr>
             </a:pPr>
             <a:r>
-              <a:t>14/14 Python Backend Modules Passed</a:t>
+              <a:t>Verified across 9 Engineering Branches</a:t>
             </a:r>
           </a:p>
         </p:txBody>
@@ -8140,7 +8140,7 @@
               </a:defRPr>
             </a:pPr>
             <a:r>
-              <a:t>✓ 0 TypeScript Errors</a:t>
+              <a:t>✓ 88% ML Accuracy</a:t>
             </a:r>
           </a:p>
           <a:p>
@@ -8152,7 +8152,7 @@
               </a:defRPr>
             </a:pPr>
             <a:r>
-              <a:t>tsc --noEmit 100% Strict Type Safe</a:t>
+              <a:t>Random Forest Classifier (120 Estimators)</a:t>
             </a:r>
           </a:p>
         </p:txBody>
@@ -8232,7 +8232,7 @@
               </a:defRPr>
             </a:pPr>
             <a:r>
-              <a:t>✓ 16/16 APIs Verified</a:t>
+              <a:t>✓ 100% Strict Type Safety</a:t>
             </a:r>
           </a:p>
           <a:p>
@@ -8244,7 +8244,7 @@
               </a:defRPr>
             </a:pPr>
             <a:r>
-              <a:t>Health, Auth, Predict, AI, PDF/CSV 200 OK</a:t>
+              <a:t>tsc --noEmit &amp; zero Python compilation errors</a:t>
             </a:r>
           </a:p>
         </p:txBody>
@@ -8324,7 +8324,7 @@
               </a:defRPr>
             </a:pPr>
             <a:r>
-              <a:t>✓ &lt; 50ms ML Latency</a:t>
+              <a:t>✓ 16/16 Audit Passed</a:t>
             </a:r>
           </a:p>
           <a:p>
@@ -8336,7 +8336,7 @@
               </a:defRPr>
             </a:pPr>
             <a:r>
-              <a:t>High-throughput Placement Inference</a:t>
+              <a:t>IDOR 403 Forbidden &amp; Security Verification</a:t>
             </a:r>
           </a:p>
         </p:txBody>
@@ -8416,7 +8416,7 @@
               </a:defRPr>
             </a:pPr>
             <a:r>
-              <a:t>✓ 100% Secret Protection</a:t>
+              <a:t>✓ Bilingual AI Mentorship</a:t>
             </a:r>
           </a:p>
           <a:p>
@@ -8428,7 +8428,7 @@
               </a:defRPr>
             </a:pPr>
             <a:r>
-              <a:t>.env Safely Guarded &amp; Git Excluded</a:t>
+              <a:t>English, Telugu Script &amp; Roman Telugu</a:t>
             </a:r>
           </a:p>
         </p:txBody>
@@ -8508,7 +8508,7 @@
               </a:defRPr>
             </a:pPr>
             <a:r>
-              <a:t>✓ Production Bundled</a:t>
+              <a:t>✓ Production Deployed</a:t>
             </a:r>
           </a:p>
           <a:p>
@@ -8520,7 +8520,7 @@
               </a:defRPr>
             </a:pPr>
             <a:r>
-              <a:t>Vite Minified &amp; Optimized</a:t>
+              <a:t>Vercel Edge SPA &amp; Render Cloud API Service</a:t>
             </a:r>
           </a:p>
         </p:txBody>

--- a/Pathfinder_Presentation_Dileep_Bommali.pptx
+++ b/Pathfinder_Presentation_Dileep_Bommali.pptx
@@ -4162,7 +4162,7 @@
             <a:avLst/>
           </a:prstGeom>
           <a:solidFill>
-            <a:srgbClr val="0B0F19"/>
+            <a:srgbClr val="09090E"/>
           </a:solidFill>
           <a:ln>
             <a:noFill/>
@@ -4205,11 +4205,11 @@
             <a:avLst/>
           </a:prstGeom>
           <a:solidFill>
-            <a:srgbClr val="131A2A"/>
+            <a:srgbClr val="121018"/>
           </a:solidFill>
           <a:ln w="19050">
             <a:solidFill>
-              <a:srgbClr val="25314E"/>
+              <a:srgbClr val="302032"/>
             </a:solidFill>
           </a:ln>
         </p:spPr>
@@ -4260,7 +4260,7 @@
             <a:pPr algn="ctr">
               <a:defRPr sz="4600" b="1">
                 <a:solidFill>
-                  <a:srgbClr val="00E5FF"/>
+                  <a:srgbClr val="FF2D55"/>
                 </a:solidFill>
               </a:defRPr>
             </a:pPr>
@@ -4284,7 +4284,7 @@
             <a:pPr algn="ctr">
               <a:defRPr sz="1400">
                 <a:solidFill>
-                  <a:srgbClr val="25314E"/>
+                  <a:srgbClr val="302032"/>
                 </a:solidFill>
               </a:defRPr>
             </a:pPr>
@@ -4308,7 +4308,7 @@
             <a:pPr algn="ctr">
               <a:defRPr sz="1400">
                 <a:solidFill>
-                  <a:srgbClr val="94A3B8"/>
+                  <a:srgbClr val="A1A1AA"/>
                 </a:solidFill>
               </a:defRPr>
             </a:pPr>
@@ -4320,7 +4320,7 @@
             <a:pPr algn="ctr">
               <a:defRPr sz="1300">
                 <a:solidFill>
-                  <a:srgbClr val="00E5FF"/>
+                  <a:srgbClr val="FF2D55"/>
                 </a:solidFill>
               </a:defRPr>
             </a:pPr>
@@ -4363,7 +4363,7 @@
             <a:avLst/>
           </a:prstGeom>
           <a:solidFill>
-            <a:srgbClr val="0B0F19"/>
+            <a:srgbClr val="09090E"/>
           </a:solidFill>
           <a:ln>
             <a:noFill/>
@@ -4416,7 +4416,7 @@
             <a:pPr>
               <a:defRPr sz="1100" b="1">
                 <a:solidFill>
-                  <a:srgbClr val="00E5FF"/>
+                  <a:srgbClr val="FF2D55"/>
                 </a:solidFill>
               </a:defRPr>
             </a:pPr>
@@ -4476,11 +4476,11 @@
             <a:avLst/>
           </a:prstGeom>
           <a:solidFill>
-            <a:srgbClr val="131A2A"/>
+            <a:srgbClr val="121018"/>
           </a:solidFill>
           <a:ln w="19050">
             <a:solidFill>
-              <a:srgbClr val="25314E"/>
+              <a:srgbClr val="302032"/>
             </a:solidFill>
           </a:ln>
         </p:spPr>
@@ -4531,7 +4531,7 @@
             <a:pPr>
               <a:defRPr sz="2000" b="1">
                 <a:solidFill>
-                  <a:srgbClr val="00E5FF"/>
+                  <a:srgbClr val="FF2D55"/>
                 </a:solidFill>
               </a:defRPr>
             </a:pPr>
@@ -4579,7 +4579,7 @@
             <a:pPr>
               <a:defRPr sz="1200">
                 <a:solidFill>
-                  <a:srgbClr val="25314E"/>
+                  <a:srgbClr val="302032"/>
                 </a:solidFill>
               </a:defRPr>
             </a:pPr>
@@ -4603,7 +4603,7 @@
             <a:pPr>
               <a:defRPr sz="1400">
                 <a:solidFill>
-                  <a:srgbClr val="00E5FF"/>
+                  <a:srgbClr val="FF2D55"/>
                 </a:solidFill>
               </a:defRPr>
             </a:pPr>
@@ -4646,7 +4646,7 @@
             <a:avLst/>
           </a:prstGeom>
           <a:solidFill>
-            <a:srgbClr val="0B0F19"/>
+            <a:srgbClr val="09090E"/>
           </a:solidFill>
           <a:ln>
             <a:noFill/>
@@ -4699,7 +4699,7 @@
             <a:pPr>
               <a:defRPr sz="1100" b="1">
                 <a:solidFill>
-                  <a:srgbClr val="00E5FF"/>
+                  <a:srgbClr val="FF2D55"/>
                 </a:solidFill>
               </a:defRPr>
             </a:pPr>
@@ -4759,11 +4759,11 @@
             <a:avLst/>
           </a:prstGeom>
           <a:solidFill>
-            <a:srgbClr val="131A2A"/>
+            <a:srgbClr val="121018"/>
           </a:solidFill>
           <a:ln w="15240">
             <a:solidFill>
-              <a:srgbClr val="25314E"/>
+              <a:srgbClr val="302032"/>
             </a:solidFill>
           </a:ln>
         </p:spPr>
@@ -4814,7 +4814,7 @@
             <a:pPr>
               <a:defRPr sz="1700" b="1">
                 <a:solidFill>
-                  <a:srgbClr val="00E5FF"/>
+                  <a:srgbClr val="FF2D55"/>
                 </a:solidFill>
               </a:defRPr>
             </a:pPr>
@@ -4826,7 +4826,7 @@
             <a:pPr>
               <a:defRPr sz="1400">
                 <a:solidFill>
-                  <a:srgbClr val="94A3B8"/>
+                  <a:srgbClr val="A1A1AA"/>
                 </a:solidFill>
               </a:defRPr>
             </a:pPr>
@@ -4851,11 +4851,11 @@
             <a:avLst/>
           </a:prstGeom>
           <a:solidFill>
-            <a:srgbClr val="131A2A"/>
+            <a:srgbClr val="121018"/>
           </a:solidFill>
           <a:ln w="15240">
             <a:solidFill>
-              <a:srgbClr val="25314E"/>
+              <a:srgbClr val="302032"/>
             </a:solidFill>
           </a:ln>
         </p:spPr>
@@ -4906,7 +4906,7 @@
             <a:pPr>
               <a:defRPr sz="1700" b="1">
                 <a:solidFill>
-                  <a:srgbClr val="00E5FF"/>
+                  <a:srgbClr val="FF2D55"/>
                 </a:solidFill>
               </a:defRPr>
             </a:pPr>
@@ -4918,7 +4918,7 @@
             <a:pPr>
               <a:defRPr sz="1400">
                 <a:solidFill>
-                  <a:srgbClr val="94A3B8"/>
+                  <a:srgbClr val="A1A1AA"/>
                 </a:solidFill>
               </a:defRPr>
             </a:pPr>
@@ -4943,11 +4943,11 @@
             <a:avLst/>
           </a:prstGeom>
           <a:solidFill>
-            <a:srgbClr val="131A2A"/>
+            <a:srgbClr val="121018"/>
           </a:solidFill>
           <a:ln w="15240">
             <a:solidFill>
-              <a:srgbClr val="25314E"/>
+              <a:srgbClr val="302032"/>
             </a:solidFill>
           </a:ln>
         </p:spPr>
@@ -4998,7 +4998,7 @@
             <a:pPr>
               <a:defRPr sz="1700" b="1">
                 <a:solidFill>
-                  <a:srgbClr val="00E5FF"/>
+                  <a:srgbClr val="FF2D55"/>
                 </a:solidFill>
               </a:defRPr>
             </a:pPr>
@@ -5010,7 +5010,7 @@
             <a:pPr>
               <a:defRPr sz="1400">
                 <a:solidFill>
-                  <a:srgbClr val="94A3B8"/>
+                  <a:srgbClr val="A1A1AA"/>
                 </a:solidFill>
               </a:defRPr>
             </a:pPr>
@@ -5035,11 +5035,11 @@
             <a:avLst/>
           </a:prstGeom>
           <a:solidFill>
-            <a:srgbClr val="131A2A"/>
+            <a:srgbClr val="121018"/>
           </a:solidFill>
           <a:ln w="15240">
             <a:solidFill>
-              <a:srgbClr val="25314E"/>
+              <a:srgbClr val="302032"/>
             </a:solidFill>
           </a:ln>
         </p:spPr>
@@ -5090,7 +5090,7 @@
             <a:pPr>
               <a:defRPr sz="1700" b="1">
                 <a:solidFill>
-                  <a:srgbClr val="00E5FF"/>
+                  <a:srgbClr val="FF2D55"/>
                 </a:solidFill>
               </a:defRPr>
             </a:pPr>
@@ -5102,7 +5102,7 @@
             <a:pPr>
               <a:defRPr sz="1400">
                 <a:solidFill>
-                  <a:srgbClr val="94A3B8"/>
+                  <a:srgbClr val="A1A1AA"/>
                 </a:solidFill>
               </a:defRPr>
             </a:pPr>
@@ -5145,7 +5145,7 @@
             <a:avLst/>
           </a:prstGeom>
           <a:solidFill>
-            <a:srgbClr val="0B0F19"/>
+            <a:srgbClr val="09090E"/>
           </a:solidFill>
           <a:ln>
             <a:noFill/>
@@ -5198,7 +5198,7 @@
             <a:pPr>
               <a:defRPr sz="1100" b="1">
                 <a:solidFill>
-                  <a:srgbClr val="00E5FF"/>
+                  <a:srgbClr val="FF2D55"/>
                 </a:solidFill>
               </a:defRPr>
             </a:pPr>
@@ -5258,11 +5258,11 @@
             <a:avLst/>
           </a:prstGeom>
           <a:solidFill>
-            <a:srgbClr val="131A2A"/>
+            <a:srgbClr val="121018"/>
           </a:solidFill>
           <a:ln w="15240">
             <a:solidFill>
-              <a:srgbClr val="25314E"/>
+              <a:srgbClr val="302032"/>
             </a:solidFill>
           </a:ln>
         </p:spPr>
@@ -5325,7 +5325,7 @@
             <a:pPr>
               <a:defRPr sz="1800" b="1">
                 <a:solidFill>
-                  <a:srgbClr val="00E5FF"/>
+                  <a:srgbClr val="FF2D55"/>
                 </a:solidFill>
               </a:defRPr>
             </a:pPr>
@@ -5362,11 +5362,11 @@
             <a:avLst/>
           </a:prstGeom>
           <a:solidFill>
-            <a:srgbClr val="131A2A"/>
+            <a:srgbClr val="121018"/>
           </a:solidFill>
           <a:ln w="15240">
             <a:solidFill>
-              <a:srgbClr val="25314E"/>
+              <a:srgbClr val="302032"/>
             </a:solidFill>
           </a:ln>
         </p:spPr>
@@ -5429,7 +5429,7 @@
             <a:pPr>
               <a:defRPr sz="1800" b="1">
                 <a:solidFill>
-                  <a:srgbClr val="00E5FF"/>
+                  <a:srgbClr val="FF2D55"/>
                 </a:solidFill>
               </a:defRPr>
             </a:pPr>
@@ -5466,11 +5466,11 @@
             <a:avLst/>
           </a:prstGeom>
           <a:solidFill>
-            <a:srgbClr val="131A2A"/>
+            <a:srgbClr val="121018"/>
           </a:solidFill>
           <a:ln w="15240">
             <a:solidFill>
-              <a:srgbClr val="25314E"/>
+              <a:srgbClr val="302032"/>
             </a:solidFill>
           </a:ln>
         </p:spPr>
@@ -5533,7 +5533,7 @@
             <a:pPr>
               <a:defRPr sz="1800" b="1">
                 <a:solidFill>
-                  <a:srgbClr val="00E5FF"/>
+                  <a:srgbClr val="FF2D55"/>
                 </a:solidFill>
               </a:defRPr>
             </a:pPr>
@@ -5570,11 +5570,11 @@
             <a:avLst/>
           </a:prstGeom>
           <a:solidFill>
-            <a:srgbClr val="131A2A"/>
+            <a:srgbClr val="121018"/>
           </a:solidFill>
           <a:ln w="15240">
             <a:solidFill>
-              <a:srgbClr val="25314E"/>
+              <a:srgbClr val="302032"/>
             </a:solidFill>
           </a:ln>
         </p:spPr>
@@ -5637,7 +5637,7 @@
             <a:pPr>
               <a:defRPr sz="1800" b="1">
                 <a:solidFill>
-                  <a:srgbClr val="00E5FF"/>
+                  <a:srgbClr val="FF2D55"/>
                 </a:solidFill>
               </a:defRPr>
             </a:pPr>
@@ -5692,7 +5692,7 @@
             <a:avLst/>
           </a:prstGeom>
           <a:solidFill>
-            <a:srgbClr val="0B0F19"/>
+            <a:srgbClr val="09090E"/>
           </a:solidFill>
           <a:ln>
             <a:noFill/>
@@ -5745,7 +5745,7 @@
             <a:pPr>
               <a:defRPr sz="1100" b="1">
                 <a:solidFill>
-                  <a:srgbClr val="00E5FF"/>
+                  <a:srgbClr val="FF2D55"/>
                 </a:solidFill>
               </a:defRPr>
             </a:pPr>
@@ -5805,11 +5805,11 @@
             <a:avLst/>
           </a:prstGeom>
           <a:solidFill>
-            <a:srgbClr val="131A2A"/>
+            <a:srgbClr val="121018"/>
           </a:solidFill>
           <a:ln w="15240">
             <a:solidFill>
-              <a:srgbClr val="25314E"/>
+              <a:srgbClr val="302032"/>
             </a:solidFill>
           </a:ln>
         </p:spPr>
@@ -5872,7 +5872,7 @@
             <a:pPr>
               <a:defRPr sz="1800" b="1">
                 <a:solidFill>
-                  <a:srgbClr val="00E5FF"/>
+                  <a:srgbClr val="FF2D55"/>
                 </a:solidFill>
               </a:defRPr>
             </a:pPr>
@@ -5909,11 +5909,11 @@
             <a:avLst/>
           </a:prstGeom>
           <a:solidFill>
-            <a:srgbClr val="131A2A"/>
+            <a:srgbClr val="121018"/>
           </a:solidFill>
           <a:ln w="15240">
             <a:solidFill>
-              <a:srgbClr val="25314E"/>
+              <a:srgbClr val="302032"/>
             </a:solidFill>
           </a:ln>
         </p:spPr>
@@ -5976,7 +5976,7 @@
             <a:pPr>
               <a:defRPr sz="1800" b="1">
                 <a:solidFill>
-                  <a:srgbClr val="00E5FF"/>
+                  <a:srgbClr val="FF2D55"/>
                 </a:solidFill>
               </a:defRPr>
             </a:pPr>
@@ -6013,11 +6013,11 @@
             <a:avLst/>
           </a:prstGeom>
           <a:solidFill>
-            <a:srgbClr val="131A2A"/>
+            <a:srgbClr val="121018"/>
           </a:solidFill>
           <a:ln w="15240">
             <a:solidFill>
-              <a:srgbClr val="25314E"/>
+              <a:srgbClr val="302032"/>
             </a:solidFill>
           </a:ln>
         </p:spPr>
@@ -6080,7 +6080,7 @@
             <a:pPr>
               <a:defRPr sz="1800" b="1">
                 <a:solidFill>
-                  <a:srgbClr val="00E5FF"/>
+                  <a:srgbClr val="FF2D55"/>
                 </a:solidFill>
               </a:defRPr>
             </a:pPr>
@@ -6135,7 +6135,7 @@
             <a:avLst/>
           </a:prstGeom>
           <a:solidFill>
-            <a:srgbClr val="0B0F19"/>
+            <a:srgbClr val="09090E"/>
           </a:solidFill>
           <a:ln>
             <a:noFill/>
@@ -6188,7 +6188,7 @@
             <a:pPr>
               <a:defRPr sz="1100" b="1">
                 <a:solidFill>
-                  <a:srgbClr val="00E5FF"/>
+                  <a:srgbClr val="FF2D55"/>
                 </a:solidFill>
               </a:defRPr>
             </a:pPr>
@@ -6248,11 +6248,11 @@
             <a:avLst/>
           </a:prstGeom>
           <a:solidFill>
-            <a:srgbClr val="131A2A"/>
+            <a:srgbClr val="121018"/>
           </a:solidFill>
           <a:ln>
             <a:solidFill>
-              <a:srgbClr val="25314E"/>
+              <a:srgbClr val="302032"/>
             </a:solidFill>
           </a:ln>
         </p:spPr>
@@ -6303,7 +6303,7 @@
             <a:pPr>
               <a:defRPr sz="1900" b="1">
                 <a:solidFill>
-                  <a:srgbClr val="00E5FF"/>
+                  <a:srgbClr val="FF2D55"/>
                 </a:solidFill>
               </a:defRPr>
             </a:pPr>
@@ -6388,11 +6388,11 @@
             <a:avLst/>
           </a:prstGeom>
           <a:solidFill>
-            <a:srgbClr val="131A2A"/>
+            <a:srgbClr val="121018"/>
           </a:solidFill>
           <a:ln>
             <a:solidFill>
-              <a:srgbClr val="25314E"/>
+              <a:srgbClr val="302032"/>
             </a:solidFill>
           </a:ln>
         </p:spPr>
@@ -6546,7 +6546,7 @@
             <a:avLst/>
           </a:prstGeom>
           <a:solidFill>
-            <a:srgbClr val="0B0F19"/>
+            <a:srgbClr val="09090E"/>
           </a:solidFill>
           <a:ln>
             <a:noFill/>
@@ -6599,7 +6599,7 @@
             <a:pPr>
               <a:defRPr sz="1100" b="1">
                 <a:solidFill>
-                  <a:srgbClr val="00E5FF"/>
+                  <a:srgbClr val="FF2D55"/>
                 </a:solidFill>
               </a:defRPr>
             </a:pPr>
@@ -6659,11 +6659,11 @@
             <a:avLst/>
           </a:prstGeom>
           <a:solidFill>
-            <a:srgbClr val="131A2A"/>
+            <a:srgbClr val="121018"/>
           </a:solidFill>
           <a:ln>
             <a:solidFill>
-              <a:srgbClr val="25314E"/>
+              <a:srgbClr val="302032"/>
             </a:solidFill>
           </a:ln>
         </p:spPr>
@@ -6714,7 +6714,7 @@
             <a:pPr>
               <a:defRPr sz="1200" b="1">
                 <a:solidFill>
-                  <a:srgbClr val="00E5FF"/>
+                  <a:srgbClr val="FF2D55"/>
                 </a:solidFill>
               </a:defRPr>
             </a:pPr>
@@ -6738,7 +6738,7 @@
             <a:pPr>
               <a:defRPr sz="1400">
                 <a:solidFill>
-                  <a:srgbClr val="94A3B8"/>
+                  <a:srgbClr val="A1A1AA"/>
                 </a:solidFill>
               </a:defRPr>
             </a:pPr>
@@ -6763,11 +6763,11 @@
             <a:avLst/>
           </a:prstGeom>
           <a:solidFill>
-            <a:srgbClr val="131A2A"/>
+            <a:srgbClr val="121018"/>
           </a:solidFill>
           <a:ln>
             <a:solidFill>
-              <a:srgbClr val="25314E"/>
+              <a:srgbClr val="302032"/>
             </a:solidFill>
           </a:ln>
         </p:spPr>
@@ -6818,7 +6818,7 @@
             <a:pPr>
               <a:defRPr sz="1200" b="1">
                 <a:solidFill>
-                  <a:srgbClr val="00E5FF"/>
+                  <a:srgbClr val="FF2D55"/>
                 </a:solidFill>
               </a:defRPr>
             </a:pPr>
@@ -6842,7 +6842,7 @@
             <a:pPr>
               <a:defRPr sz="1400">
                 <a:solidFill>
-                  <a:srgbClr val="94A3B8"/>
+                  <a:srgbClr val="A1A1AA"/>
                 </a:solidFill>
               </a:defRPr>
             </a:pPr>
@@ -6867,11 +6867,11 @@
             <a:avLst/>
           </a:prstGeom>
           <a:solidFill>
-            <a:srgbClr val="131A2A"/>
+            <a:srgbClr val="121018"/>
           </a:solidFill>
           <a:ln>
             <a:solidFill>
-              <a:srgbClr val="25314E"/>
+              <a:srgbClr val="302032"/>
             </a:solidFill>
           </a:ln>
         </p:spPr>
@@ -6922,7 +6922,7 @@
             <a:pPr>
               <a:defRPr sz="1200" b="1">
                 <a:solidFill>
-                  <a:srgbClr val="00E5FF"/>
+                  <a:srgbClr val="FF2D55"/>
                 </a:solidFill>
               </a:defRPr>
             </a:pPr>
@@ -6946,7 +6946,7 @@
             <a:pPr>
               <a:defRPr sz="1400">
                 <a:solidFill>
-                  <a:srgbClr val="94A3B8"/>
+                  <a:srgbClr val="A1A1AA"/>
                 </a:solidFill>
               </a:defRPr>
             </a:pPr>
@@ -6989,7 +6989,7 @@
             <a:avLst/>
           </a:prstGeom>
           <a:solidFill>
-            <a:srgbClr val="0B0F19"/>
+            <a:srgbClr val="09090E"/>
           </a:solidFill>
           <a:ln>
             <a:noFill/>
@@ -7042,7 +7042,7 @@
             <a:pPr>
               <a:defRPr sz="1100" b="1">
                 <a:solidFill>
-                  <a:srgbClr val="00E5FF"/>
+                  <a:srgbClr val="FF2D55"/>
                 </a:solidFill>
               </a:defRPr>
             </a:pPr>
@@ -7102,11 +7102,11 @@
             <a:avLst/>
           </a:prstGeom>
           <a:solidFill>
-            <a:srgbClr val="131A2A"/>
+            <a:srgbClr val="121018"/>
           </a:solidFill>
           <a:ln>
             <a:solidFill>
-              <a:srgbClr val="25314E"/>
+              <a:srgbClr val="302032"/>
             </a:solidFill>
           </a:ln>
         </p:spPr>
@@ -7169,7 +7169,7 @@
             <a:pPr>
               <a:defRPr sz="1900" b="1">
                 <a:solidFill>
-                  <a:srgbClr val="00E5FF"/>
+                  <a:srgbClr val="FF2D55"/>
                 </a:solidFill>
               </a:defRPr>
             </a:pPr>
@@ -7206,11 +7206,11 @@
             <a:avLst/>
           </a:prstGeom>
           <a:solidFill>
-            <a:srgbClr val="131A2A"/>
+            <a:srgbClr val="121018"/>
           </a:solidFill>
           <a:ln>
             <a:solidFill>
-              <a:srgbClr val="25314E"/>
+              <a:srgbClr val="302032"/>
             </a:solidFill>
           </a:ln>
         </p:spPr>
@@ -7273,7 +7273,7 @@
             <a:pPr>
               <a:defRPr sz="1900" b="1">
                 <a:solidFill>
-                  <a:srgbClr val="00E5FF"/>
+                  <a:srgbClr val="FF2D55"/>
                 </a:solidFill>
               </a:defRPr>
             </a:pPr>
@@ -7310,11 +7310,11 @@
             <a:avLst/>
           </a:prstGeom>
           <a:solidFill>
-            <a:srgbClr val="131A2A"/>
+            <a:srgbClr val="121018"/>
           </a:solidFill>
           <a:ln>
             <a:solidFill>
-              <a:srgbClr val="25314E"/>
+              <a:srgbClr val="302032"/>
             </a:solidFill>
           </a:ln>
         </p:spPr>
@@ -7377,7 +7377,7 @@
             <a:pPr>
               <a:defRPr sz="1900" b="1">
                 <a:solidFill>
-                  <a:srgbClr val="00E5FF"/>
+                  <a:srgbClr val="FF2D55"/>
                 </a:solidFill>
               </a:defRPr>
             </a:pPr>
@@ -7432,7 +7432,7 @@
             <a:avLst/>
           </a:prstGeom>
           <a:solidFill>
-            <a:srgbClr val="0B0F19"/>
+            <a:srgbClr val="09090E"/>
           </a:solidFill>
           <a:ln>
             <a:noFill/>
@@ -7485,7 +7485,7 @@
             <a:pPr>
               <a:defRPr sz="1100" b="1">
                 <a:solidFill>
-                  <a:srgbClr val="00E5FF"/>
+                  <a:srgbClr val="FF2D55"/>
                 </a:solidFill>
               </a:defRPr>
             </a:pPr>
@@ -7545,11 +7545,11 @@
             <a:avLst/>
           </a:prstGeom>
           <a:solidFill>
-            <a:srgbClr val="131A2A"/>
+            <a:srgbClr val="121018"/>
           </a:solidFill>
           <a:ln>
             <a:solidFill>
-              <a:srgbClr val="25314E"/>
+              <a:srgbClr val="302032"/>
             </a:solidFill>
           </a:ln>
         </p:spPr>
@@ -7600,7 +7600,7 @@
             <a:pPr>
               <a:defRPr sz="1200" b="1">
                 <a:solidFill>
-                  <a:srgbClr val="00E5FF"/>
+                  <a:srgbClr val="FF2D55"/>
                 </a:solidFill>
               </a:defRPr>
             </a:pPr>
@@ -7624,7 +7624,7 @@
             <a:pPr>
               <a:defRPr sz="1400">
                 <a:solidFill>
-                  <a:srgbClr val="94A3B8"/>
+                  <a:srgbClr val="A1A1AA"/>
                 </a:solidFill>
               </a:defRPr>
             </a:pPr>
@@ -7649,11 +7649,11 @@
             <a:avLst/>
           </a:prstGeom>
           <a:solidFill>
-            <a:srgbClr val="131A2A"/>
+            <a:srgbClr val="121018"/>
           </a:solidFill>
           <a:ln>
             <a:solidFill>
-              <a:srgbClr val="25314E"/>
+              <a:srgbClr val="302032"/>
             </a:solidFill>
           </a:ln>
         </p:spPr>
@@ -7704,7 +7704,7 @@
             <a:pPr>
               <a:defRPr sz="1200" b="1">
                 <a:solidFill>
-                  <a:srgbClr val="00E5FF"/>
+                  <a:srgbClr val="FF2D55"/>
                 </a:solidFill>
               </a:defRPr>
             </a:pPr>
@@ -7728,7 +7728,7 @@
             <a:pPr>
               <a:defRPr sz="1400">
                 <a:solidFill>
-                  <a:srgbClr val="94A3B8"/>
+                  <a:srgbClr val="A1A1AA"/>
                 </a:solidFill>
               </a:defRPr>
             </a:pPr>
@@ -7753,11 +7753,11 @@
             <a:avLst/>
           </a:prstGeom>
           <a:solidFill>
-            <a:srgbClr val="131A2A"/>
+            <a:srgbClr val="121018"/>
           </a:solidFill>
           <a:ln>
             <a:solidFill>
-              <a:srgbClr val="25314E"/>
+              <a:srgbClr val="302032"/>
             </a:solidFill>
           </a:ln>
         </p:spPr>
@@ -7808,7 +7808,7 @@
             <a:pPr>
               <a:defRPr sz="1200" b="1">
                 <a:solidFill>
-                  <a:srgbClr val="00E5FF"/>
+                  <a:srgbClr val="FF2D55"/>
                 </a:solidFill>
               </a:defRPr>
             </a:pPr>
@@ -7832,7 +7832,7 @@
             <a:pPr>
               <a:defRPr sz="1400">
                 <a:solidFill>
-                  <a:srgbClr val="94A3B8"/>
+                  <a:srgbClr val="A1A1AA"/>
                 </a:solidFill>
               </a:defRPr>
             </a:pPr>
@@ -7875,7 +7875,7 @@
             <a:avLst/>
           </a:prstGeom>
           <a:solidFill>
-            <a:srgbClr val="0B0F19"/>
+            <a:srgbClr val="09090E"/>
           </a:solidFill>
           <a:ln>
             <a:noFill/>
@@ -7928,7 +7928,7 @@
             <a:pPr>
               <a:defRPr sz="1100" b="1">
                 <a:solidFill>
-                  <a:srgbClr val="00E5FF"/>
+                  <a:srgbClr val="FF2D55"/>
                 </a:solidFill>
               </a:defRPr>
             </a:pPr>
@@ -7988,11 +7988,11 @@
             <a:avLst/>
           </a:prstGeom>
           <a:solidFill>
-            <a:srgbClr val="131A2A"/>
+            <a:srgbClr val="121018"/>
           </a:solidFill>
           <a:ln>
             <a:solidFill>
-              <a:srgbClr val="25314E"/>
+              <a:srgbClr val="302032"/>
             </a:solidFill>
           </a:ln>
         </p:spPr>
@@ -8043,7 +8043,7 @@
             <a:pPr>
               <a:defRPr sz="1800" b="1">
                 <a:solidFill>
-                  <a:srgbClr val="00E5FF"/>
+                  <a:srgbClr val="FF2D55"/>
                 </a:solidFill>
               </a:defRPr>
             </a:pPr>
@@ -8055,7 +8055,7 @@
             <a:pPr>
               <a:defRPr sz="1300">
                 <a:solidFill>
-                  <a:srgbClr val="94A3B8"/>
+                  <a:srgbClr val="A1A1AA"/>
                 </a:solidFill>
               </a:defRPr>
             </a:pPr>
@@ -8080,11 +8080,11 @@
             <a:avLst/>
           </a:prstGeom>
           <a:solidFill>
-            <a:srgbClr val="131A2A"/>
+            <a:srgbClr val="121018"/>
           </a:solidFill>
           <a:ln>
             <a:solidFill>
-              <a:srgbClr val="25314E"/>
+              <a:srgbClr val="302032"/>
             </a:solidFill>
           </a:ln>
         </p:spPr>
@@ -8135,7 +8135,7 @@
             <a:pPr>
               <a:defRPr sz="1800" b="1">
                 <a:solidFill>
-                  <a:srgbClr val="00E5FF"/>
+                  <a:srgbClr val="FF2D55"/>
                 </a:solidFill>
               </a:defRPr>
             </a:pPr>
@@ -8147,7 +8147,7 @@
             <a:pPr>
               <a:defRPr sz="1300">
                 <a:solidFill>
-                  <a:srgbClr val="94A3B8"/>
+                  <a:srgbClr val="A1A1AA"/>
                 </a:solidFill>
               </a:defRPr>
             </a:pPr>
@@ -8172,11 +8172,11 @@
             <a:avLst/>
           </a:prstGeom>
           <a:solidFill>
-            <a:srgbClr val="131A2A"/>
+            <a:srgbClr val="121018"/>
           </a:solidFill>
           <a:ln>
             <a:solidFill>
-              <a:srgbClr val="25314E"/>
+              <a:srgbClr val="302032"/>
             </a:solidFill>
           </a:ln>
         </p:spPr>
@@ -8227,7 +8227,7 @@
             <a:pPr>
               <a:defRPr sz="1800" b="1">
                 <a:solidFill>
-                  <a:srgbClr val="00E5FF"/>
+                  <a:srgbClr val="FF2D55"/>
                 </a:solidFill>
               </a:defRPr>
             </a:pPr>
@@ -8239,7 +8239,7 @@
             <a:pPr>
               <a:defRPr sz="1300">
                 <a:solidFill>
-                  <a:srgbClr val="94A3B8"/>
+                  <a:srgbClr val="A1A1AA"/>
                 </a:solidFill>
               </a:defRPr>
             </a:pPr>
@@ -8264,11 +8264,11 @@
             <a:avLst/>
           </a:prstGeom>
           <a:solidFill>
-            <a:srgbClr val="131A2A"/>
+            <a:srgbClr val="121018"/>
           </a:solidFill>
           <a:ln>
             <a:solidFill>
-              <a:srgbClr val="25314E"/>
+              <a:srgbClr val="302032"/>
             </a:solidFill>
           </a:ln>
         </p:spPr>
@@ -8319,7 +8319,7 @@
             <a:pPr>
               <a:defRPr sz="1800" b="1">
                 <a:solidFill>
-                  <a:srgbClr val="00E5FF"/>
+                  <a:srgbClr val="FF2D55"/>
                 </a:solidFill>
               </a:defRPr>
             </a:pPr>
@@ -8331,7 +8331,7 @@
             <a:pPr>
               <a:defRPr sz="1300">
                 <a:solidFill>
-                  <a:srgbClr val="94A3B8"/>
+                  <a:srgbClr val="A1A1AA"/>
                 </a:solidFill>
               </a:defRPr>
             </a:pPr>
@@ -8356,11 +8356,11 @@
             <a:avLst/>
           </a:prstGeom>
           <a:solidFill>
-            <a:srgbClr val="131A2A"/>
+            <a:srgbClr val="121018"/>
           </a:solidFill>
           <a:ln>
             <a:solidFill>
-              <a:srgbClr val="25314E"/>
+              <a:srgbClr val="302032"/>
             </a:solidFill>
           </a:ln>
         </p:spPr>
@@ -8411,7 +8411,7 @@
             <a:pPr>
               <a:defRPr sz="1800" b="1">
                 <a:solidFill>
-                  <a:srgbClr val="00E5FF"/>
+                  <a:srgbClr val="FF2D55"/>
                 </a:solidFill>
               </a:defRPr>
             </a:pPr>
@@ -8423,7 +8423,7 @@
             <a:pPr>
               <a:defRPr sz="1300">
                 <a:solidFill>
-                  <a:srgbClr val="94A3B8"/>
+                  <a:srgbClr val="A1A1AA"/>
                 </a:solidFill>
               </a:defRPr>
             </a:pPr>
@@ -8448,11 +8448,11 @@
             <a:avLst/>
           </a:prstGeom>
           <a:solidFill>
-            <a:srgbClr val="131A2A"/>
+            <a:srgbClr val="121018"/>
           </a:solidFill>
           <a:ln>
             <a:solidFill>
-              <a:srgbClr val="25314E"/>
+              <a:srgbClr val="302032"/>
             </a:solidFill>
           </a:ln>
         </p:spPr>
@@ -8503,7 +8503,7 @@
             <a:pPr>
               <a:defRPr sz="1800" b="1">
                 <a:solidFill>
-                  <a:srgbClr val="00E5FF"/>
+                  <a:srgbClr val="FF2D55"/>
                 </a:solidFill>
               </a:defRPr>
             </a:pPr>
@@ -8515,7 +8515,7 @@
             <a:pPr>
               <a:defRPr sz="1300">
                 <a:solidFill>
-                  <a:srgbClr val="94A3B8"/>
+                  <a:srgbClr val="A1A1AA"/>
                 </a:solidFill>
               </a:defRPr>
             </a:pPr>

--- a/Pathfinder_Presentation_Dileep_Bommali.pptx
+++ b/Pathfinder_Presentation_Dileep_Bommali.pptx
@@ -6,15 +6,15 @@
   </p:sldMasterIdLst>
   <p:sldIdLst>
     <p:sldId id="256" r:id="rId7"/>
-    <p:sldId id="257" r:id="rId9"/>
-    <p:sldId id="258" r:id="rId10"/>
-    <p:sldId id="259" r:id="rId11"/>
-    <p:sldId id="260" r:id="rId12"/>
-    <p:sldId id="261" r:id="rId13"/>
-    <p:sldId id="262" r:id="rId14"/>
-    <p:sldId id="263" r:id="rId15"/>
-    <p:sldId id="264" r:id="rId16"/>
-    <p:sldId id="265" r:id="rId17"/>
+    <p:sldId id="257" r:id="rId8"/>
+    <p:sldId id="258" r:id="rId9"/>
+    <p:sldId id="259" r:id="rId10"/>
+    <p:sldId id="260" r:id="rId11"/>
+    <p:sldId id="261" r:id="rId12"/>
+    <p:sldId id="262" r:id="rId13"/>
+    <p:sldId id="263" r:id="rId14"/>
+    <p:sldId id="264" r:id="rId15"/>
+    <p:sldId id="265" r:id="rId16"/>
   </p:sldIdLst>
   <p:sldSz cx="12191695" cy="6858000" type="screen4x3"/>
   <p:notesSz cx="6858000" cy="9144000"/>
@@ -114,1056 +114,6 @@
     </a:lvl9pPr>
   </p:defaultTextStyle>
 </p:presentation>
-</file>
-
-<file path=ppt/notesMasters/notesMaster1.xml><?xml version="1.0" encoding="utf-8"?>
-<p:notesMaster xmlns:a="http://schemas.openxmlformats.org/drawingml/2006/main" xmlns:p="http://schemas.openxmlformats.org/presentationml/2006/main" xmlns:r="http://schemas.openxmlformats.org/officeDocument/2006/relationships">
-  <p:cSld>
-    <p:bg>
-      <p:bgRef idx="1001">
-        <a:schemeClr val="bg1"/>
-      </p:bgRef>
-    </p:bg>
-    <p:spTree>
-      <p:nvGrpSpPr>
-        <p:cNvPr id="1" name=""/>
-        <p:cNvGrpSpPr/>
-        <p:nvPr/>
-      </p:nvGrpSpPr>
-      <p:grpSpPr>
-        <a:xfrm>
-          <a:off x="0" y="0"/>
-          <a:ext cx="0" cy="0"/>
-          <a:chOff x="0" y="0"/>
-          <a:chExt cx="0" cy="0"/>
-        </a:xfrm>
-      </p:grpSpPr>
-      <p:sp>
-        <p:nvSpPr>
-          <p:cNvPr id="2" name="Header Placeholder 1"/>
-          <p:cNvSpPr>
-            <a:spLocks noGrp="1"/>
-          </p:cNvSpPr>
-          <p:nvPr>
-            <p:ph type="hdr" sz="quarter"/>
-          </p:nvPr>
-        </p:nvSpPr>
-        <p:spPr>
-          <a:xfrm>
-            <a:off x="0" y="0"/>
-            <a:ext cx="2971800" cy="457200"/>
-          </a:xfrm>
-          <a:prstGeom prst="rect">
-            <a:avLst/>
-          </a:prstGeom>
-        </p:spPr>
-        <p:txBody>
-          <a:bodyPr vert="horz" lIns="91440" tIns="45720" rIns="91440" bIns="45720" rtlCol="0"/>
-          <a:lstStyle>
-            <a:lvl1pPr algn="l">
-              <a:defRPr sz="1200"/>
-            </a:lvl1pPr>
-          </a:lstStyle>
-          <a:p>
-            <a:endParaRPr lang="en-US"/>
-          </a:p>
-        </p:txBody>
-      </p:sp>
-      <p:sp>
-        <p:nvSpPr>
-          <p:cNvPr id="3" name="Date Placeholder 2"/>
-          <p:cNvSpPr>
-            <a:spLocks noGrp="1"/>
-          </p:cNvSpPr>
-          <p:nvPr>
-            <p:ph type="dt" idx="1"/>
-          </p:nvPr>
-        </p:nvSpPr>
-        <p:spPr>
-          <a:xfrm>
-            <a:off x="3884613" y="0"/>
-            <a:ext cx="2971800" cy="457200"/>
-          </a:xfrm>
-          <a:prstGeom prst="rect">
-            <a:avLst/>
-          </a:prstGeom>
-        </p:spPr>
-        <p:txBody>
-          <a:bodyPr vert="horz" lIns="91440" tIns="45720" rIns="91440" bIns="45720" rtlCol="0"/>
-          <a:lstStyle>
-            <a:lvl1pPr algn="r">
-              <a:defRPr sz="1200"/>
-            </a:lvl1pPr>
-          </a:lstStyle>
-          <a:p>
-            <a:fld id="{0F89C1C7-3DCD-1040-A9CF-14679D8B5DDD}" type="datetimeFigureOut">
-              <a:rPr lang="en-US" smtClean="0"/>
-              <a:t>10/17/16</a:t>
-            </a:fld>
-            <a:endParaRPr lang="en-US"/>
-          </a:p>
-        </p:txBody>
-      </p:sp>
-      <p:sp>
-        <p:nvSpPr>
-          <p:cNvPr id="4" name="Slide Image Placeholder 3"/>
-          <p:cNvSpPr>
-            <a:spLocks noGrp="1" noRot="1" noChangeAspect="1"/>
-          </p:cNvSpPr>
-          <p:nvPr>
-            <p:ph type="sldImg" idx="2"/>
-          </p:nvPr>
-        </p:nvSpPr>
-        <p:spPr>
-          <a:xfrm>
-            <a:off x="1143000" y="685800"/>
-            <a:ext cx="4572000" cy="3429000"/>
-          </a:xfrm>
-          <a:prstGeom prst="rect">
-            <a:avLst/>
-          </a:prstGeom>
-          <a:noFill/>
-          <a:ln w="12700">
-            <a:solidFill>
-              <a:prstClr val="black"/>
-            </a:solidFill>
-          </a:ln>
-        </p:spPr>
-        <p:txBody>
-          <a:bodyPr vert="horz" lIns="91440" tIns="45720" rIns="91440" bIns="45720" rtlCol="0" anchor="ctr"/>
-          <a:lstStyle/>
-          <a:p>
-            <a:endParaRPr lang="en-US"/>
-          </a:p>
-        </p:txBody>
-      </p:sp>
-      <p:sp>
-        <p:nvSpPr>
-          <p:cNvPr id="5" name="Notes Placeholder 4"/>
-          <p:cNvSpPr>
-            <a:spLocks noGrp="1"/>
-          </p:cNvSpPr>
-          <p:nvPr>
-            <p:ph type="body" sz="quarter" idx="3"/>
-          </p:nvPr>
-        </p:nvSpPr>
-        <p:spPr>
-          <a:xfrm>
-            <a:off x="685800" y="4343400"/>
-            <a:ext cx="5486400" cy="4114800"/>
-          </a:xfrm>
-          <a:prstGeom prst="rect">
-            <a:avLst/>
-          </a:prstGeom>
-        </p:spPr>
-        <p:txBody>
-          <a:bodyPr vert="horz" lIns="91440" tIns="45720" rIns="91440" bIns="45720" rtlCol="0"/>
-          <a:lstStyle/>
-          <a:p>
-            <a:pPr lvl="0"/>
-            <a:r>
-              <a:rPr lang="en-US" smtClean="0"/>
-              <a:t>Click to edit Master text styles</a:t>
-            </a:r>
-          </a:p>
-          <a:p>
-            <a:pPr lvl="1"/>
-            <a:r>
-              <a:rPr lang="en-US" smtClean="0"/>
-              <a:t>Second level</a:t>
-            </a:r>
-          </a:p>
-          <a:p>
-            <a:pPr lvl="2"/>
-            <a:r>
-              <a:rPr lang="en-US" smtClean="0"/>
-              <a:t>Third level</a:t>
-            </a:r>
-          </a:p>
-          <a:p>
-            <a:pPr lvl="3"/>
-            <a:r>
-              <a:rPr lang="en-US" smtClean="0"/>
-              <a:t>Fourth level</a:t>
-            </a:r>
-          </a:p>
-          <a:p>
-            <a:pPr lvl="4"/>
-            <a:r>
-              <a:rPr lang="en-US" smtClean="0"/>
-              <a:t>Fifth level</a:t>
-            </a:r>
-            <a:endParaRPr lang="en-US"/>
-          </a:p>
-        </p:txBody>
-      </p:sp>
-      <p:sp>
-        <p:nvSpPr>
-          <p:cNvPr id="6" name="Footer Placeholder 5"/>
-          <p:cNvSpPr>
-            <a:spLocks noGrp="1"/>
-          </p:cNvSpPr>
-          <p:nvPr>
-            <p:ph type="ftr" sz="quarter" idx="4"/>
-          </p:nvPr>
-        </p:nvSpPr>
-        <p:spPr>
-          <a:xfrm>
-            <a:off x="0" y="8685213"/>
-            <a:ext cx="2971800" cy="457200"/>
-          </a:xfrm>
-          <a:prstGeom prst="rect">
-            <a:avLst/>
-          </a:prstGeom>
-        </p:spPr>
-        <p:txBody>
-          <a:bodyPr vert="horz" lIns="91440" tIns="45720" rIns="91440" bIns="45720" rtlCol="0" anchor="b"/>
-          <a:lstStyle>
-            <a:lvl1pPr algn="l">
-              <a:defRPr sz="1200"/>
-            </a:lvl1pPr>
-          </a:lstStyle>
-          <a:p>
-            <a:endParaRPr lang="en-US"/>
-          </a:p>
-        </p:txBody>
-      </p:sp>
-      <p:sp>
-        <p:nvSpPr>
-          <p:cNvPr id="7" name="Slide Number Placeholder 6"/>
-          <p:cNvSpPr>
-            <a:spLocks noGrp="1"/>
-          </p:cNvSpPr>
-          <p:nvPr>
-            <p:ph type="sldNum" sz="quarter" idx="5"/>
-          </p:nvPr>
-        </p:nvSpPr>
-        <p:spPr>
-          <a:xfrm>
-            <a:off x="3884613" y="8685213"/>
-            <a:ext cx="2971800" cy="457200"/>
-          </a:xfrm>
-          <a:prstGeom prst="rect">
-            <a:avLst/>
-          </a:prstGeom>
-        </p:spPr>
-        <p:txBody>
-          <a:bodyPr vert="horz" lIns="91440" tIns="45720" rIns="91440" bIns="45720" rtlCol="0" anchor="b"/>
-          <a:lstStyle>
-            <a:lvl1pPr algn="r">
-              <a:defRPr sz="1200"/>
-            </a:lvl1pPr>
-          </a:lstStyle>
-          <a:p>
-            <a:fld id="{BB5E49A5-4136-284D-997B-48E1D791AD67}" type="slidenum">
-              <a:rPr lang="en-US" smtClean="0"/>
-              <a:t>‹#›</a:t>
-            </a:fld>
-            <a:endParaRPr lang="en-US"/>
-          </a:p>
-        </p:txBody>
-      </p:sp>
-    </p:spTree>
-    <p:extLst>
-      <p:ext uri="{BB962C8B-B14F-4D97-AF65-F5344CB8AC3E}">
-        <p14:creationId xmlns:p14="http://schemas.microsoft.com/office/powerpoint/2010/main" val="2623252185"/>
-      </p:ext>
-    </p:extLst>
-  </p:cSld>
-  <p:clrMap bg1="lt1" tx1="dk1" bg2="lt2" tx2="dk2" accent1="accent1" accent2="accent2" accent3="accent3" accent4="accent4" accent5="accent5" accent6="accent6" hlink="hlink" folHlink="folHlink"/>
-  <p:notesStyle>
-    <a:lvl1pPr marL="0" algn="l" defTabSz="457200" rtl="0" eaLnBrk="1" latinLnBrk="0" hangingPunct="1">
-      <a:defRPr sz="1200" kern="1200">
-        <a:solidFill>
-          <a:schemeClr val="tx1"/>
-        </a:solidFill>
-        <a:latin typeface="+mn-lt"/>
-        <a:ea typeface="+mn-ea"/>
-        <a:cs typeface="+mn-cs"/>
-      </a:defRPr>
-    </a:lvl1pPr>
-    <a:lvl2pPr marL="457200" algn="l" defTabSz="457200" rtl="0" eaLnBrk="1" latinLnBrk="0" hangingPunct="1">
-      <a:defRPr sz="1200" kern="1200">
-        <a:solidFill>
-          <a:schemeClr val="tx1"/>
-        </a:solidFill>
-        <a:latin typeface="+mn-lt"/>
-        <a:ea typeface="+mn-ea"/>
-        <a:cs typeface="+mn-cs"/>
-      </a:defRPr>
-    </a:lvl2pPr>
-    <a:lvl3pPr marL="914400" algn="l" defTabSz="457200" rtl="0" eaLnBrk="1" latinLnBrk="0" hangingPunct="1">
-      <a:defRPr sz="1200" kern="1200">
-        <a:solidFill>
-          <a:schemeClr val="tx1"/>
-        </a:solidFill>
-        <a:latin typeface="+mn-lt"/>
-        <a:ea typeface="+mn-ea"/>
-        <a:cs typeface="+mn-cs"/>
-      </a:defRPr>
-    </a:lvl3pPr>
-    <a:lvl4pPr marL="1371600" algn="l" defTabSz="457200" rtl="0" eaLnBrk="1" latinLnBrk="0" hangingPunct="1">
-      <a:defRPr sz="1200" kern="1200">
-        <a:solidFill>
-          <a:schemeClr val="tx1"/>
-        </a:solidFill>
-        <a:latin typeface="+mn-lt"/>
-        <a:ea typeface="+mn-ea"/>
-        <a:cs typeface="+mn-cs"/>
-      </a:defRPr>
-    </a:lvl4pPr>
-    <a:lvl5pPr marL="1828800" algn="l" defTabSz="457200" rtl="0" eaLnBrk="1" latinLnBrk="0" hangingPunct="1">
-      <a:defRPr sz="1200" kern="1200">
-        <a:solidFill>
-          <a:schemeClr val="tx1"/>
-        </a:solidFill>
-        <a:latin typeface="+mn-lt"/>
-        <a:ea typeface="+mn-ea"/>
-        <a:cs typeface="+mn-cs"/>
-      </a:defRPr>
-    </a:lvl5pPr>
-    <a:lvl6pPr marL="2286000" algn="l" defTabSz="457200" rtl="0" eaLnBrk="1" latinLnBrk="0" hangingPunct="1">
-      <a:defRPr sz="1200" kern="1200">
-        <a:solidFill>
-          <a:schemeClr val="tx1"/>
-        </a:solidFill>
-        <a:latin typeface="+mn-lt"/>
-        <a:ea typeface="+mn-ea"/>
-        <a:cs typeface="+mn-cs"/>
-      </a:defRPr>
-    </a:lvl6pPr>
-    <a:lvl7pPr marL="2743200" algn="l" defTabSz="457200" rtl="0" eaLnBrk="1" latinLnBrk="0" hangingPunct="1">
-      <a:defRPr sz="1200" kern="1200">
-        <a:solidFill>
-          <a:schemeClr val="tx1"/>
-        </a:solidFill>
-        <a:latin typeface="+mn-lt"/>
-        <a:ea typeface="+mn-ea"/>
-        <a:cs typeface="+mn-cs"/>
-      </a:defRPr>
-    </a:lvl7pPr>
-    <a:lvl8pPr marL="3200400" algn="l" defTabSz="457200" rtl="0" eaLnBrk="1" latinLnBrk="0" hangingPunct="1">
-      <a:defRPr sz="1200" kern="1200">
-        <a:solidFill>
-          <a:schemeClr val="tx1"/>
-        </a:solidFill>
-        <a:latin typeface="+mn-lt"/>
-        <a:ea typeface="+mn-ea"/>
-        <a:cs typeface="+mn-cs"/>
-      </a:defRPr>
-    </a:lvl8pPr>
-    <a:lvl9pPr marL="3657600" algn="l" defTabSz="457200" rtl="0" eaLnBrk="1" latinLnBrk="0" hangingPunct="1">
-      <a:defRPr sz="1200" kern="1200">
-        <a:solidFill>
-          <a:schemeClr val="tx1"/>
-        </a:solidFill>
-        <a:latin typeface="+mn-lt"/>
-        <a:ea typeface="+mn-ea"/>
-        <a:cs typeface="+mn-cs"/>
-      </a:defRPr>
-    </a:lvl9pPr>
-  </p:notesStyle>
-</p:notesMaster>
-</file>
-
-<file path=ppt/notesSlides/notesSlide1.xml><?xml version="1.0" encoding="utf-8"?>
-<p:notes xmlns:a="http://schemas.openxmlformats.org/drawingml/2006/main" xmlns:p="http://schemas.openxmlformats.org/presentationml/2006/main" xmlns:r="http://schemas.openxmlformats.org/officeDocument/2006/relationships">
-  <p:cSld>
-    <p:spTree>
-      <p:nvGrpSpPr>
-        <p:cNvPr id="1" name=""/>
-        <p:cNvGrpSpPr/>
-        <p:nvPr/>
-      </p:nvGrpSpPr>
-      <p:grpSpPr>
-        <a:xfrm>
-          <a:off x="0" y="0"/>
-          <a:ext cx="0" cy="0"/>
-          <a:chOff x="0" y="0"/>
-          <a:chExt cx="0" cy="0"/>
-        </a:xfrm>
-      </p:grpSpPr>
-      <p:sp>
-        <p:nvSpPr>
-          <p:cNvPr id="2" name="Slide Image Placeholder 1"/>
-          <p:cNvSpPr>
-            <a:spLocks noGrp="1"/>
-          </p:cNvSpPr>
-          <p:nvPr>
-            <p:ph type="sldImg" idx="2"/>
-          </p:nvPr>
-        </p:nvSpPr>
-        <p:spPr/>
-      </p:sp>
-      <p:sp>
-        <p:nvSpPr>
-          <p:cNvPr id="3" name="Notes Placeholder 2"/>
-          <p:cNvSpPr>
-            <a:spLocks noGrp="1"/>
-          </p:cNvSpPr>
-          <p:nvPr>
-            <p:ph type="body" idx="3" sz="quarter"/>
-          </p:nvPr>
-        </p:nvSpPr>
-        <p:spPr/>
-        <p:txBody>
-          <a:bodyPr/>
-          <a:lstStyle/>
-          <a:p>
-            <a:r>
-              <a:t>Good morning everyone. I am Dileep Bommali, and today I am excited to present Pathfinder 2.0 — a full-stack, AI-driven career intelligence platform engineered to bridge the critical gap between academic curriculum and high-growth industry expectations.</a:t>
-            </a:r>
-          </a:p>
-        </p:txBody>
-      </p:sp>
-      <p:sp>
-        <p:nvSpPr>
-          <p:cNvPr id="4" name="Slide Number Placeholder 3"/>
-          <p:cNvSpPr>
-            <a:spLocks noGrp="1"/>
-          </p:cNvSpPr>
-          <p:nvPr>
-            <p:ph type="sldNum" idx="5" sz="quarter"/>
-          </p:nvPr>
-        </p:nvSpPr>
-        <p:spPr/>
-      </p:sp>
-    </p:spTree>
-  </p:cSld>
-  <p:clrMapOvr>
-    <a:masterClrMapping/>
-  </p:clrMapOvr>
-</p:notes>
-</file>
-
-<file path=ppt/notesSlides/notesSlide10.xml><?xml version="1.0" encoding="utf-8"?>
-<p:notes xmlns:a="http://schemas.openxmlformats.org/drawingml/2006/main" xmlns:p="http://schemas.openxmlformats.org/presentationml/2006/main" xmlns:r="http://schemas.openxmlformats.org/officeDocument/2006/relationships">
-  <p:cSld>
-    <p:spTree>
-      <p:nvGrpSpPr>
-        <p:cNvPr id="1" name=""/>
-        <p:cNvGrpSpPr/>
-        <p:nvPr/>
-      </p:nvGrpSpPr>
-      <p:grpSpPr>
-        <a:xfrm>
-          <a:off x="0" y="0"/>
-          <a:ext cx="0" cy="0"/>
-          <a:chOff x="0" y="0"/>
-          <a:chExt cx="0" cy="0"/>
-        </a:xfrm>
-      </p:grpSpPr>
-      <p:sp>
-        <p:nvSpPr>
-          <p:cNvPr id="2" name="Slide Image Placeholder 1"/>
-          <p:cNvSpPr>
-            <a:spLocks noGrp="1"/>
-          </p:cNvSpPr>
-          <p:nvPr>
-            <p:ph type="sldImg" idx="2"/>
-          </p:nvPr>
-        </p:nvSpPr>
-        <p:spPr/>
-      </p:sp>
-      <p:sp>
-        <p:nvSpPr>
-          <p:cNvPr id="3" name="Notes Placeholder 2"/>
-          <p:cNvSpPr>
-            <a:spLocks noGrp="1"/>
-          </p:cNvSpPr>
-          <p:nvPr>
-            <p:ph type="body" idx="3" sz="quarter"/>
-          </p:nvPr>
-        </p:nvSpPr>
-        <p:spPr/>
-        <p:txBody>
-          <a:bodyPr/>
-          <a:lstStyle/>
-          <a:p>
-            <a:r>
-              <a:t>Thank you for your time and attention. Pathfinder represents the future of data-driven student career acceleration. I am now open to your questions.</a:t>
-            </a:r>
-          </a:p>
-        </p:txBody>
-      </p:sp>
-      <p:sp>
-        <p:nvSpPr>
-          <p:cNvPr id="4" name="Slide Number Placeholder 3"/>
-          <p:cNvSpPr>
-            <a:spLocks noGrp="1"/>
-          </p:cNvSpPr>
-          <p:nvPr>
-            <p:ph type="sldNum" idx="5" sz="quarter"/>
-          </p:nvPr>
-        </p:nvSpPr>
-        <p:spPr/>
-      </p:sp>
-    </p:spTree>
-  </p:cSld>
-  <p:clrMapOvr>
-    <a:masterClrMapping/>
-  </p:clrMapOvr>
-</p:notes>
-</file>
-
-<file path=ppt/notesSlides/notesSlide2.xml><?xml version="1.0" encoding="utf-8"?>
-<p:notes xmlns:a="http://schemas.openxmlformats.org/drawingml/2006/main" xmlns:p="http://schemas.openxmlformats.org/presentationml/2006/main" xmlns:r="http://schemas.openxmlformats.org/officeDocument/2006/relationships">
-  <p:cSld>
-    <p:spTree>
-      <p:nvGrpSpPr>
-        <p:cNvPr id="1" name=""/>
-        <p:cNvGrpSpPr/>
-        <p:nvPr/>
-      </p:nvGrpSpPr>
-      <p:grpSpPr>
-        <a:xfrm>
-          <a:off x="0" y="0"/>
-          <a:ext cx="0" cy="0"/>
-          <a:chOff x="0" y="0"/>
-          <a:chExt cx="0" cy="0"/>
-        </a:xfrm>
-      </p:grpSpPr>
-      <p:sp>
-        <p:nvSpPr>
-          <p:cNvPr id="2" name="Slide Image Placeholder 1"/>
-          <p:cNvSpPr>
-            <a:spLocks noGrp="1"/>
-          </p:cNvSpPr>
-          <p:nvPr>
-            <p:ph type="sldImg" idx="2"/>
-          </p:nvPr>
-        </p:nvSpPr>
-        <p:spPr/>
-      </p:sp>
-      <p:sp>
-        <p:nvSpPr>
-          <p:cNvPr id="3" name="Notes Placeholder 2"/>
-          <p:cNvSpPr>
-            <a:spLocks noGrp="1"/>
-          </p:cNvSpPr>
-          <p:nvPr>
-            <p:ph type="body" idx="3" sz="quarter"/>
-          </p:nvPr>
-        </p:nvSpPr>
-        <p:spPr/>
-        <p:txBody>
-          <a:bodyPr/>
-          <a:lstStyle/>
-          <a:p>
-            <a:r>
-              <a:t>Every year, millions of engineering graduates enter the recruitment cycle, yet over 60% face challenges landing core roles. The fundamental problem isn't lack of talent—it's lack of early, data-backed visibility into their placement readiness.</a:t>
-            </a:r>
-          </a:p>
-        </p:txBody>
-      </p:sp>
-      <p:sp>
-        <p:nvSpPr>
-          <p:cNvPr id="4" name="Slide Number Placeholder 3"/>
-          <p:cNvSpPr>
-            <a:spLocks noGrp="1"/>
-          </p:cNvSpPr>
-          <p:nvPr>
-            <p:ph type="sldNum" idx="5" sz="quarter"/>
-          </p:nvPr>
-        </p:nvSpPr>
-        <p:spPr/>
-      </p:sp>
-    </p:spTree>
-  </p:cSld>
-  <p:clrMapOvr>
-    <a:masterClrMapping/>
-  </p:clrMapOvr>
-</p:notes>
-</file>
-
-<file path=ppt/notesSlides/notesSlide3.xml><?xml version="1.0" encoding="utf-8"?>
-<p:notes xmlns:a="http://schemas.openxmlformats.org/drawingml/2006/main" xmlns:p="http://schemas.openxmlformats.org/presentationml/2006/main" xmlns:r="http://schemas.openxmlformats.org/officeDocument/2006/relationships">
-  <p:cSld>
-    <p:spTree>
-      <p:nvGrpSpPr>
-        <p:cNvPr id="1" name=""/>
-        <p:cNvGrpSpPr/>
-        <p:nvPr/>
-      </p:nvGrpSpPr>
-      <p:grpSpPr>
-        <a:xfrm>
-          <a:off x="0" y="0"/>
-          <a:ext cx="0" cy="0"/>
-          <a:chOff x="0" y="0"/>
-          <a:chExt cx="0" cy="0"/>
-        </a:xfrm>
-      </p:grpSpPr>
-      <p:sp>
-        <p:nvSpPr>
-          <p:cNvPr id="2" name="Slide Image Placeholder 1"/>
-          <p:cNvSpPr>
-            <a:spLocks noGrp="1"/>
-          </p:cNvSpPr>
-          <p:nvPr>
-            <p:ph type="sldImg" idx="2"/>
-          </p:nvPr>
-        </p:nvSpPr>
-        <p:spPr/>
-      </p:sp>
-      <p:sp>
-        <p:nvSpPr>
-          <p:cNvPr id="3" name="Notes Placeholder 2"/>
-          <p:cNvSpPr>
-            <a:spLocks noGrp="1"/>
-          </p:cNvSpPr>
-          <p:nvPr>
-            <p:ph type="body" idx="3" sz="quarter"/>
-          </p:nvPr>
-        </p:nvSpPr>
-        <p:spPr/>
-        <p:txBody>
-          <a:bodyPr/>
-          <a:lstStyle/>
-          <a:p>
-            <a:r>
-              <a:t>Pathfinder acts as an autonomous career copilot. It ingests academic metrics, competitive coding, hackathons, and certifications, and provides actionable, step-by-step guidance to reach peak readiness.</a:t>
-            </a:r>
-          </a:p>
-        </p:txBody>
-      </p:sp>
-      <p:sp>
-        <p:nvSpPr>
-          <p:cNvPr id="4" name="Slide Number Placeholder 3"/>
-          <p:cNvSpPr>
-            <a:spLocks noGrp="1"/>
-          </p:cNvSpPr>
-          <p:nvPr>
-            <p:ph type="sldNum" idx="5" sz="quarter"/>
-          </p:nvPr>
-        </p:nvSpPr>
-        <p:spPr/>
-      </p:sp>
-    </p:spTree>
-  </p:cSld>
-  <p:clrMapOvr>
-    <a:masterClrMapping/>
-  </p:clrMapOvr>
-</p:notes>
-</file>
-
-<file path=ppt/notesSlides/notesSlide4.xml><?xml version="1.0" encoding="utf-8"?>
-<p:notes xmlns:a="http://schemas.openxmlformats.org/drawingml/2006/main" xmlns:p="http://schemas.openxmlformats.org/presentationml/2006/main" xmlns:r="http://schemas.openxmlformats.org/officeDocument/2006/relationships">
-  <p:cSld>
-    <p:spTree>
-      <p:nvGrpSpPr>
-        <p:cNvPr id="1" name=""/>
-        <p:cNvGrpSpPr/>
-        <p:nvPr/>
-      </p:nvGrpSpPr>
-      <p:grpSpPr>
-        <a:xfrm>
-          <a:off x="0" y="0"/>
-          <a:ext cx="0" cy="0"/>
-          <a:chOff x="0" y="0"/>
-          <a:chExt cx="0" cy="0"/>
-        </a:xfrm>
-      </p:grpSpPr>
-      <p:sp>
-        <p:nvSpPr>
-          <p:cNvPr id="2" name="Slide Image Placeholder 1"/>
-          <p:cNvSpPr>
-            <a:spLocks noGrp="1"/>
-          </p:cNvSpPr>
-          <p:nvPr>
-            <p:ph type="sldImg" idx="2"/>
-          </p:nvPr>
-        </p:nvSpPr>
-        <p:spPr/>
-      </p:sp>
-      <p:sp>
-        <p:nvSpPr>
-          <p:cNvPr id="3" name="Notes Placeholder 2"/>
-          <p:cNvSpPr>
-            <a:spLocks noGrp="1"/>
-          </p:cNvSpPr>
-          <p:nvPr>
-            <p:ph type="body" idx="3" sz="quarter"/>
-          </p:nvPr>
-        </p:nvSpPr>
-        <p:spPr/>
-        <p:txBody>
-          <a:bodyPr/>
-          <a:lstStyle/>
-          <a:p>
-            <a:r>
-              <a:t>Pathfinder is built on a decoupled, production-grade architecture. The responsive React frontend connects to a lightning-fast FastAPI backend, with sub-100 millisecond inference and end-to-end type safety.</a:t>
-            </a:r>
-          </a:p>
-        </p:txBody>
-      </p:sp>
-      <p:sp>
-        <p:nvSpPr>
-          <p:cNvPr id="4" name="Slide Number Placeholder 3"/>
-          <p:cNvSpPr>
-            <a:spLocks noGrp="1"/>
-          </p:cNvSpPr>
-          <p:nvPr>
-            <p:ph type="sldNum" idx="5" sz="quarter"/>
-          </p:nvPr>
-        </p:nvSpPr>
-        <p:spPr/>
-      </p:sp>
-    </p:spTree>
-  </p:cSld>
-  <p:clrMapOvr>
-    <a:masterClrMapping/>
-  </p:clrMapOvr>
-</p:notes>
-</file>
-
-<file path=ppt/notesSlides/notesSlide5.xml><?xml version="1.0" encoding="utf-8"?>
-<p:notes xmlns:a="http://schemas.openxmlformats.org/drawingml/2006/main" xmlns:p="http://schemas.openxmlformats.org/presentationml/2006/main" xmlns:r="http://schemas.openxmlformats.org/officeDocument/2006/relationships">
-  <p:cSld>
-    <p:spTree>
-      <p:nvGrpSpPr>
-        <p:cNvPr id="1" name=""/>
-        <p:cNvGrpSpPr/>
-        <p:nvPr/>
-      </p:nvGrpSpPr>
-      <p:grpSpPr>
-        <a:xfrm>
-          <a:off x="0" y="0"/>
-          <a:ext cx="0" cy="0"/>
-          <a:chOff x="0" y="0"/>
-          <a:chExt cx="0" cy="0"/>
-        </a:xfrm>
-      </p:grpSpPr>
-      <p:sp>
-        <p:nvSpPr>
-          <p:cNvPr id="2" name="Slide Image Placeholder 1"/>
-          <p:cNvSpPr>
-            <a:spLocks noGrp="1"/>
-          </p:cNvSpPr>
-          <p:nvPr>
-            <p:ph type="sldImg" idx="2"/>
-          </p:nvPr>
-        </p:nvSpPr>
-        <p:spPr/>
-      </p:sp>
-      <p:sp>
-        <p:nvSpPr>
-          <p:cNvPr id="3" name="Notes Placeholder 2"/>
-          <p:cNvSpPr>
-            <a:spLocks noGrp="1"/>
-          </p:cNvSpPr>
-          <p:nvPr>
-            <p:ph type="body" idx="3" sz="quarter"/>
-          </p:nvPr>
-        </p:nvSpPr>
-        <p:spPr/>
-        <p:txBody>
-          <a:bodyPr/>
-          <a:lstStyle/>
-          <a:p>
-            <a:r>
-              <a:t>Rather than guessing based on grades, our ML engine analyzes 8 holistic dimensions across 972 real records. It generates exact probability scores and pinpoints high-impact actions to improve student outcomes.</a:t>
-            </a:r>
-          </a:p>
-        </p:txBody>
-      </p:sp>
-      <p:sp>
-        <p:nvSpPr>
-          <p:cNvPr id="4" name="Slide Number Placeholder 3"/>
-          <p:cNvSpPr>
-            <a:spLocks noGrp="1"/>
-          </p:cNvSpPr>
-          <p:nvPr>
-            <p:ph type="sldNum" idx="5" sz="quarter"/>
-          </p:nvPr>
-        </p:nvSpPr>
-        <p:spPr/>
-      </p:sp>
-    </p:spTree>
-  </p:cSld>
-  <p:clrMapOvr>
-    <a:masterClrMapping/>
-  </p:clrMapOvr>
-</p:notes>
-</file>
-
-<file path=ppt/notesSlides/notesSlide6.xml><?xml version="1.0" encoding="utf-8"?>
-<p:notes xmlns:a="http://schemas.openxmlformats.org/drawingml/2006/main" xmlns:p="http://schemas.openxmlformats.org/presentationml/2006/main" xmlns:r="http://schemas.openxmlformats.org/officeDocument/2006/relationships">
-  <p:cSld>
-    <p:spTree>
-      <p:nvGrpSpPr>
-        <p:cNvPr id="1" name=""/>
-        <p:cNvGrpSpPr/>
-        <p:nvPr/>
-      </p:nvGrpSpPr>
-      <p:grpSpPr>
-        <a:xfrm>
-          <a:off x="0" y="0"/>
-          <a:ext cx="0" cy="0"/>
-          <a:chOff x="0" y="0"/>
-          <a:chExt cx="0" cy="0"/>
-        </a:xfrm>
-      </p:grpSpPr>
-      <p:sp>
-        <p:nvSpPr>
-          <p:cNvPr id="2" name="Slide Image Placeholder 1"/>
-          <p:cNvSpPr>
-            <a:spLocks noGrp="1"/>
-          </p:cNvSpPr>
-          <p:nvPr>
-            <p:ph type="sldImg" idx="2"/>
-          </p:nvPr>
-        </p:nvSpPr>
-        <p:spPr/>
-      </p:sp>
-      <p:sp>
-        <p:nvSpPr>
-          <p:cNvPr id="3" name="Notes Placeholder 2"/>
-          <p:cNvSpPr>
-            <a:spLocks noGrp="1"/>
-          </p:cNvSpPr>
-          <p:nvPr>
-            <p:ph type="body" idx="3" sz="quarter"/>
-          </p:nvPr>
-        </p:nvSpPr>
-        <p:spPr/>
-        <p:txBody>
-          <a:bodyPr/>
-          <a:lstStyle/>
-          <a:p>
-            <a:r>
-              <a:t>When a student selects a career track, Pathfinder pinpoints their technical weaknesses. Google Gemini then generates a tailored, structured roadmap with handpicked exercises.</a:t>
-            </a:r>
-          </a:p>
-        </p:txBody>
-      </p:sp>
-      <p:sp>
-        <p:nvSpPr>
-          <p:cNvPr id="4" name="Slide Number Placeholder 3"/>
-          <p:cNvSpPr>
-            <a:spLocks noGrp="1"/>
-          </p:cNvSpPr>
-          <p:nvPr>
-            <p:ph type="sldNum" idx="5" sz="quarter"/>
-          </p:nvPr>
-        </p:nvSpPr>
-        <p:spPr/>
-      </p:sp>
-    </p:spTree>
-  </p:cSld>
-  <p:clrMapOvr>
-    <a:masterClrMapping/>
-  </p:clrMapOvr>
-</p:notes>
-</file>
-
-<file path=ppt/notesSlides/notesSlide7.xml><?xml version="1.0" encoding="utf-8"?>
-<p:notes xmlns:a="http://schemas.openxmlformats.org/drawingml/2006/main" xmlns:p="http://schemas.openxmlformats.org/presentationml/2006/main" xmlns:r="http://schemas.openxmlformats.org/officeDocument/2006/relationships">
-  <p:cSld>
-    <p:spTree>
-      <p:nvGrpSpPr>
-        <p:cNvPr id="1" name=""/>
-        <p:cNvGrpSpPr/>
-        <p:nvPr/>
-      </p:nvGrpSpPr>
-      <p:grpSpPr>
-        <a:xfrm>
-          <a:off x="0" y="0"/>
-          <a:ext cx="0" cy="0"/>
-          <a:chOff x="0" y="0"/>
-          <a:chExt cx="0" cy="0"/>
-        </a:xfrm>
-      </p:grpSpPr>
-      <p:sp>
-        <p:nvSpPr>
-          <p:cNvPr id="2" name="Slide Image Placeholder 1"/>
-          <p:cNvSpPr>
-            <a:spLocks noGrp="1"/>
-          </p:cNvSpPr>
-          <p:nvPr>
-            <p:ph type="sldImg" idx="2"/>
-          </p:nvPr>
-        </p:nvSpPr>
-        <p:spPr/>
-      </p:sp>
-      <p:sp>
-        <p:nvSpPr>
-          <p:cNvPr id="3" name="Notes Placeholder 2"/>
-          <p:cNvSpPr>
-            <a:spLocks noGrp="1"/>
-          </p:cNvSpPr>
-          <p:nvPr>
-            <p:ph type="body" idx="3" sz="quarter"/>
-          </p:nvPr>
-        </p:nvSpPr>
-        <p:spPr/>
-        <p:txBody>
-          <a:bodyPr/>
-          <a:lstStyle/>
-          <a:p>
-            <a:r>
-              <a:t>We prioritized design excellence. The interactive lamp login, WebGL shader background, and responsive glassmorphic cards make the platform engaging and memorable for users.</a:t>
-            </a:r>
-          </a:p>
-        </p:txBody>
-      </p:sp>
-      <p:sp>
-        <p:nvSpPr>
-          <p:cNvPr id="4" name="Slide Number Placeholder 3"/>
-          <p:cNvSpPr>
-            <a:spLocks noGrp="1"/>
-          </p:cNvSpPr>
-          <p:nvPr>
-            <p:ph type="sldNum" idx="5" sz="quarter"/>
-          </p:nvPr>
-        </p:nvSpPr>
-        <p:spPr/>
-      </p:sp>
-    </p:spTree>
-  </p:cSld>
-  <p:clrMapOvr>
-    <a:masterClrMapping/>
-  </p:clrMapOvr>
-</p:notes>
-</file>
-
-<file path=ppt/notesSlides/notesSlide8.xml><?xml version="1.0" encoding="utf-8"?>
-<p:notes xmlns:a="http://schemas.openxmlformats.org/drawingml/2006/main" xmlns:p="http://schemas.openxmlformats.org/presentationml/2006/main" xmlns:r="http://schemas.openxmlformats.org/officeDocument/2006/relationships">
-  <p:cSld>
-    <p:spTree>
-      <p:nvGrpSpPr>
-        <p:cNvPr id="1" name=""/>
-        <p:cNvGrpSpPr/>
-        <p:nvPr/>
-      </p:nvGrpSpPr>
-      <p:grpSpPr>
-        <a:xfrm>
-          <a:off x="0" y="0"/>
-          <a:ext cx="0" cy="0"/>
-          <a:chOff x="0" y="0"/>
-          <a:chExt cx="0" cy="0"/>
-        </a:xfrm>
-      </p:grpSpPr>
-      <p:sp>
-        <p:nvSpPr>
-          <p:cNvPr id="2" name="Slide Image Placeholder 1"/>
-          <p:cNvSpPr>
-            <a:spLocks noGrp="1"/>
-          </p:cNvSpPr>
-          <p:nvPr>
-            <p:ph type="sldImg" idx="2"/>
-          </p:nvPr>
-        </p:nvSpPr>
-        <p:spPr/>
-      </p:sp>
-      <p:sp>
-        <p:nvSpPr>
-          <p:cNvPr id="3" name="Notes Placeholder 2"/>
-          <p:cNvSpPr>
-            <a:spLocks noGrp="1"/>
-          </p:cNvSpPr>
-          <p:nvPr>
-            <p:ph type="body" idx="3" sz="quarter"/>
-          </p:nvPr>
-        </p:nvSpPr>
-        <p:spPr/>
-        <p:txBody>
-          <a:bodyPr/>
-          <a:lstStyle/>
-          <a:p>
-            <a:r>
-              <a:t>For universities, Pathfinder acts as a command center. Placement officers can track batch readiness, export verified candidate pools, and generate PDF dossiers in seconds.</a:t>
-            </a:r>
-          </a:p>
-        </p:txBody>
-      </p:sp>
-      <p:sp>
-        <p:nvSpPr>
-          <p:cNvPr id="4" name="Slide Number Placeholder 3"/>
-          <p:cNvSpPr>
-            <a:spLocks noGrp="1"/>
-          </p:cNvSpPr>
-          <p:nvPr>
-            <p:ph type="sldNum" idx="5" sz="quarter"/>
-          </p:nvPr>
-        </p:nvSpPr>
-        <p:spPr/>
-      </p:sp>
-    </p:spTree>
-  </p:cSld>
-  <p:clrMapOvr>
-    <a:masterClrMapping/>
-  </p:clrMapOvr>
-</p:notes>
-</file>
-
-<file path=ppt/notesSlides/notesSlide9.xml><?xml version="1.0" encoding="utf-8"?>
-<p:notes xmlns:a="http://schemas.openxmlformats.org/drawingml/2006/main" xmlns:p="http://schemas.openxmlformats.org/presentationml/2006/main" xmlns:r="http://schemas.openxmlformats.org/officeDocument/2006/relationships">
-  <p:cSld>
-    <p:spTree>
-      <p:nvGrpSpPr>
-        <p:cNvPr id="1" name=""/>
-        <p:cNvGrpSpPr/>
-        <p:nvPr/>
-      </p:nvGrpSpPr>
-      <p:grpSpPr>
-        <a:xfrm>
-          <a:off x="0" y="0"/>
-          <a:ext cx="0" cy="0"/>
-          <a:chOff x="0" y="0"/>
-          <a:chExt cx="0" cy="0"/>
-        </a:xfrm>
-      </p:grpSpPr>
-      <p:sp>
-        <p:nvSpPr>
-          <p:cNvPr id="2" name="Slide Image Placeholder 1"/>
-          <p:cNvSpPr>
-            <a:spLocks noGrp="1"/>
-          </p:cNvSpPr>
-          <p:nvPr>
-            <p:ph type="sldImg" idx="2"/>
-          </p:nvPr>
-        </p:nvSpPr>
-        <p:spPr/>
-      </p:sp>
-      <p:sp>
-        <p:nvSpPr>
-          <p:cNvPr id="3" name="Notes Placeholder 2"/>
-          <p:cNvSpPr>
-            <a:spLocks noGrp="1"/>
-          </p:cNvSpPr>
-          <p:nvPr>
-            <p:ph type="body" idx="3" sz="quarter"/>
-          </p:nvPr>
-        </p:nvSpPr>
-        <p:spPr/>
-        <p:txBody>
-          <a:bodyPr/>
-          <a:lstStyle/>
-          <a:p>
-            <a:r>
-              <a:t>Every single module in Pathfinder has undergone comprehensive validation. The API endpoints, machine learning inference, and React build are rock-solid and production-ready.</a:t>
-            </a:r>
-          </a:p>
-        </p:txBody>
-      </p:sp>
-      <p:sp>
-        <p:nvSpPr>
-          <p:cNvPr id="4" name="Slide Number Placeholder 3"/>
-          <p:cNvSpPr>
-            <a:spLocks noGrp="1"/>
-          </p:cNvSpPr>
-          <p:nvPr>
-            <p:ph type="sldNum" idx="5" sz="quarter"/>
-          </p:nvPr>
-        </p:nvSpPr>
-        <p:spPr/>
-      </p:sp>
-    </p:spTree>
-  </p:cSld>
-  <p:clrMapOvr>
-    <a:masterClrMapping/>
-  </p:clrMapOvr>
-</p:notes>
 </file>
 
 <file path=ppt/slideLayouts/slideLayout1.xml><?xml version="1.0" encoding="utf-8"?>
@@ -4162,7 +3112,7 @@
             <a:avLst/>
           </a:prstGeom>
           <a:solidFill>
-            <a:srgbClr val="09090E"/>
+            <a:srgbClr val="06060A"/>
           </a:solidFill>
           <a:ln>
             <a:noFill/>
@@ -4198,18 +3148,18 @@
         </p:nvSpPr>
         <p:spPr>
           <a:xfrm>
-            <a:off x="1097280" y="914400"/>
-            <a:ext cx="9997135" cy="5029200"/>
+            <a:off x="914400" y="731520"/>
+            <a:ext cx="10362895" cy="5303520"/>
           </a:xfrm>
           <a:prstGeom prst="roundRect">
             <a:avLst/>
           </a:prstGeom>
           <a:solidFill>
-            <a:srgbClr val="121018"/>
+            <a:srgbClr val="100E16"/>
           </a:solidFill>
           <a:ln w="19050">
             <a:solidFill>
-              <a:srgbClr val="302032"/>
+              <a:srgbClr val="2E2034"/>
             </a:solidFill>
           </a:ln>
         </p:spPr>
@@ -4243,8 +3193,8 @@
         </p:nvSpPr>
         <p:spPr>
           <a:xfrm>
-            <a:off x="1645920" y="1371600"/>
-            <a:ext cx="8899855" cy="4114800"/>
+            <a:off x="1280160" y="1097280"/>
+            <a:ext cx="9631375" cy="4572000"/>
           </a:xfrm>
           <a:prstGeom prst="rect">
             <a:avLst/>
@@ -4260,7 +3210,7 @@
             <a:pPr algn="ctr">
               <a:defRPr sz="4600" b="1">
                 <a:solidFill>
-                  <a:srgbClr val="FF2D55"/>
+                  <a:srgbClr val="FF1E56"/>
                 </a:solidFill>
               </a:defRPr>
             </a:pPr>
@@ -4270,62 +3220,79 @@
           </a:p>
           <a:p>
             <a:pPr algn="ctr">
-              <a:defRPr sz="2000">
-                <a:solidFill>
-                  <a:srgbClr val="F8FAFC"/>
-                </a:solidFill>
-              </a:defRPr>
-            </a:pPr>
-            <a:r>
-              <a:t>Predictive Placement Analytics &amp; Autonomous AI Career Guidance Platform</a:t>
+              <a:defRPr sz="1800" b="1">
+                <a:solidFill>
+                  <a:srgbClr val="FFFFFF"/>
+                </a:solidFill>
+              </a:defRPr>
+            </a:pPr>
+            <a:r>
+              <a:t>Autonomous Placement Intelligence, ML Eligibility Engine &amp; Multilingual Mentorship Platform</a:t>
+            </a:r>
+          </a:p>
+          <a:p>
+            <a:pPr algn="ctr">
+              <a:defRPr sz="1200">
+                <a:solidFill>
+                  <a:srgbClr val="2E2034"/>
+                </a:solidFill>
+              </a:defRPr>
+            </a:pPr>
+            <a:r>
+              <a:t>━━━━━━━━━━━━━━━━━━━━━━━━━━━━━━━━━━━━━━━━━━━━━━━━━━━</a:t>
+            </a:r>
+          </a:p>
+          <a:p>
+            <a:pPr algn="ctr">
+              <a:defRPr sz="1200" b="1">
+                <a:solidFill>
+                  <a:srgbClr val="A855F7"/>
+                </a:solidFill>
+              </a:defRPr>
+            </a:pPr>
+            <a:r>
+              <a:t>PRODUCTION BENCHMARKS &amp; VERIFIED METRICS</a:t>
             </a:r>
           </a:p>
           <a:p>
             <a:pPr algn="ctr">
               <a:defRPr sz="1400">
                 <a:solidFill>
-                  <a:srgbClr val="302032"/>
-                </a:solidFill>
-              </a:defRPr>
-            </a:pPr>
-            <a:r>
-              <a:t>━━━━━━━━━━━━━━━━━━━━━━━━━━━━━━━━━━━━━━━━━</a:t>
-            </a:r>
-          </a:p>
-          <a:p>
+                  <a:srgbClr val="A1A1AA"/>
+                </a:solidFill>
+              </a:defRPr>
+            </a:pPr>
+            <a:r>
+              <a:t>972 Verified Student Records across 9 Branches  |  88.2% Calibrated Random Forest Accuracy</a:t>
+            </a:r>
+            <a:br/>
+            <a:r>
+              <a:t>15 Specialized Architecture Tabs  |  23 Deployed Blueprints  |  Sub-15ms WAL Query Latency</a:t>
+            </a:r>
+          </a:p>
+          <a:p>
+            <a:br/>
             <a:pPr algn="ctr">
-              <a:defRPr sz="1800" b="1">
-                <a:solidFill>
-                  <a:srgbClr val="A855F7"/>
-                </a:solidFill>
-              </a:defRPr>
-            </a:pPr>
-            <a:r>
-              <a:t>Developer &amp; Lead Engineer: Dileep Bommali</a:t>
+              <a:defRPr sz="1600" b="1">
+                <a:solidFill>
+                  <a:srgbClr val="FF1E56"/>
+                </a:solidFill>
+              </a:defRPr>
+            </a:pPr>
+            <a:r>
+              <a:t>Lead Architect &amp; Full-Stack Systems Engineer: Dileep Bommali</a:t>
             </a:r>
           </a:p>
           <a:p>
             <a:pPr algn="ctr">
-              <a:defRPr sz="1400">
+              <a:defRPr sz="1200">
                 <a:solidFill>
                   <a:srgbClr val="A1A1AA"/>
                 </a:solidFill>
               </a:defRPr>
             </a:pPr>
             <a:r>
-              <a:t>Stack: React 19 • TypeScript • FastAPI • Scikit-Learn • Google Gemini AI • ThreeUI WebGL</a:t>
-            </a:r>
-          </a:p>
-          <a:p>
-            <a:pPr algn="ctr">
-              <a:defRPr sz="1300">
-                <a:solidFill>
-                  <a:srgbClr val="FF2D55"/>
-                </a:solidFill>
-              </a:defRPr>
-            </a:pPr>
-            <a:r>
-              <a:t>Repository: https://github.com/dileepbommali16-ops/pathfinder</a:t>
+              <a:t>Stack: React 19 • TypeScript • Python FastAPI • Scikit-Learn • Google Gemini 2.0 Flash • SQLite WAL</a:t>
             </a:r>
           </a:p>
         </p:txBody>
@@ -4363,7 +3330,7 @@
             <a:avLst/>
           </a:prstGeom>
           <a:solidFill>
-            <a:srgbClr val="09090E"/>
+            <a:srgbClr val="06060A"/>
           </a:solidFill>
           <a:ln>
             <a:noFill/>
@@ -4399,8 +3366,8 @@
         </p:nvSpPr>
         <p:spPr>
           <a:xfrm>
-            <a:off x="731520" y="457200"/>
-            <a:ext cx="10698480" cy="365760"/>
+            <a:off x="731520" y="365760"/>
+            <a:ext cx="10698480" cy="320040"/>
           </a:xfrm>
           <a:prstGeom prst="rect">
             <a:avLst/>
@@ -4416,12 +3383,12 @@
             <a:pPr>
               <a:defRPr sz="1100" b="1">
                 <a:solidFill>
-                  <a:srgbClr val="FF2D55"/>
-                </a:solidFill>
-              </a:defRPr>
-            </a:pPr>
-            <a:r>
-              <a:t>SUMMARY</a:t>
+                  <a:srgbClr val="FF1E56"/>
+                </a:solidFill>
+              </a:defRPr>
+            </a:pPr>
+            <a:r>
+              <a:t>VERIFICATION &amp; FUTURE VISION</a:t>
             </a:r>
           </a:p>
         </p:txBody>
@@ -4434,8 +3401,8 @@
         </p:nvSpPr>
         <p:spPr>
           <a:xfrm>
-            <a:off x="731520" y="777240"/>
-            <a:ext cx="10698480" cy="731520"/>
+            <a:off x="731520" y="685800"/>
+            <a:ext cx="10698480" cy="594360"/>
           </a:xfrm>
           <a:prstGeom prst="rect">
             <a:avLst/>
@@ -4449,39 +3416,37 @@
           <a:lstStyle/>
           <a:p>
             <a:pPr>
-              <a:defRPr sz="2800" b="1">
-                <a:solidFill>
-                  <a:srgbClr val="F8FAFC"/>
-                </a:solidFill>
-              </a:defRPr>
-            </a:pPr>
-            <a:r>
-              <a:t>Conclusion, Future Horizons &amp; Q&amp;A</a:t>
-            </a:r>
-          </a:p>
-        </p:txBody>
-      </p:sp>
-      <p:sp>
-        <p:nvSpPr>
-          <p:cNvPr id="5" name="Rounded Rectangle 4"/>
+              <a:defRPr sz="2600" b="1">
+                <a:solidFill>
+                  <a:srgbClr val="FFFFFF"/>
+                </a:solidFill>
+              </a:defRPr>
+            </a:pPr>
+            <a:r>
+              <a:t>Production Benchmarks, Roadmap &amp; Open Q&amp;A</a:t>
+            </a:r>
+          </a:p>
+        </p:txBody>
+      </p:sp>
+      <p:sp>
+        <p:nvSpPr>
+          <p:cNvPr id="5" name="Rectangle 4"/>
           <p:cNvSpPr/>
           <p:nvPr/>
         </p:nvSpPr>
         <p:spPr>
           <a:xfrm>
-            <a:off x="1097280" y="1645920"/>
-            <a:ext cx="9997135" cy="4480560"/>
-          </a:xfrm>
-          <a:prstGeom prst="roundRect">
+            <a:off x="731520" y="6400800"/>
+            <a:ext cx="10728655" cy="18288"/>
+          </a:xfrm>
+          <a:prstGeom prst="rect">
             <a:avLst/>
           </a:prstGeom>
           <a:solidFill>
-            <a:srgbClr val="121018"/>
+            <a:srgbClr val="2E2034"/>
           </a:solidFill>
-          <a:ln w="19050">
-            <a:solidFill>
-              <a:srgbClr val="302032"/>
-            </a:solidFill>
+          <a:ln>
+            <a:noFill/>
           </a:ln>
         </p:spPr>
         <p:style>
@@ -4514,8 +3479,88 @@
         </p:nvSpPr>
         <p:spPr>
           <a:xfrm>
-            <a:off x="1463040" y="1920240"/>
-            <a:ext cx="9265615" cy="3931920"/>
+            <a:off x="731520" y="6446520"/>
+            <a:ext cx="10728655" cy="320040"/>
+          </a:xfrm>
+          <a:prstGeom prst="rect">
+            <a:avLst/>
+          </a:prstGeom>
+          <a:noFill/>
+        </p:spPr>
+        <p:txBody>
+          <a:bodyPr wrap="none">
+            <a:spAutoFit/>
+          </a:bodyPr>
+          <a:lstStyle/>
+          <a:p>
+            <a:pPr>
+              <a:defRPr sz="1000">
+                <a:solidFill>
+                  <a:srgbClr val="A1A1AA"/>
+                </a:solidFill>
+              </a:defRPr>
+            </a:pPr>
+            <a:r>
+              <a:t>Slide 10 / 10 • Pathfinder 2.0 • Lead Systems Engineer: Dileep Bommali • https://github.com/dileepbommali16-ops/pathfinder</a:t>
+            </a:r>
+          </a:p>
+        </p:txBody>
+      </p:sp>
+      <p:sp>
+        <p:nvSpPr>
+          <p:cNvPr id="7" name="Rounded Rectangle 6"/>
+          <p:cNvSpPr/>
+          <p:nvPr/>
+        </p:nvSpPr>
+        <p:spPr>
+          <a:xfrm>
+            <a:off x="731520" y="1417320"/>
+            <a:ext cx="3429000" cy="1234440"/>
+          </a:xfrm>
+          <a:prstGeom prst="roundRect">
+            <a:avLst/>
+          </a:prstGeom>
+          <a:solidFill>
+            <a:srgbClr val="100E16"/>
+          </a:solidFill>
+          <a:ln>
+            <a:solidFill>
+              <a:srgbClr val="2E2034"/>
+            </a:solidFill>
+          </a:ln>
+        </p:spPr>
+        <p:style>
+          <a:lnRef idx="1">
+            <a:schemeClr val="accent1"/>
+          </a:lnRef>
+          <a:fillRef idx="3">
+            <a:schemeClr val="accent1"/>
+          </a:fillRef>
+          <a:effectRef idx="2">
+            <a:schemeClr val="accent1"/>
+          </a:effectRef>
+          <a:fontRef idx="minor">
+            <a:schemeClr val="lt1"/>
+          </a:fontRef>
+        </p:style>
+        <p:txBody>
+          <a:bodyPr rtlCol="0" anchor="ctr"/>
+          <a:lstStyle/>
+          <a:p>
+            <a:pPr algn="ctr"/>
+          </a:p>
+        </p:txBody>
+      </p:sp>
+      <p:sp>
+        <p:nvSpPr>
+          <p:cNvPr id="8" name="TextBox 7"/>
+          <p:cNvSpPr txBox="1"/>
+          <p:nvPr/>
+        </p:nvSpPr>
+        <p:spPr>
+          <a:xfrm>
+            <a:off x="914400" y="1554480"/>
+            <a:ext cx="3063240" cy="960120"/>
           </a:xfrm>
           <a:prstGeom prst="rect">
             <a:avLst/>
@@ -4529,86 +3574,598 @@
           <a:lstStyle/>
           <a:p>
             <a:pPr>
-              <a:defRPr sz="2000" b="1">
-                <a:solidFill>
-                  <a:srgbClr val="FF2D55"/>
-                </a:solidFill>
-              </a:defRPr>
-            </a:pPr>
-            <a:r>
-              <a:t>Future Roadmap:</a:t>
-            </a:r>
-          </a:p>
-          <a:p>
-            <a:pPr>
-              <a:defRPr sz="1400">
-                <a:solidFill>
-                  <a:srgbClr val="F8FAFC"/>
-                </a:solidFill>
-              </a:defRPr>
-            </a:pPr>
-            <a:r>
-              <a:t>• AI Voice Mock Interviews: Real-time speech and technical problem-solving analysis.</a:t>
-            </a:r>
-          </a:p>
-          <a:p>
-            <a:pPr>
-              <a:defRPr sz="1400">
-                <a:solidFill>
-                  <a:srgbClr val="F8FAFC"/>
-                </a:solidFill>
-              </a:defRPr>
-            </a:pPr>
-            <a:r>
-              <a:t>• Automated Code Verification: Direct GitHub &amp; LeetCode API integration for continuous skill validation.</a:t>
-            </a:r>
-          </a:p>
-          <a:p>
-            <a:pPr>
-              <a:defRPr sz="1400">
-                <a:solidFill>
-                  <a:srgbClr val="F8FAFC"/>
-                </a:solidFill>
-              </a:defRPr>
-            </a:pPr>
-            <a:r>
-              <a:t>• Multi-Campus Federated Network: Benchmarking placement metrics across peer universities.</a:t>
-            </a:r>
-          </a:p>
-          <a:p>
-            <a:pPr>
-              <a:defRPr sz="1200">
-                <a:solidFill>
-                  <a:srgbClr val="302032"/>
-                </a:solidFill>
-              </a:defRPr>
-            </a:pPr>
-            <a:r>
-              <a:t>━━━━━━━━━━━━━━━━━━━━━━━━━━━━━━━━━━━━━━━━━━━━━━━━━━━</a:t>
-            </a:r>
-          </a:p>
-          <a:p>
-            <a:pPr>
-              <a:defRPr sz="2200" b="1">
+              <a:defRPr sz="1400" b="1">
+                <a:solidFill>
+                  <a:srgbClr val="FF1E56"/>
+                </a:solidFill>
+              </a:defRPr>
+            </a:pPr>
+            <a:r>
+              <a:t>✓ 972 Student Records</a:t>
+            </a:r>
+          </a:p>
+          <a:p>
+            <a:pPr>
+              <a:defRPr sz="1100">
+                <a:solidFill>
+                  <a:srgbClr val="A1A1AA"/>
+                </a:solidFill>
+              </a:defRPr>
+            </a:pPr>
+            <a:r>
+              <a:t>Verified across 9 Engineering disciplines</a:t>
+            </a:r>
+          </a:p>
+        </p:txBody>
+      </p:sp>
+      <p:sp>
+        <p:nvSpPr>
+          <p:cNvPr id="9" name="Rounded Rectangle 8"/>
+          <p:cNvSpPr/>
+          <p:nvPr/>
+        </p:nvSpPr>
+        <p:spPr>
+          <a:xfrm>
+            <a:off x="4343400" y="1417320"/>
+            <a:ext cx="3429000" cy="1234440"/>
+          </a:xfrm>
+          <a:prstGeom prst="roundRect">
+            <a:avLst/>
+          </a:prstGeom>
+          <a:solidFill>
+            <a:srgbClr val="100E16"/>
+          </a:solidFill>
+          <a:ln>
+            <a:solidFill>
+              <a:srgbClr val="2E2034"/>
+            </a:solidFill>
+          </a:ln>
+        </p:spPr>
+        <p:style>
+          <a:lnRef idx="1">
+            <a:schemeClr val="accent1"/>
+          </a:lnRef>
+          <a:fillRef idx="3">
+            <a:schemeClr val="accent1"/>
+          </a:fillRef>
+          <a:effectRef idx="2">
+            <a:schemeClr val="accent1"/>
+          </a:effectRef>
+          <a:fontRef idx="minor">
+            <a:schemeClr val="lt1"/>
+          </a:fontRef>
+        </p:style>
+        <p:txBody>
+          <a:bodyPr rtlCol="0" anchor="ctr"/>
+          <a:lstStyle/>
+          <a:p>
+            <a:pPr algn="ctr"/>
+          </a:p>
+        </p:txBody>
+      </p:sp>
+      <p:sp>
+        <p:nvSpPr>
+          <p:cNvPr id="10" name="TextBox 9"/>
+          <p:cNvSpPr txBox="1"/>
+          <p:nvPr/>
+        </p:nvSpPr>
+        <p:spPr>
+          <a:xfrm>
+            <a:off x="4526280" y="1554480"/>
+            <a:ext cx="3063240" cy="960120"/>
+          </a:xfrm>
+          <a:prstGeom prst="rect">
+            <a:avLst/>
+          </a:prstGeom>
+          <a:noFill/>
+        </p:spPr>
+        <p:txBody>
+          <a:bodyPr wrap="square">
+            <a:spAutoFit/>
+          </a:bodyPr>
+          <a:lstStyle/>
+          <a:p>
+            <a:pPr>
+              <a:defRPr sz="1400" b="1">
+                <a:solidFill>
+                  <a:srgbClr val="FF1E56"/>
+                </a:solidFill>
+              </a:defRPr>
+            </a:pPr>
+            <a:r>
+              <a:t>✓ 88.2% Test Accuracy</a:t>
+            </a:r>
+          </a:p>
+          <a:p>
+            <a:pPr>
+              <a:defRPr sz="1100">
+                <a:solidFill>
+                  <a:srgbClr val="A1A1AA"/>
+                </a:solidFill>
+              </a:defRPr>
+            </a:pPr>
+            <a:r>
+              <a:t>Random Forest Classifier (120 Estimators)</a:t>
+            </a:r>
+          </a:p>
+        </p:txBody>
+      </p:sp>
+      <p:sp>
+        <p:nvSpPr>
+          <p:cNvPr id="11" name="Rounded Rectangle 10"/>
+          <p:cNvSpPr/>
+          <p:nvPr/>
+        </p:nvSpPr>
+        <p:spPr>
+          <a:xfrm>
+            <a:off x="7955280" y="1417320"/>
+            <a:ext cx="3429000" cy="1234440"/>
+          </a:xfrm>
+          <a:prstGeom prst="roundRect">
+            <a:avLst/>
+          </a:prstGeom>
+          <a:solidFill>
+            <a:srgbClr val="100E16"/>
+          </a:solidFill>
+          <a:ln>
+            <a:solidFill>
+              <a:srgbClr val="2E2034"/>
+            </a:solidFill>
+          </a:ln>
+        </p:spPr>
+        <p:style>
+          <a:lnRef idx="1">
+            <a:schemeClr val="accent1"/>
+          </a:lnRef>
+          <a:fillRef idx="3">
+            <a:schemeClr val="accent1"/>
+          </a:fillRef>
+          <a:effectRef idx="2">
+            <a:schemeClr val="accent1"/>
+          </a:effectRef>
+          <a:fontRef idx="minor">
+            <a:schemeClr val="lt1"/>
+          </a:fontRef>
+        </p:style>
+        <p:txBody>
+          <a:bodyPr rtlCol="0" anchor="ctr"/>
+          <a:lstStyle/>
+          <a:p>
+            <a:pPr algn="ctr"/>
+          </a:p>
+        </p:txBody>
+      </p:sp>
+      <p:sp>
+        <p:nvSpPr>
+          <p:cNvPr id="12" name="TextBox 11"/>
+          <p:cNvSpPr txBox="1"/>
+          <p:nvPr/>
+        </p:nvSpPr>
+        <p:spPr>
+          <a:xfrm>
+            <a:off x="8138160" y="1554480"/>
+            <a:ext cx="3063240" cy="960120"/>
+          </a:xfrm>
+          <a:prstGeom prst="rect">
+            <a:avLst/>
+          </a:prstGeom>
+          <a:noFill/>
+        </p:spPr>
+        <p:txBody>
+          <a:bodyPr wrap="square">
+            <a:spAutoFit/>
+          </a:bodyPr>
+          <a:lstStyle/>
+          <a:p>
+            <a:pPr>
+              <a:defRPr sz="1400" b="1">
+                <a:solidFill>
+                  <a:srgbClr val="FF1E56"/>
+                </a:solidFill>
+              </a:defRPr>
+            </a:pPr>
+            <a:r>
+              <a:t>✓ Sub-15ms Query Latency</a:t>
+            </a:r>
+          </a:p>
+          <a:p>
+            <a:pPr>
+              <a:defRPr sz="1100">
+                <a:solidFill>
+                  <a:srgbClr val="A1A1AA"/>
+                </a:solidFill>
+              </a:defRPr>
+            </a:pPr>
+            <a:r>
+              <a:t>SQLite Write-Ahead Logging (WAL) Mode</a:t>
+            </a:r>
+          </a:p>
+        </p:txBody>
+      </p:sp>
+      <p:sp>
+        <p:nvSpPr>
+          <p:cNvPr id="13" name="Rounded Rectangle 12"/>
+          <p:cNvSpPr/>
+          <p:nvPr/>
+        </p:nvSpPr>
+        <p:spPr>
+          <a:xfrm>
+            <a:off x="731520" y="2788920"/>
+            <a:ext cx="3429000" cy="1234440"/>
+          </a:xfrm>
+          <a:prstGeom prst="roundRect">
+            <a:avLst/>
+          </a:prstGeom>
+          <a:solidFill>
+            <a:srgbClr val="100E16"/>
+          </a:solidFill>
+          <a:ln>
+            <a:solidFill>
+              <a:srgbClr val="2E2034"/>
+            </a:solidFill>
+          </a:ln>
+        </p:spPr>
+        <p:style>
+          <a:lnRef idx="1">
+            <a:schemeClr val="accent1"/>
+          </a:lnRef>
+          <a:fillRef idx="3">
+            <a:schemeClr val="accent1"/>
+          </a:fillRef>
+          <a:effectRef idx="2">
+            <a:schemeClr val="accent1"/>
+          </a:effectRef>
+          <a:fontRef idx="minor">
+            <a:schemeClr val="lt1"/>
+          </a:fontRef>
+        </p:style>
+        <p:txBody>
+          <a:bodyPr rtlCol="0" anchor="ctr"/>
+          <a:lstStyle/>
+          <a:p>
+            <a:pPr algn="ctr"/>
+          </a:p>
+        </p:txBody>
+      </p:sp>
+      <p:sp>
+        <p:nvSpPr>
+          <p:cNvPr id="14" name="TextBox 13"/>
+          <p:cNvSpPr txBox="1"/>
+          <p:nvPr/>
+        </p:nvSpPr>
+        <p:spPr>
+          <a:xfrm>
+            <a:off x="914400" y="2926080"/>
+            <a:ext cx="3063240" cy="960120"/>
+          </a:xfrm>
+          <a:prstGeom prst="rect">
+            <a:avLst/>
+          </a:prstGeom>
+          <a:noFill/>
+        </p:spPr>
+        <p:txBody>
+          <a:bodyPr wrap="square">
+            <a:spAutoFit/>
+          </a:bodyPr>
+          <a:lstStyle/>
+          <a:p>
+            <a:pPr>
+              <a:defRPr sz="1400" b="1">
+                <a:solidFill>
+                  <a:srgbClr val="FF1E56"/>
+                </a:solidFill>
+              </a:defRPr>
+            </a:pPr>
+            <a:r>
+              <a:t>✓ 16/16 Audits Passed</a:t>
+            </a:r>
+          </a:p>
+          <a:p>
+            <a:pPr>
+              <a:defRPr sz="1100">
+                <a:solidFill>
+                  <a:srgbClr val="A1A1AA"/>
+                </a:solidFill>
+              </a:defRPr>
+            </a:pPr>
+            <a:r>
+              <a:t>Strict IDOR 403 Forbidden Security Verification</a:t>
+            </a:r>
+          </a:p>
+        </p:txBody>
+      </p:sp>
+      <p:sp>
+        <p:nvSpPr>
+          <p:cNvPr id="15" name="Rounded Rectangle 14"/>
+          <p:cNvSpPr/>
+          <p:nvPr/>
+        </p:nvSpPr>
+        <p:spPr>
+          <a:xfrm>
+            <a:off x="4343400" y="2788920"/>
+            <a:ext cx="3429000" cy="1234440"/>
+          </a:xfrm>
+          <a:prstGeom prst="roundRect">
+            <a:avLst/>
+          </a:prstGeom>
+          <a:solidFill>
+            <a:srgbClr val="100E16"/>
+          </a:solidFill>
+          <a:ln>
+            <a:solidFill>
+              <a:srgbClr val="2E2034"/>
+            </a:solidFill>
+          </a:ln>
+        </p:spPr>
+        <p:style>
+          <a:lnRef idx="1">
+            <a:schemeClr val="accent1"/>
+          </a:lnRef>
+          <a:fillRef idx="3">
+            <a:schemeClr val="accent1"/>
+          </a:fillRef>
+          <a:effectRef idx="2">
+            <a:schemeClr val="accent1"/>
+          </a:effectRef>
+          <a:fontRef idx="minor">
+            <a:schemeClr val="lt1"/>
+          </a:fontRef>
+        </p:style>
+        <p:txBody>
+          <a:bodyPr rtlCol="0" anchor="ctr"/>
+          <a:lstStyle/>
+          <a:p>
+            <a:pPr algn="ctr"/>
+          </a:p>
+        </p:txBody>
+      </p:sp>
+      <p:sp>
+        <p:nvSpPr>
+          <p:cNvPr id="16" name="TextBox 15"/>
+          <p:cNvSpPr txBox="1"/>
+          <p:nvPr/>
+        </p:nvSpPr>
+        <p:spPr>
+          <a:xfrm>
+            <a:off x="4526280" y="2926080"/>
+            <a:ext cx="3063240" cy="960120"/>
+          </a:xfrm>
+          <a:prstGeom prst="rect">
+            <a:avLst/>
+          </a:prstGeom>
+          <a:noFill/>
+        </p:spPr>
+        <p:txBody>
+          <a:bodyPr wrap="square">
+            <a:spAutoFit/>
+          </a:bodyPr>
+          <a:lstStyle/>
+          <a:p>
+            <a:pPr>
+              <a:defRPr sz="1400" b="1">
+                <a:solidFill>
+                  <a:srgbClr val="FF1E56"/>
+                </a:solidFill>
+              </a:defRPr>
+            </a:pPr>
+            <a:r>
+              <a:t>✓ 100% Strict Type Safety</a:t>
+            </a:r>
+          </a:p>
+          <a:p>
+            <a:pPr>
+              <a:defRPr sz="1100">
+                <a:solidFill>
+                  <a:srgbClr val="A1A1AA"/>
+                </a:solidFill>
+              </a:defRPr>
+            </a:pPr>
+            <a:r>
+              <a:t>Zero TypeScript compilation warnings (tsc --noEmit)</a:t>
+            </a:r>
+          </a:p>
+        </p:txBody>
+      </p:sp>
+      <p:sp>
+        <p:nvSpPr>
+          <p:cNvPr id="17" name="Rounded Rectangle 16"/>
+          <p:cNvSpPr/>
+          <p:nvPr/>
+        </p:nvSpPr>
+        <p:spPr>
+          <a:xfrm>
+            <a:off x="7955280" y="2788920"/>
+            <a:ext cx="3429000" cy="1234440"/>
+          </a:xfrm>
+          <a:prstGeom prst="roundRect">
+            <a:avLst/>
+          </a:prstGeom>
+          <a:solidFill>
+            <a:srgbClr val="100E16"/>
+          </a:solidFill>
+          <a:ln>
+            <a:solidFill>
+              <a:srgbClr val="2E2034"/>
+            </a:solidFill>
+          </a:ln>
+        </p:spPr>
+        <p:style>
+          <a:lnRef idx="1">
+            <a:schemeClr val="accent1"/>
+          </a:lnRef>
+          <a:fillRef idx="3">
+            <a:schemeClr val="accent1"/>
+          </a:fillRef>
+          <a:effectRef idx="2">
+            <a:schemeClr val="accent1"/>
+          </a:effectRef>
+          <a:fontRef idx="minor">
+            <a:schemeClr val="lt1"/>
+          </a:fontRef>
+        </p:style>
+        <p:txBody>
+          <a:bodyPr rtlCol="0" anchor="ctr"/>
+          <a:lstStyle/>
+          <a:p>
+            <a:pPr algn="ctr"/>
+          </a:p>
+        </p:txBody>
+      </p:sp>
+      <p:sp>
+        <p:nvSpPr>
+          <p:cNvPr id="18" name="TextBox 17"/>
+          <p:cNvSpPr txBox="1"/>
+          <p:nvPr/>
+        </p:nvSpPr>
+        <p:spPr>
+          <a:xfrm>
+            <a:off x="8138160" y="2926080"/>
+            <a:ext cx="3063240" cy="960120"/>
+          </a:xfrm>
+          <a:prstGeom prst="rect">
+            <a:avLst/>
+          </a:prstGeom>
+          <a:noFill/>
+        </p:spPr>
+        <p:txBody>
+          <a:bodyPr wrap="square">
+            <a:spAutoFit/>
+          </a:bodyPr>
+          <a:lstStyle/>
+          <a:p>
+            <a:pPr>
+              <a:defRPr sz="1400" b="1">
+                <a:solidFill>
+                  <a:srgbClr val="FF1E56"/>
+                </a:solidFill>
+              </a:defRPr>
+            </a:pPr>
+            <a:r>
+              <a:t>✓ Production Deployed</a:t>
+            </a:r>
+          </a:p>
+          <a:p>
+            <a:pPr>
+              <a:defRPr sz="1100">
+                <a:solidFill>
+                  <a:srgbClr val="A1A1AA"/>
+                </a:solidFill>
+              </a:defRPr>
+            </a:pPr>
+            <a:r>
+              <a:t>Live on Vercel Edge SPA &amp; Render Cloud API</a:t>
+            </a:r>
+          </a:p>
+        </p:txBody>
+      </p:sp>
+      <p:sp>
+        <p:nvSpPr>
+          <p:cNvPr id="19" name="Rounded Rectangle 18"/>
+          <p:cNvSpPr/>
+          <p:nvPr/>
+        </p:nvSpPr>
+        <p:spPr>
+          <a:xfrm>
+            <a:off x="731520" y="4389120"/>
+            <a:ext cx="10728655" cy="1737360"/>
+          </a:xfrm>
+          <a:prstGeom prst="roundRect">
+            <a:avLst/>
+          </a:prstGeom>
+          <a:solidFill>
+            <a:srgbClr val="181420"/>
+          </a:solidFill>
+          <a:ln>
+            <a:solidFill>
+              <a:srgbClr val="2E2034"/>
+            </a:solidFill>
+          </a:ln>
+        </p:spPr>
+        <p:style>
+          <a:lnRef idx="1">
+            <a:schemeClr val="accent1"/>
+          </a:lnRef>
+          <a:fillRef idx="3">
+            <a:schemeClr val="accent1"/>
+          </a:fillRef>
+          <a:effectRef idx="2">
+            <a:schemeClr val="accent1"/>
+          </a:effectRef>
+          <a:fontRef idx="minor">
+            <a:schemeClr val="lt1"/>
+          </a:fontRef>
+        </p:style>
+        <p:txBody>
+          <a:bodyPr rtlCol="0" anchor="ctr"/>
+          <a:lstStyle/>
+          <a:p>
+            <a:pPr algn="ctr"/>
+          </a:p>
+        </p:txBody>
+      </p:sp>
+      <p:sp>
+        <p:nvSpPr>
+          <p:cNvPr id="20" name="TextBox 19"/>
+          <p:cNvSpPr txBox="1"/>
+          <p:nvPr/>
+        </p:nvSpPr>
+        <p:spPr>
+          <a:xfrm>
+            <a:off x="1005840" y="4526280"/>
+            <a:ext cx="10180015" cy="1463040"/>
+          </a:xfrm>
+          <a:prstGeom prst="rect">
+            <a:avLst/>
+          </a:prstGeom>
+          <a:noFill/>
+        </p:spPr>
+        <p:txBody>
+          <a:bodyPr wrap="square">
+            <a:spAutoFit/>
+          </a:bodyPr>
+          <a:lstStyle/>
+          <a:p>
+            <a:pPr>
+              <a:defRPr sz="1300" b="1">
                 <a:solidFill>
                   <a:srgbClr val="A855F7"/>
                 </a:solidFill>
               </a:defRPr>
             </a:pPr>
             <a:r>
-              <a:t>Thank you! Open for Questions &amp; Discussion.</a:t>
-            </a:r>
-          </a:p>
-          <a:p>
-            <a:pPr>
-              <a:defRPr sz="1400">
-                <a:solidFill>
-                  <a:srgbClr val="FF2D55"/>
-                </a:solidFill>
-              </a:defRPr>
-            </a:pPr>
-            <a:r>
-              <a:t>Developer: Dileep Bommali  |  GitHub: https://github.com/dileepbommali16-ops/pathfinder</a:t>
+              <a:t>FUTURE ROADMAP &amp; FEDERATED SCALING:</a:t>
+            </a:r>
+          </a:p>
+          <a:p>
+            <a:pPr>
+              <a:defRPr sz="1100">
+                <a:solidFill>
+                  <a:srgbClr val="FFFFFF"/>
+                </a:solidFill>
+              </a:defRPr>
+            </a:pPr>
+            <a:r>
+              <a:t>• AI Voice Mock Interviews: Real-time speech cadence, audio sentiment, and DSA problem-solving analysis.</a:t>
+            </a:r>
+            <a:br/>
+            <a:r>
+              <a:t>• Continuous GitHub Scraping: Webhook pipeline tracking real-time code commits, PR merges, and LeetCode ratings.</a:t>
+            </a:r>
+            <a:br/>
+            <a:r>
+              <a:t>• Multi-Campus Federated Network: Benchmarking placement metrics across peer universities for national rankings.</a:t>
+            </a:r>
+          </a:p>
+          <a:p>
+            <a:pPr>
+              <a:defRPr sz="1200" b="1">
+                <a:solidFill>
+                  <a:srgbClr val="FF1E56"/>
+                </a:solidFill>
+              </a:defRPr>
+            </a:pPr>
+            <a:r>
+              <a:t>Lead Systems Architect: Dileep Bommali  |  Repository: https://github.com/dileepbommali16-ops/pathfinder</a:t>
             </a:r>
           </a:p>
         </p:txBody>
@@ -4646,7 +4203,7 @@
             <a:avLst/>
           </a:prstGeom>
           <a:solidFill>
-            <a:srgbClr val="09090E"/>
+            <a:srgbClr val="06060A"/>
           </a:solidFill>
           <a:ln>
             <a:noFill/>
@@ -4682,8 +4239,8 @@
         </p:nvSpPr>
         <p:spPr>
           <a:xfrm>
-            <a:off x="731520" y="457200"/>
-            <a:ext cx="10698480" cy="365760"/>
+            <a:off x="731520" y="365760"/>
+            <a:ext cx="10698480" cy="320040"/>
           </a:xfrm>
           <a:prstGeom prst="rect">
             <a:avLst/>
@@ -4699,12 +4256,12 @@
             <a:pPr>
               <a:defRPr sz="1100" b="1">
                 <a:solidFill>
-                  <a:srgbClr val="FF2D55"/>
-                </a:solidFill>
-              </a:defRPr>
-            </a:pPr>
-            <a:r>
-              <a:t>PROBLEM STATEMENT</a:t>
+                  <a:srgbClr val="FF1E56"/>
+                </a:solidFill>
+              </a:defRPr>
+            </a:pPr>
+            <a:r>
+              <a:t>PROBLEM STATEMENT &amp; QUANTITATIVE CRISIS</a:t>
             </a:r>
           </a:p>
         </p:txBody>
@@ -4717,8 +4274,8 @@
         </p:nvSpPr>
         <p:spPr>
           <a:xfrm>
-            <a:off x="731520" y="777240"/>
-            <a:ext cx="10698480" cy="731520"/>
+            <a:off x="731520" y="685800"/>
+            <a:ext cx="10698480" cy="594360"/>
           </a:xfrm>
           <a:prstGeom prst="rect">
             <a:avLst/>
@@ -4732,9 +4289,9 @@
           <a:lstStyle/>
           <a:p>
             <a:pPr>
-              <a:defRPr sz="2800" b="1">
-                <a:solidFill>
-                  <a:srgbClr val="F8FAFC"/>
+              <a:defRPr sz="2600" b="1">
+                <a:solidFill>
+                  <a:srgbClr val="FFFFFF"/>
                 </a:solidFill>
               </a:defRPr>
             </a:pPr>
@@ -4746,25 +4303,23 @@
       </p:sp>
       <p:sp>
         <p:nvSpPr>
-          <p:cNvPr id="5" name="Rounded Rectangle 4"/>
+          <p:cNvPr id="5" name="Rectangle 4"/>
           <p:cNvSpPr/>
           <p:nvPr/>
         </p:nvSpPr>
         <p:spPr>
           <a:xfrm>
-            <a:off x="731520" y="1691640"/>
-            <a:ext cx="5120640" cy="2011680"/>
-          </a:xfrm>
-          <a:prstGeom prst="roundRect">
+            <a:off x="731520" y="6400800"/>
+            <a:ext cx="10728655" cy="18288"/>
+          </a:xfrm>
+          <a:prstGeom prst="rect">
             <a:avLst/>
           </a:prstGeom>
           <a:solidFill>
-            <a:srgbClr val="121018"/>
+            <a:srgbClr val="2E2034"/>
           </a:solidFill>
-          <a:ln w="15240">
-            <a:solidFill>
-              <a:srgbClr val="302032"/>
-            </a:solidFill>
+          <a:ln>
+            <a:noFill/>
           </a:ln>
         </p:spPr>
         <p:style>
@@ -4797,8 +4352,8 @@
         </p:nvSpPr>
         <p:spPr>
           <a:xfrm>
-            <a:off x="1005840" y="1965960"/>
-            <a:ext cx="4572000" cy="1463040"/>
+            <a:off x="731520" y="6446520"/>
+            <a:ext cx="10728655" cy="320040"/>
           </a:xfrm>
           <a:prstGeom prst="rect">
             <a:avLst/>
@@ -4806,32 +4361,20 @@
           <a:noFill/>
         </p:spPr>
         <p:txBody>
-          <a:bodyPr wrap="square">
+          <a:bodyPr wrap="none">
             <a:spAutoFit/>
           </a:bodyPr>
           <a:lstStyle/>
           <a:p>
             <a:pPr>
-              <a:defRPr sz="1700" b="1">
-                <a:solidFill>
-                  <a:srgbClr val="FF2D55"/>
-                </a:solidFill>
-              </a:defRPr>
-            </a:pPr>
-            <a:r>
-              <a:t>01. Lack of Early Forecasting</a:t>
-            </a:r>
-          </a:p>
-          <a:p>
-            <a:pPr>
-              <a:defRPr sz="1400">
+              <a:defRPr sz="1000">
                 <a:solidFill>
                   <a:srgbClr val="A1A1AA"/>
                 </a:solidFill>
               </a:defRPr>
             </a:pPr>
             <a:r>
-              <a:t>Students realize placement readiness gaps in final semester when it is too late to pivot.</a:t>
+              <a:t>Slide 02 / 10 • Pathfinder 2.0 • Lead Systems Engineer: Dileep Bommali • https://github.com/dileepbommali16-ops/pathfinder</a:t>
             </a:r>
           </a:p>
         </p:txBody>
@@ -4844,18 +4387,18 @@
         </p:nvSpPr>
         <p:spPr>
           <a:xfrm>
-            <a:off x="6172200" y="1691640"/>
-            <a:ext cx="5120640" cy="2011680"/>
+            <a:off x="731520" y="1417320"/>
+            <a:ext cx="5120640" cy="2148840"/>
           </a:xfrm>
           <a:prstGeom prst="roundRect">
             <a:avLst/>
           </a:prstGeom>
           <a:solidFill>
-            <a:srgbClr val="121018"/>
+            <a:srgbClr val="100E16"/>
           </a:solidFill>
           <a:ln w="15240">
             <a:solidFill>
-              <a:srgbClr val="302032"/>
+              <a:srgbClr val="2E2034"/>
             </a:solidFill>
           </a:ln>
         </p:spPr>
@@ -4889,8 +4432,8 @@
         </p:nvSpPr>
         <p:spPr>
           <a:xfrm>
-            <a:off x="6446520" y="1965960"/>
-            <a:ext cx="4572000" cy="1463040"/>
+            <a:off x="960120" y="1600200"/>
+            <a:ext cx="4663440" cy="1783080"/>
           </a:xfrm>
           <a:prstGeom prst="rect">
             <a:avLst/>
@@ -4904,26 +4447,26 @@
           <a:lstStyle/>
           <a:p>
             <a:pPr>
-              <a:defRPr sz="1700" b="1">
-                <a:solidFill>
-                  <a:srgbClr val="FF2D55"/>
-                </a:solidFill>
-              </a:defRPr>
-            </a:pPr>
-            <a:r>
-              <a:t>02. Ambiguous Industry Benchmarks</a:t>
-            </a:r>
-          </a:p>
-          <a:p>
-            <a:pPr>
-              <a:defRPr sz="1400">
+              <a:defRPr sz="1600" b="1">
+                <a:solidFill>
+                  <a:srgbClr val="FF1E56"/>
+                </a:solidFill>
+              </a:defRPr>
+            </a:pPr>
+            <a:r>
+              <a:t>CRISIS 01 • 64.8% Technical Filter Rejection</a:t>
+            </a:r>
+          </a:p>
+          <a:p>
+            <a:pPr>
+              <a:defRPr sz="1300">
                 <a:solidFill>
                   <a:srgbClr val="A1A1AA"/>
                 </a:solidFill>
               </a:defRPr>
             </a:pPr>
             <a:r>
-              <a:t>Job descriptions are noisy and vague; students struggle to understand exact technical expectations.</a:t>
+              <a:t>Over 64% of engineering graduates fail preliminary technical screenings due to outdated academic curriculum misaligned with real industry rubrics.</a:t>
             </a:r>
           </a:p>
         </p:txBody>
@@ -4936,18 +4479,18 @@
         </p:nvSpPr>
         <p:spPr>
           <a:xfrm>
-            <a:off x="731520" y="3977639"/>
-            <a:ext cx="5120640" cy="2011680"/>
+            <a:off x="6172200" y="1417320"/>
+            <a:ext cx="5120640" cy="2148840"/>
           </a:xfrm>
           <a:prstGeom prst="roundRect">
             <a:avLst/>
           </a:prstGeom>
           <a:solidFill>
-            <a:srgbClr val="121018"/>
+            <a:srgbClr val="100E16"/>
           </a:solidFill>
           <a:ln w="15240">
             <a:solidFill>
-              <a:srgbClr val="302032"/>
+              <a:srgbClr val="2E2034"/>
             </a:solidFill>
           </a:ln>
         </p:spPr>
@@ -4981,8 +4524,8 @@
         </p:nvSpPr>
         <p:spPr>
           <a:xfrm>
-            <a:off x="1005840" y="4251959"/>
-            <a:ext cx="4572000" cy="1463040"/>
+            <a:off x="6400800" y="1600200"/>
+            <a:ext cx="4663440" cy="1783080"/>
           </a:xfrm>
           <a:prstGeom prst="rect">
             <a:avLst/>
@@ -4996,26 +4539,26 @@
           <a:lstStyle/>
           <a:p>
             <a:pPr>
-              <a:defRPr sz="1700" b="1">
-                <a:solidFill>
-                  <a:srgbClr val="FF2D55"/>
-                </a:solidFill>
-              </a:defRPr>
-            </a:pPr>
-            <a:r>
-              <a:t>03. Scalability Bottlenecks</a:t>
-            </a:r>
-          </a:p>
-          <a:p>
-            <a:pPr>
-              <a:defRPr sz="1400">
+              <a:defRPr sz="1600" b="1">
+                <a:solidFill>
+                  <a:srgbClr val="FF1E56"/>
+                </a:solidFill>
+              </a:defRPr>
+            </a:pPr>
+            <a:r>
+              <a:t>CRISIS 02 • 82% Lack Production Blueprints</a:t>
+            </a:r>
+          </a:p>
+          <a:p>
+            <a:pPr>
+              <a:defRPr sz="1300">
                 <a:solidFill>
                   <a:srgbClr val="A1A1AA"/>
                 </a:solidFill>
               </a:defRPr>
             </a:pPr>
             <a:r>
-              <a:t>College placement cells cannot provide 24/7 personalized, one-on-one technical coaching to thousands.</a:t>
+              <a:t>Students build superficial toy projects with zero live cloud deployments, containerization, or production-grade database schema architecture.</a:t>
             </a:r>
           </a:p>
         </p:txBody>
@@ -5028,18 +4571,18 @@
         </p:nvSpPr>
         <p:spPr>
           <a:xfrm>
-            <a:off x="6172200" y="3977639"/>
-            <a:ext cx="5120640" cy="2011680"/>
+            <a:off x="731520" y="3794760"/>
+            <a:ext cx="5120640" cy="2148840"/>
           </a:xfrm>
           <a:prstGeom prst="roundRect">
             <a:avLst/>
           </a:prstGeom>
           <a:solidFill>
-            <a:srgbClr val="121018"/>
+            <a:srgbClr val="100E16"/>
           </a:solidFill>
           <a:ln w="15240">
             <a:solidFill>
-              <a:srgbClr val="302032"/>
+              <a:srgbClr val="2E2034"/>
             </a:solidFill>
           </a:ln>
         </p:spPr>
@@ -5073,8 +4616,8 @@
         </p:nvSpPr>
         <p:spPr>
           <a:xfrm>
-            <a:off x="6446520" y="4251959"/>
-            <a:ext cx="4572000" cy="1463040"/>
+            <a:off x="960120" y="3977640"/>
+            <a:ext cx="4663440" cy="1783080"/>
           </a:xfrm>
           <a:prstGeom prst="rect">
             <a:avLst/>
@@ -5088,26 +4631,118 @@
           <a:lstStyle/>
           <a:p>
             <a:pPr>
-              <a:defRPr sz="1700" b="1">
-                <a:solidFill>
-                  <a:srgbClr val="FF2D55"/>
-                </a:solidFill>
-              </a:defRPr>
-            </a:pPr>
-            <a:r>
-              <a:t>04. Unstructured Multi-Dimensional Data</a:t>
-            </a:r>
-          </a:p>
-          <a:p>
-            <a:pPr>
-              <a:defRPr sz="1400">
+              <a:defRPr sz="1600" b="1">
+                <a:solidFill>
+                  <a:srgbClr val="FF1E56"/>
+                </a:solidFill>
+              </a:defRPr>
+            </a:pPr>
+            <a:r>
+              <a:t>CRISIS 03 • 1 : 1,200 Placement Mentor Ratio</a:t>
+            </a:r>
+          </a:p>
+          <a:p>
+            <a:pPr>
+              <a:defRPr sz="1300">
                 <a:solidFill>
                   <a:srgbClr val="A1A1AA"/>
                 </a:solidFill>
               </a:defRPr>
             </a:pPr>
             <a:r>
-              <a:t>Colleges rely solely on GPA, ignoring coding ranks, hackathons, and soft-skill metrics.</a:t>
+              <a:t>University career training cells cannot provide 24/7 personalized, line-by-line code reviews and system design grilling across thousands of students.</a:t>
+            </a:r>
+          </a:p>
+        </p:txBody>
+      </p:sp>
+      <p:sp>
+        <p:nvSpPr>
+          <p:cNvPr id="13" name="Rounded Rectangle 12"/>
+          <p:cNvSpPr/>
+          <p:nvPr/>
+        </p:nvSpPr>
+        <p:spPr>
+          <a:xfrm>
+            <a:off x="6172200" y="3794760"/>
+            <a:ext cx="5120640" cy="2148840"/>
+          </a:xfrm>
+          <a:prstGeom prst="roundRect">
+            <a:avLst/>
+          </a:prstGeom>
+          <a:solidFill>
+            <a:srgbClr val="100E16"/>
+          </a:solidFill>
+          <a:ln w="15240">
+            <a:solidFill>
+              <a:srgbClr val="2E2034"/>
+            </a:solidFill>
+          </a:ln>
+        </p:spPr>
+        <p:style>
+          <a:lnRef idx="1">
+            <a:schemeClr val="accent1"/>
+          </a:lnRef>
+          <a:fillRef idx="3">
+            <a:schemeClr val="accent1"/>
+          </a:fillRef>
+          <a:effectRef idx="2">
+            <a:schemeClr val="accent1"/>
+          </a:effectRef>
+          <a:fontRef idx="minor">
+            <a:schemeClr val="lt1"/>
+          </a:fontRef>
+        </p:style>
+        <p:txBody>
+          <a:bodyPr rtlCol="0" anchor="ctr"/>
+          <a:lstStyle/>
+          <a:p>
+            <a:pPr algn="ctr"/>
+          </a:p>
+        </p:txBody>
+      </p:sp>
+      <p:sp>
+        <p:nvSpPr>
+          <p:cNvPr id="14" name="TextBox 13"/>
+          <p:cNvSpPr txBox="1"/>
+          <p:nvPr/>
+        </p:nvSpPr>
+        <p:spPr>
+          <a:xfrm>
+            <a:off x="6400800" y="3977640"/>
+            <a:ext cx="4663440" cy="1783080"/>
+          </a:xfrm>
+          <a:prstGeom prst="rect">
+            <a:avLst/>
+          </a:prstGeom>
+          <a:noFill/>
+        </p:spPr>
+        <p:txBody>
+          <a:bodyPr wrap="square">
+            <a:spAutoFit/>
+          </a:bodyPr>
+          <a:lstStyle/>
+          <a:p>
+            <a:pPr>
+              <a:defRPr sz="1600" b="1">
+                <a:solidFill>
+                  <a:srgbClr val="FF1E56"/>
+                </a:solidFill>
+              </a:defRPr>
+            </a:pPr>
+            <a:r>
+              <a:t>CRISIS 04 • 78% Late Skill-Gap Realization</a:t>
+            </a:r>
+          </a:p>
+          <a:p>
+            <a:pPr>
+              <a:defRPr sz="1300">
+                <a:solidFill>
+                  <a:srgbClr val="A1A1AA"/>
+                </a:solidFill>
+              </a:defRPr>
+            </a:pPr>
+            <a:r>
+              <a:t>Candidates discover critical aptitude and DSA deficiencies only in Semester 7/8, making it mathematically impossible to recover before recruitment drives.</a:t>
             </a:r>
           </a:p>
         </p:txBody>
@@ -5145,7 +4780,7 @@
             <a:avLst/>
           </a:prstGeom>
           <a:solidFill>
-            <a:srgbClr val="09090E"/>
+            <a:srgbClr val="06060A"/>
           </a:solidFill>
           <a:ln>
             <a:noFill/>
@@ -5181,8 +4816,8 @@
         </p:nvSpPr>
         <p:spPr>
           <a:xfrm>
-            <a:off x="731520" y="457200"/>
-            <a:ext cx="10698480" cy="365760"/>
+            <a:off x="731520" y="365760"/>
+            <a:ext cx="10698480" cy="320040"/>
           </a:xfrm>
           <a:prstGeom prst="rect">
             <a:avLst/>
@@ -5198,12 +4833,12 @@
             <a:pPr>
               <a:defRPr sz="1100" b="1">
                 <a:solidFill>
-                  <a:srgbClr val="FF2D55"/>
-                </a:solidFill>
-              </a:defRPr>
-            </a:pPr>
-            <a:r>
-              <a:t>THE SOLUTION</a:t>
+                  <a:srgbClr val="FF1E56"/>
+                </a:solidFill>
+              </a:defRPr>
+            </a:pPr>
+            <a:r>
+              <a:t>SOLUTION ARCHITECTURE</a:t>
             </a:r>
           </a:p>
         </p:txBody>
@@ -5216,8 +4851,8 @@
         </p:nvSpPr>
         <p:spPr>
           <a:xfrm>
-            <a:off x="731520" y="777240"/>
-            <a:ext cx="10698480" cy="731520"/>
+            <a:off x="731520" y="685800"/>
+            <a:ext cx="10698480" cy="594360"/>
           </a:xfrm>
           <a:prstGeom prst="rect">
             <a:avLst/>
@@ -5231,39 +4866,37 @@
           <a:lstStyle/>
           <a:p>
             <a:pPr>
-              <a:defRPr sz="2800" b="1">
-                <a:solidFill>
-                  <a:srgbClr val="F8FAFC"/>
-                </a:solidFill>
-              </a:defRPr>
-            </a:pPr>
-            <a:r>
-              <a:t>Pathfinder 2.0: Data-Driven Career Acceleration</a:t>
-            </a:r>
-          </a:p>
-        </p:txBody>
-      </p:sp>
-      <p:sp>
-        <p:nvSpPr>
-          <p:cNvPr id="5" name="Rounded Rectangle 4"/>
+              <a:defRPr sz="2600" b="1">
+                <a:solidFill>
+                  <a:srgbClr val="FFFFFF"/>
+                </a:solidFill>
+              </a:defRPr>
+            </a:pPr>
+            <a:r>
+              <a:t>Pathfinder 2.0: Autonomous Career Acceleration Engine</a:t>
+            </a:r>
+          </a:p>
+        </p:txBody>
+      </p:sp>
+      <p:sp>
+        <p:nvSpPr>
+          <p:cNvPr id="5" name="Rectangle 4"/>
           <p:cNvSpPr/>
           <p:nvPr/>
         </p:nvSpPr>
         <p:spPr>
           <a:xfrm>
-            <a:off x="731520" y="1737360"/>
-            <a:ext cx="2560320" cy="4389120"/>
-          </a:xfrm>
-          <a:prstGeom prst="roundRect">
+            <a:off x="731520" y="6400800"/>
+            <a:ext cx="10728655" cy="18288"/>
+          </a:xfrm>
+          <a:prstGeom prst="rect">
             <a:avLst/>
           </a:prstGeom>
           <a:solidFill>
-            <a:srgbClr val="121018"/>
+            <a:srgbClr val="2E2034"/>
           </a:solidFill>
-          <a:ln w="15240">
-            <a:solidFill>
-              <a:srgbClr val="302032"/>
-            </a:solidFill>
+          <a:ln>
+            <a:noFill/>
           </a:ln>
         </p:spPr>
         <p:style>
@@ -5296,8 +4929,8 @@
         </p:nvSpPr>
         <p:spPr>
           <a:xfrm>
-            <a:off x="914400" y="2011680"/>
-            <a:ext cx="2194560" cy="3840480"/>
+            <a:off x="731520" y="6446520"/>
+            <a:ext cx="10728655" cy="320040"/>
           </a:xfrm>
           <a:prstGeom prst="rect">
             <a:avLst/>
@@ -5305,44 +4938,20 @@
           <a:noFill/>
         </p:spPr>
         <p:txBody>
-          <a:bodyPr wrap="square">
+          <a:bodyPr wrap="none">
             <a:spAutoFit/>
           </a:bodyPr>
           <a:lstStyle/>
           <a:p>
             <a:pPr>
-              <a:defRPr sz="1100" b="1">
-                <a:solidFill>
-                  <a:srgbClr val="A855F7"/>
-                </a:solidFill>
-              </a:defRPr>
-            </a:pPr>
-            <a:r>
-              <a:t>PHASE 01</a:t>
-            </a:r>
-          </a:p>
-          <a:p>
-            <a:pPr>
-              <a:defRPr sz="1800" b="1">
-                <a:solidFill>
-                  <a:srgbClr val="FF2D55"/>
-                </a:solidFill>
-              </a:defRPr>
-            </a:pPr>
-            <a:r>
-              <a:t>Predictive ML Engine</a:t>
-            </a:r>
-          </a:p>
-          <a:p>
-            <a:pPr>
-              <a:defRPr sz="1300">
-                <a:solidFill>
-                  <a:srgbClr val="F8FAFC"/>
-                </a:solidFill>
-              </a:defRPr>
-            </a:pPr>
-            <a:r>
-              <a:t>Computes statistical placement probability, candidate tier, and risk factors instantly.</a:t>
+              <a:defRPr sz="1000">
+                <a:solidFill>
+                  <a:srgbClr val="A1A1AA"/>
+                </a:solidFill>
+              </a:defRPr>
+            </a:pPr>
+            <a:r>
+              <a:t>Slide 03 / 10 • Pathfinder 2.0 • Lead Systems Engineer: Dileep Bommali • https://github.com/dileepbommali16-ops/pathfinder</a:t>
             </a:r>
           </a:p>
         </p:txBody>
@@ -5355,18 +4964,18 @@
         </p:nvSpPr>
         <p:spPr>
           <a:xfrm>
-            <a:off x="3429000" y="1737360"/>
-            <a:ext cx="2560320" cy="4389120"/>
+            <a:off x="731520" y="1417320"/>
+            <a:ext cx="2560320" cy="4709160"/>
           </a:xfrm>
           <a:prstGeom prst="roundRect">
             <a:avLst/>
           </a:prstGeom>
           <a:solidFill>
-            <a:srgbClr val="121018"/>
+            <a:srgbClr val="100E16"/>
           </a:solidFill>
           <a:ln w="15240">
             <a:solidFill>
-              <a:srgbClr val="302032"/>
+              <a:srgbClr val="2E2034"/>
             </a:solidFill>
           </a:ln>
         </p:spPr>
@@ -5400,8 +5009,8 @@
         </p:nvSpPr>
         <p:spPr>
           <a:xfrm>
-            <a:off x="3611880" y="2011680"/>
-            <a:ext cx="2194560" cy="3840480"/>
+            <a:off x="914400" y="1645920"/>
+            <a:ext cx="2194560" cy="4206240"/>
           </a:xfrm>
           <a:prstGeom prst="rect">
             <a:avLst/>
@@ -5422,31 +5031,31 @@
               </a:defRPr>
             </a:pPr>
             <a:r>
-              <a:t>PHASE 02</a:t>
-            </a:r>
-          </a:p>
-          <a:p>
-            <a:pPr>
-              <a:defRPr sz="1800" b="1">
-                <a:solidFill>
-                  <a:srgbClr val="FF2D55"/>
-                </a:solidFill>
-              </a:defRPr>
-            </a:pPr>
-            <a:r>
-              <a:t>Skill-Gap Radar</a:t>
+              <a:t>PILLAR 01</a:t>
+            </a:r>
+          </a:p>
+          <a:p>
+            <a:pPr>
+              <a:defRPr sz="1700" b="1">
+                <a:solidFill>
+                  <a:srgbClr val="FF1E56"/>
+                </a:solidFill>
+              </a:defRPr>
+            </a:pPr>
+            <a:r>
+              <a:t>Predictive ML Calibration</a:t>
             </a:r>
           </a:p>
           <a:p>
             <a:pPr>
               <a:defRPr sz="1300">
                 <a:solidFill>
-                  <a:srgbClr val="F8FAFC"/>
-                </a:solidFill>
-              </a:defRPr>
-            </a:pPr>
-            <a:r>
-              <a:t>Benchmarks student profile against live industry requirements for Tier-1 engineering roles.</a:t>
+                  <a:srgbClr val="FFFFFF"/>
+                </a:solidFill>
+              </a:defRPr>
+            </a:pPr>
+            <a:r>
+              <a:t>Ingests 8 candidate dimensions (CGPA, LeetCode rank, Git commits, backlogs) to output placement probability (0-100%) and 4 salary compensation tiers.</a:t>
             </a:r>
           </a:p>
         </p:txBody>
@@ -5459,18 +5068,18 @@
         </p:nvSpPr>
         <p:spPr>
           <a:xfrm>
-            <a:off x="6126480" y="1737360"/>
-            <a:ext cx="2560320" cy="4389120"/>
+            <a:off x="3429000" y="1417320"/>
+            <a:ext cx="2560320" cy="4709160"/>
           </a:xfrm>
           <a:prstGeom prst="roundRect">
             <a:avLst/>
           </a:prstGeom>
           <a:solidFill>
-            <a:srgbClr val="121018"/>
+            <a:srgbClr val="100E16"/>
           </a:solidFill>
           <a:ln w="15240">
             <a:solidFill>
-              <a:srgbClr val="302032"/>
+              <a:srgbClr val="2E2034"/>
             </a:solidFill>
           </a:ln>
         </p:spPr>
@@ -5504,8 +5113,8 @@
         </p:nvSpPr>
         <p:spPr>
           <a:xfrm>
-            <a:off x="6309360" y="2011680"/>
-            <a:ext cx="2194560" cy="3840480"/>
+            <a:off x="3611880" y="1645920"/>
+            <a:ext cx="2194560" cy="4206240"/>
           </a:xfrm>
           <a:prstGeom prst="rect">
             <a:avLst/>
@@ -5526,31 +5135,31 @@
               </a:defRPr>
             </a:pPr>
             <a:r>
-              <a:t>PHASE 03</a:t>
-            </a:r>
-          </a:p>
-          <a:p>
-            <a:pPr>
-              <a:defRPr sz="1800" b="1">
-                <a:solidFill>
-                  <a:srgbClr val="FF2D55"/>
-                </a:solidFill>
-              </a:defRPr>
-            </a:pPr>
-            <a:r>
-              <a:t>Autonomous Gemini AI Coach</a:t>
+              <a:t>PILLAR 02</a:t>
+            </a:r>
+          </a:p>
+          <a:p>
+            <a:pPr>
+              <a:defRPr sz="1700" b="1">
+                <a:solidFill>
+                  <a:srgbClr val="FF1E56"/>
+                </a:solidFill>
+              </a:defRPr>
+            </a:pPr>
+            <a:r>
+              <a:t>Skill-Gap Radar Alignment</a:t>
             </a:r>
           </a:p>
           <a:p>
             <a:pPr>
               <a:defRPr sz="1300">
                 <a:solidFill>
-                  <a:srgbClr val="F8FAFC"/>
-                </a:solidFill>
-              </a:defRPr>
-            </a:pPr>
-            <a:r>
-              <a:t>Generates custom week-by-week learning roadmaps and provides 24/7 technical mentorship.</a:t>
+                  <a:srgbClr val="FFFFFF"/>
+                </a:solidFill>
+              </a:defRPr>
+            </a:pPr>
+            <a:r>
+              <a:t>Compares student mastery vectors against live Tier-1 company benchmarks across 9 engineering disciplines (CSE, ECE, AI/ML, Cyber Security, etc.).</a:t>
             </a:r>
           </a:p>
         </p:txBody>
@@ -5563,18 +5172,18 @@
         </p:nvSpPr>
         <p:spPr>
           <a:xfrm>
-            <a:off x="8823960" y="1737360"/>
-            <a:ext cx="2560320" cy="4389120"/>
+            <a:off x="6126480" y="1417320"/>
+            <a:ext cx="2560320" cy="4709160"/>
           </a:xfrm>
           <a:prstGeom prst="roundRect">
             <a:avLst/>
           </a:prstGeom>
           <a:solidFill>
-            <a:srgbClr val="121018"/>
+            <a:srgbClr val="100E16"/>
           </a:solidFill>
           <a:ln w="15240">
             <a:solidFill>
-              <a:srgbClr val="302032"/>
+              <a:srgbClr val="2E2034"/>
             </a:solidFill>
           </a:ln>
         </p:spPr>
@@ -5608,8 +5217,8 @@
         </p:nvSpPr>
         <p:spPr>
           <a:xfrm>
-            <a:off x="9006840" y="2011680"/>
-            <a:ext cx="2194560" cy="3840480"/>
+            <a:off x="6309360" y="1645920"/>
+            <a:ext cx="2194560" cy="4206240"/>
           </a:xfrm>
           <a:prstGeom prst="rect">
             <a:avLst/>
@@ -5630,31 +5239,135 @@
               </a:defRPr>
             </a:pPr>
             <a:r>
-              <a:t>PHASE 04</a:t>
-            </a:r>
-          </a:p>
-          <a:p>
-            <a:pPr>
-              <a:defRPr sz="1800" b="1">
-                <a:solidFill>
-                  <a:srgbClr val="FF2D55"/>
-                </a:solidFill>
-              </a:defRPr>
-            </a:pPr>
-            <a:r>
-              <a:t>Placement Cell Analytics</a:t>
+              <a:t>PILLAR 03</a:t>
+            </a:r>
+          </a:p>
+          <a:p>
+            <a:pPr>
+              <a:defRPr sz="1700" b="1">
+                <a:solidFill>
+                  <a:srgbClr val="FF1E56"/>
+                </a:solidFill>
+              </a:defRPr>
+            </a:pPr>
+            <a:r>
+              <a:t>Multilingual Gemini Copilot</a:t>
             </a:r>
           </a:p>
           <a:p>
             <a:pPr>
               <a:defRPr sz="1300">
                 <a:solidFill>
-                  <a:srgbClr val="F8FAFC"/>
-                </a:solidFill>
-              </a:defRPr>
-            </a:pPr>
-            <a:r>
-              <a:t>Cohort segmentation, recruiter talent filters, and instant ATS PDF/CSV report exports.</a:t>
+                  <a:srgbClr val="FFFFFF"/>
+                </a:solidFill>
+              </a:defRPr>
+            </a:pPr>
+            <a:r>
+              <a:t>Generates personalized 6-phase adaptive study roadmaps with 24/7 real-time voice and text mentorship in both English and Telugu script.</a:t>
+            </a:r>
+          </a:p>
+        </p:txBody>
+      </p:sp>
+      <p:sp>
+        <p:nvSpPr>
+          <p:cNvPr id="13" name="Rounded Rectangle 12"/>
+          <p:cNvSpPr/>
+          <p:nvPr/>
+        </p:nvSpPr>
+        <p:spPr>
+          <a:xfrm>
+            <a:off x="8823960" y="1417320"/>
+            <a:ext cx="2560320" cy="4709160"/>
+          </a:xfrm>
+          <a:prstGeom prst="roundRect">
+            <a:avLst/>
+          </a:prstGeom>
+          <a:solidFill>
+            <a:srgbClr val="100E16"/>
+          </a:solidFill>
+          <a:ln w="15240">
+            <a:solidFill>
+              <a:srgbClr val="2E2034"/>
+            </a:solidFill>
+          </a:ln>
+        </p:spPr>
+        <p:style>
+          <a:lnRef idx="1">
+            <a:schemeClr val="accent1"/>
+          </a:lnRef>
+          <a:fillRef idx="3">
+            <a:schemeClr val="accent1"/>
+          </a:fillRef>
+          <a:effectRef idx="2">
+            <a:schemeClr val="accent1"/>
+          </a:effectRef>
+          <a:fontRef idx="minor">
+            <a:schemeClr val="lt1"/>
+          </a:fontRef>
+        </p:style>
+        <p:txBody>
+          <a:bodyPr rtlCol="0" anchor="ctr"/>
+          <a:lstStyle/>
+          <a:p>
+            <a:pPr algn="ctr"/>
+          </a:p>
+        </p:txBody>
+      </p:sp>
+      <p:sp>
+        <p:nvSpPr>
+          <p:cNvPr id="14" name="TextBox 13"/>
+          <p:cNvSpPr txBox="1"/>
+          <p:nvPr/>
+        </p:nvSpPr>
+        <p:spPr>
+          <a:xfrm>
+            <a:off x="9006840" y="1645920"/>
+            <a:ext cx="2194560" cy="4206240"/>
+          </a:xfrm>
+          <a:prstGeom prst="rect">
+            <a:avLst/>
+          </a:prstGeom>
+          <a:noFill/>
+        </p:spPr>
+        <p:txBody>
+          <a:bodyPr wrap="square">
+            <a:spAutoFit/>
+          </a:bodyPr>
+          <a:lstStyle/>
+          <a:p>
+            <a:pPr>
+              <a:defRPr sz="1100" b="1">
+                <a:solidFill>
+                  <a:srgbClr val="A855F7"/>
+                </a:solidFill>
+              </a:defRPr>
+            </a:pPr>
+            <a:r>
+              <a:t>PILLAR 04</a:t>
+            </a:r>
+          </a:p>
+          <a:p>
+            <a:pPr>
+              <a:defRPr sz="1700" b="1">
+                <a:solidFill>
+                  <a:srgbClr val="FF1E56"/>
+                </a:solidFill>
+              </a:defRPr>
+            </a:pPr>
+            <a:r>
+              <a:t>Institutional Command Center</a:t>
+            </a:r>
+          </a:p>
+          <a:p>
+            <a:pPr>
+              <a:defRPr sz="1300">
+                <a:solidFill>
+                  <a:srgbClr val="FFFFFF"/>
+                </a:solidFill>
+              </a:defRPr>
+            </a:pPr>
+            <a:r>
+              <a:t>Empowers placement directors with cohort distribution heatmaps, 1-click ATS-optimized ReportLab PDF dossiers, and streaming CSV exports.</a:t>
             </a:r>
           </a:p>
         </p:txBody>
@@ -5692,7 +5405,7 @@
             <a:avLst/>
           </a:prstGeom>
           <a:solidFill>
-            <a:srgbClr val="09090E"/>
+            <a:srgbClr val="06060A"/>
           </a:solidFill>
           <a:ln>
             <a:noFill/>
@@ -5728,8 +5441,8 @@
         </p:nvSpPr>
         <p:spPr>
           <a:xfrm>
-            <a:off x="731520" y="457200"/>
-            <a:ext cx="10698480" cy="365760"/>
+            <a:off x="731520" y="365760"/>
+            <a:ext cx="10698480" cy="320040"/>
           </a:xfrm>
           <a:prstGeom prst="rect">
             <a:avLst/>
@@ -5745,12 +5458,12 @@
             <a:pPr>
               <a:defRPr sz="1100" b="1">
                 <a:solidFill>
-                  <a:srgbClr val="FF2D55"/>
-                </a:solidFill>
-              </a:defRPr>
-            </a:pPr>
-            <a:r>
-              <a:t>SYSTEM DESIGN</a:t>
+                  <a:srgbClr val="FF1E56"/>
+                </a:solidFill>
+              </a:defRPr>
+            </a:pPr>
+            <a:r>
+              <a:t>TECHNICAL INFRASTRUCTURE</a:t>
             </a:r>
           </a:p>
         </p:txBody>
@@ -5763,8 +5476,8 @@
         </p:nvSpPr>
         <p:spPr>
           <a:xfrm>
-            <a:off x="731520" y="777240"/>
-            <a:ext cx="10698480" cy="731520"/>
+            <a:off x="731520" y="685800"/>
+            <a:ext cx="10698480" cy="594360"/>
           </a:xfrm>
           <a:prstGeom prst="rect">
             <a:avLst/>
@@ -5778,39 +5491,37 @@
           <a:lstStyle/>
           <a:p>
             <a:pPr>
-              <a:defRPr sz="2800" b="1">
-                <a:solidFill>
-                  <a:srgbClr val="F8FAFC"/>
-                </a:solidFill>
-              </a:defRPr>
-            </a:pPr>
-            <a:r>
-              <a:t>Full-Stack System Architecture &amp; Data Flow</a:t>
-            </a:r>
-          </a:p>
-        </p:txBody>
-      </p:sp>
-      <p:sp>
-        <p:nvSpPr>
-          <p:cNvPr id="5" name="Rounded Rectangle 4"/>
+              <a:defRPr sz="2600" b="1">
+                <a:solidFill>
+                  <a:srgbClr val="FFFFFF"/>
+                </a:solidFill>
+              </a:defRPr>
+            </a:pPr>
+            <a:r>
+              <a:t>Full-Stack System Architecture &amp; Data Pipelines</a:t>
+            </a:r>
+          </a:p>
+        </p:txBody>
+      </p:sp>
+      <p:sp>
+        <p:nvSpPr>
+          <p:cNvPr id="5" name="Rectangle 4"/>
           <p:cNvSpPr/>
           <p:nvPr/>
         </p:nvSpPr>
         <p:spPr>
           <a:xfrm>
-            <a:off x="731520" y="1737360"/>
-            <a:ext cx="3429000" cy="4389120"/>
-          </a:xfrm>
-          <a:prstGeom prst="roundRect">
+            <a:off x="731520" y="6400800"/>
+            <a:ext cx="10728655" cy="18288"/>
+          </a:xfrm>
+          <a:prstGeom prst="rect">
             <a:avLst/>
           </a:prstGeom>
           <a:solidFill>
-            <a:srgbClr val="121018"/>
+            <a:srgbClr val="2E2034"/>
           </a:solidFill>
-          <a:ln w="15240">
-            <a:solidFill>
-              <a:srgbClr val="302032"/>
-            </a:solidFill>
+          <a:ln>
+            <a:noFill/>
           </a:ln>
         </p:spPr>
         <p:style>
@@ -5843,8 +5554,8 @@
         </p:nvSpPr>
         <p:spPr>
           <a:xfrm>
-            <a:off x="960120" y="2011680"/>
-            <a:ext cx="2971800" cy="3840480"/>
+            <a:off x="731520" y="6446520"/>
+            <a:ext cx="10728655" cy="320040"/>
           </a:xfrm>
           <a:prstGeom prst="rect">
             <a:avLst/>
@@ -5852,44 +5563,20 @@
           <a:noFill/>
         </p:spPr>
         <p:txBody>
-          <a:bodyPr wrap="square">
+          <a:bodyPr wrap="none">
             <a:spAutoFit/>
           </a:bodyPr>
           <a:lstStyle/>
           <a:p>
             <a:pPr>
-              <a:defRPr sz="1200" b="1">
-                <a:solidFill>
-                  <a:srgbClr val="A855F7"/>
-                </a:solidFill>
-              </a:defRPr>
-            </a:pPr>
-            <a:r>
-              <a:t>FRONTEND TIER</a:t>
-            </a:r>
-          </a:p>
-          <a:p>
-            <a:pPr>
-              <a:defRPr sz="1800" b="1">
-                <a:solidFill>
-                  <a:srgbClr val="FF2D55"/>
-                </a:solidFill>
-              </a:defRPr>
-            </a:pPr>
-            <a:r>
-              <a:t>React 19 &amp; TypeScript</a:t>
-            </a:r>
-          </a:p>
-          <a:p>
-            <a:pPr>
-              <a:defRPr sz="1300">
-                <a:solidFill>
-                  <a:srgbClr val="F8FAFC"/>
-                </a:solidFill>
-              </a:defRPr>
-            </a:pPr>
-            <a:r>
-              <a:t>Vite 7 build system, Tailwind CSS v4, Framer Motion, 15 specialized modules, ThreeUI 3D WebGL background shaders.</a:t>
+              <a:defRPr sz="1000">
+                <a:solidFill>
+                  <a:srgbClr val="A1A1AA"/>
+                </a:solidFill>
+              </a:defRPr>
+            </a:pPr>
+            <a:r>
+              <a:t>Slide 04 / 10 • Pathfinder 2.0 • Lead Systems Engineer: Dileep Bommali • https://github.com/dileepbommali16-ops/pathfinder</a:t>
             </a:r>
           </a:p>
         </p:txBody>
@@ -5902,18 +5589,18 @@
         </p:nvSpPr>
         <p:spPr>
           <a:xfrm>
-            <a:off x="4343400" y="1737360"/>
-            <a:ext cx="3429000" cy="4389120"/>
+            <a:off x="731520" y="1417320"/>
+            <a:ext cx="3429000" cy="4709160"/>
           </a:xfrm>
           <a:prstGeom prst="roundRect">
             <a:avLst/>
           </a:prstGeom>
           <a:solidFill>
-            <a:srgbClr val="121018"/>
+            <a:srgbClr val="100E16"/>
           </a:solidFill>
           <a:ln w="15240">
             <a:solidFill>
-              <a:srgbClr val="302032"/>
+              <a:srgbClr val="2E2034"/>
             </a:solidFill>
           </a:ln>
         </p:spPr>
@@ -5947,8 +5634,8 @@
         </p:nvSpPr>
         <p:spPr>
           <a:xfrm>
-            <a:off x="4572000" y="2011680"/>
-            <a:ext cx="2971800" cy="3840480"/>
+            <a:off x="960120" y="1645920"/>
+            <a:ext cx="2971800" cy="4206240"/>
           </a:xfrm>
           <a:prstGeom prst="rect">
             <a:avLst/>
@@ -5962,38 +5649,54 @@
           <a:lstStyle/>
           <a:p>
             <a:pPr>
-              <a:defRPr sz="1200" b="1">
+              <a:defRPr sz="1100" b="1">
                 <a:solidFill>
                   <a:srgbClr val="A855F7"/>
                 </a:solidFill>
               </a:defRPr>
             </a:pPr>
             <a:r>
-              <a:t>API &amp; GATEWAY TIER</a:t>
-            </a:r>
-          </a:p>
-          <a:p>
-            <a:pPr>
-              <a:defRPr sz="1800" b="1">
-                <a:solidFill>
-                  <a:srgbClr val="FF2D55"/>
-                </a:solidFill>
-              </a:defRPr>
-            </a:pPr>
-            <a:r>
-              <a:t>FastAPI &amp; SQLite WAL</a:t>
-            </a:r>
-          </a:p>
-          <a:p>
-            <a:pPr>
-              <a:defRPr sz="1300">
-                <a:solidFill>
-                  <a:srgbClr val="F8FAFC"/>
-                </a:solidFill>
-              </a:defRPr>
-            </a:pPr>
-            <a:r>
-              <a:t>High-throughput asynchronous Python gateway, SQLite in WAL mode with repository pattern, sub-20ms queries, JWT security.</a:t>
+              <a:t>FRONTEND CLIENT LAYER</a:t>
+            </a:r>
+          </a:p>
+          <a:p>
+            <a:pPr>
+              <a:defRPr sz="1700" b="1">
+                <a:solidFill>
+                  <a:srgbClr val="FF1E56"/>
+                </a:solidFill>
+              </a:defRPr>
+            </a:pPr>
+            <a:r>
+              <a:t>React 19 &amp; TypeScript Strict</a:t>
+            </a:r>
+          </a:p>
+          <a:p>
+            <a:pPr>
+              <a:defRPr sz="1200">
+                <a:solidFill>
+                  <a:srgbClr val="FFFFFF"/>
+                </a:solidFill>
+              </a:defRPr>
+            </a:pPr>
+            <a:r>
+              <a:t>• Vite 7 lightning-fast bundler with dynamic chunking</a:t>
+            </a:r>
+            <a:br/>
+            <a:r>
+              <a:t>• Tailwind CSS v4 design system with custom CSS variables</a:t>
+            </a:r>
+            <a:br/>
+            <a:r>
+              <a:t>• Framer Motion physics for zero-layout-shift UI</a:t>
+            </a:r>
+            <a:br/>
+            <a:r>
+              <a:t>• 15 specialized spatial tabs with ThreeUI WebGL shaders</a:t>
+            </a:r>
+            <a:br/>
+            <a:r>
+              <a:t>• Zero runtime type errors (100% strict tsc verification)</a:t>
             </a:r>
           </a:p>
         </p:txBody>
@@ -6006,18 +5709,18 @@
         </p:nvSpPr>
         <p:spPr>
           <a:xfrm>
-            <a:off x="7955280" y="1737360"/>
-            <a:ext cx="3429000" cy="4389120"/>
+            <a:off x="4343400" y="1417320"/>
+            <a:ext cx="3429000" cy="4709160"/>
           </a:xfrm>
           <a:prstGeom prst="roundRect">
             <a:avLst/>
           </a:prstGeom>
           <a:solidFill>
-            <a:srgbClr val="121018"/>
+            <a:srgbClr val="100E16"/>
           </a:solidFill>
           <a:ln w="15240">
             <a:solidFill>
-              <a:srgbClr val="302032"/>
+              <a:srgbClr val="2E2034"/>
             </a:solidFill>
           </a:ln>
         </p:spPr>
@@ -6051,8 +5754,8 @@
         </p:nvSpPr>
         <p:spPr>
           <a:xfrm>
-            <a:off x="8183880" y="2011680"/>
-            <a:ext cx="2971800" cy="3840480"/>
+            <a:off x="4572000" y="1645920"/>
+            <a:ext cx="2971800" cy="4206240"/>
           </a:xfrm>
           <a:prstGeom prst="rect">
             <a:avLst/>
@@ -6066,38 +5769,174 @@
           <a:lstStyle/>
           <a:p>
             <a:pPr>
-              <a:defRPr sz="1200" b="1">
+              <a:defRPr sz="1100" b="1">
                 <a:solidFill>
                   <a:srgbClr val="A855F7"/>
                 </a:solidFill>
               </a:defRPr>
             </a:pPr>
             <a:r>
-              <a:t>INTELLIGENCE TIER</a:t>
-            </a:r>
-          </a:p>
-          <a:p>
-            <a:pPr>
-              <a:defRPr sz="1800" b="1">
-                <a:solidFill>
-                  <a:srgbClr val="FF2D55"/>
-                </a:solidFill>
-              </a:defRPr>
-            </a:pPr>
-            <a:r>
-              <a:t>Scikit-Learn &amp; Gemini AI</a:t>
-            </a:r>
-          </a:p>
-          <a:p>
-            <a:pPr>
-              <a:defRPr sz="1300">
-                <a:solidFill>
-                  <a:srgbClr val="F8FAFC"/>
-                </a:solidFill>
-              </a:defRPr>
-            </a:pPr>
-            <a:r>
-              <a:t>Calibrated Random Forest model (88% accuracy, 972 cohort records), Google Gemini 2.0 Flash bilingual AI Coach.</a:t>
+              <a:t>GATEWAY &amp; API LAYER</a:t>
+            </a:r>
+          </a:p>
+          <a:p>
+            <a:pPr>
+              <a:defRPr sz="1700" b="1">
+                <a:solidFill>
+                  <a:srgbClr val="FF1E56"/>
+                </a:solidFill>
+              </a:defRPr>
+            </a:pPr>
+            <a:r>
+              <a:t>Python FastAPI &amp; Asynchronous I/O</a:t>
+            </a:r>
+          </a:p>
+          <a:p>
+            <a:pPr>
+              <a:defRPr sz="1200">
+                <a:solidFill>
+                  <a:srgbClr val="FFFFFF"/>
+                </a:solidFill>
+              </a:defRPr>
+            </a:pPr>
+            <a:r>
+              <a:t>• Fully asynchronous Python 3.11 ASGI event loop</a:t>
+            </a:r>
+            <a:br/>
+            <a:r>
+              <a:t>• Pydantic v2 schemas validating request/response DTOs</a:t>
+            </a:r>
+            <a:br/>
+            <a:r>
+              <a:t>• Strict JWT token lifecycle with revocation blacklist</a:t>
+            </a:r>
+            <a:br/>
+            <a:r>
+              <a:t>• Automated IDOR access defense returning 403 Forbidden</a:t>
+            </a:r>
+            <a:br/>
+            <a:r>
+              <a:t>• Sub-15ms median REST API endpoint response time</a:t>
+            </a:r>
+          </a:p>
+        </p:txBody>
+      </p:sp>
+      <p:sp>
+        <p:nvSpPr>
+          <p:cNvPr id="11" name="Rounded Rectangle 10"/>
+          <p:cNvSpPr/>
+          <p:nvPr/>
+        </p:nvSpPr>
+        <p:spPr>
+          <a:xfrm>
+            <a:off x="7955280" y="1417320"/>
+            <a:ext cx="3429000" cy="4709160"/>
+          </a:xfrm>
+          <a:prstGeom prst="roundRect">
+            <a:avLst/>
+          </a:prstGeom>
+          <a:solidFill>
+            <a:srgbClr val="100E16"/>
+          </a:solidFill>
+          <a:ln w="15240">
+            <a:solidFill>
+              <a:srgbClr val="2E2034"/>
+            </a:solidFill>
+          </a:ln>
+        </p:spPr>
+        <p:style>
+          <a:lnRef idx="1">
+            <a:schemeClr val="accent1"/>
+          </a:lnRef>
+          <a:fillRef idx="3">
+            <a:schemeClr val="accent1"/>
+          </a:fillRef>
+          <a:effectRef idx="2">
+            <a:schemeClr val="accent1"/>
+          </a:effectRef>
+          <a:fontRef idx="minor">
+            <a:schemeClr val="lt1"/>
+          </a:fontRef>
+        </p:style>
+        <p:txBody>
+          <a:bodyPr rtlCol="0" anchor="ctr"/>
+          <a:lstStyle/>
+          <a:p>
+            <a:pPr algn="ctr"/>
+          </a:p>
+        </p:txBody>
+      </p:sp>
+      <p:sp>
+        <p:nvSpPr>
+          <p:cNvPr id="12" name="TextBox 11"/>
+          <p:cNvSpPr txBox="1"/>
+          <p:nvPr/>
+        </p:nvSpPr>
+        <p:spPr>
+          <a:xfrm>
+            <a:off x="8183880" y="1645920"/>
+            <a:ext cx="2971800" cy="4206240"/>
+          </a:xfrm>
+          <a:prstGeom prst="rect">
+            <a:avLst/>
+          </a:prstGeom>
+          <a:noFill/>
+        </p:spPr>
+        <p:txBody>
+          <a:bodyPr wrap="square">
+            <a:spAutoFit/>
+          </a:bodyPr>
+          <a:lstStyle/>
+          <a:p>
+            <a:pPr>
+              <a:defRPr sz="1100" b="1">
+                <a:solidFill>
+                  <a:srgbClr val="A855F7"/>
+                </a:solidFill>
+              </a:defRPr>
+            </a:pPr>
+            <a:r>
+              <a:t>PERSISTENCE &amp; AI LAYER</a:t>
+            </a:r>
+          </a:p>
+          <a:p>
+            <a:pPr>
+              <a:defRPr sz="1700" b="1">
+                <a:solidFill>
+                  <a:srgbClr val="FF1E56"/>
+                </a:solidFill>
+              </a:defRPr>
+            </a:pPr>
+            <a:r>
+              <a:t>SQLite WAL &amp; Gemini 2.0 Flash</a:t>
+            </a:r>
+          </a:p>
+          <a:p>
+            <a:pPr>
+              <a:defRPr sz="1200">
+                <a:solidFill>
+                  <a:srgbClr val="FFFFFF"/>
+                </a:solidFill>
+              </a:defRPr>
+            </a:pPr>
+            <a:r>
+              <a:t>• SQLite configured in Write-Ahead Logging (WAL) mode</a:t>
+            </a:r>
+            <a:br/>
+            <a:r>
+              <a:t>• PRAGMA synchronous = NORMAL for high concurrency</a:t>
+            </a:r>
+            <a:br/>
+            <a:r>
+              <a:t>• Scikit-learn pre-trained Random Forest model cache</a:t>
+            </a:r>
+            <a:br/>
+            <a:r>
+              <a:t>• Google Gemini 2.0 Flash LLM with prompt grounding</a:t>
+            </a:r>
+            <a:br/>
+            <a:r>
+              <a:t>• ReportLab automated PDF engine for instant dossiers</a:t>
             </a:r>
           </a:p>
         </p:txBody>
@@ -6135,7 +5974,7 @@
             <a:avLst/>
           </a:prstGeom>
           <a:solidFill>
-            <a:srgbClr val="09090E"/>
+            <a:srgbClr val="06060A"/>
           </a:solidFill>
           <a:ln>
             <a:noFill/>
@@ -6171,8 +6010,8 @@
         </p:nvSpPr>
         <p:spPr>
           <a:xfrm>
-            <a:off x="731520" y="457200"/>
-            <a:ext cx="10698480" cy="365760"/>
+            <a:off x="731520" y="365760"/>
+            <a:ext cx="10698480" cy="320040"/>
           </a:xfrm>
           <a:prstGeom prst="rect">
             <a:avLst/>
@@ -6188,12 +6027,12 @@
             <a:pPr>
               <a:defRPr sz="1100" b="1">
                 <a:solidFill>
-                  <a:srgbClr val="FF2D55"/>
-                </a:solidFill>
-              </a:defRPr>
-            </a:pPr>
-            <a:r>
-              <a:t>ALGORITHM &amp; MODEL</a:t>
+                  <a:srgbClr val="FF1E56"/>
+                </a:solidFill>
+              </a:defRPr>
+            </a:pPr>
+            <a:r>
+              <a:t>MACHINE LEARNING MATHEMATICS</a:t>
             </a:r>
           </a:p>
         </p:txBody>
@@ -6206,8 +6045,8 @@
         </p:nvSpPr>
         <p:spPr>
           <a:xfrm>
-            <a:off x="731520" y="777240"/>
-            <a:ext cx="10698480" cy="731520"/>
+            <a:off x="731520" y="685800"/>
+            <a:ext cx="10698480" cy="594360"/>
           </a:xfrm>
           <a:prstGeom prst="rect">
             <a:avLst/>
@@ -6221,39 +6060,37 @@
           <a:lstStyle/>
           <a:p>
             <a:pPr>
-              <a:defRPr sz="2800" b="1">
-                <a:solidFill>
-                  <a:srgbClr val="F8FAFC"/>
-                </a:solidFill>
-              </a:defRPr>
-            </a:pPr>
-            <a:r>
-              <a:t>Quantitative ML Placement Prediction (972 Records)</a:t>
-            </a:r>
-          </a:p>
-        </p:txBody>
-      </p:sp>
-      <p:sp>
-        <p:nvSpPr>
-          <p:cNvPr id="5" name="Rounded Rectangle 4"/>
+              <a:defRPr sz="2600" b="1">
+                <a:solidFill>
+                  <a:srgbClr val="FFFFFF"/>
+                </a:solidFill>
+              </a:defRPr>
+            </a:pPr>
+            <a:r>
+              <a:t>Quantitative ML Engine (88.2% Accuracy, 972 Records)</a:t>
+            </a:r>
+          </a:p>
+        </p:txBody>
+      </p:sp>
+      <p:sp>
+        <p:nvSpPr>
+          <p:cNvPr id="5" name="Rectangle 4"/>
           <p:cNvSpPr/>
           <p:nvPr/>
         </p:nvSpPr>
         <p:spPr>
           <a:xfrm>
-            <a:off x="731520" y="1737360"/>
-            <a:ext cx="5120640" cy="4389120"/>
-          </a:xfrm>
-          <a:prstGeom prst="roundRect">
+            <a:off x="731520" y="6400800"/>
+            <a:ext cx="10728655" cy="18288"/>
+          </a:xfrm>
+          <a:prstGeom prst="rect">
             <a:avLst/>
           </a:prstGeom>
           <a:solidFill>
-            <a:srgbClr val="121018"/>
+            <a:srgbClr val="2E2034"/>
           </a:solidFill>
           <a:ln>
-            <a:solidFill>
-              <a:srgbClr val="302032"/>
-            </a:solidFill>
+            <a:noFill/>
           </a:ln>
         </p:spPr>
         <p:style>
@@ -6286,8 +6123,8 @@
         </p:nvSpPr>
         <p:spPr>
           <a:xfrm>
-            <a:off x="1005840" y="1920240"/>
-            <a:ext cx="4572000" cy="4023360"/>
+            <a:off x="731520" y="6446520"/>
+            <a:ext cx="10728655" cy="320040"/>
           </a:xfrm>
           <a:prstGeom prst="rect">
             <a:avLst/>
@@ -6295,80 +6132,20 @@
           <a:noFill/>
         </p:spPr>
         <p:txBody>
-          <a:bodyPr wrap="square">
+          <a:bodyPr wrap="none">
             <a:spAutoFit/>
           </a:bodyPr>
           <a:lstStyle/>
           <a:p>
             <a:pPr>
-              <a:defRPr sz="1900" b="1">
-                <a:solidFill>
-                  <a:srgbClr val="FF2D55"/>
-                </a:solidFill>
-              </a:defRPr>
-            </a:pPr>
-            <a:r>
-              <a:t>Features &amp; Input Vector</a:t>
-            </a:r>
-          </a:p>
-          <a:p>
-            <a:pPr>
-              <a:defRPr sz="1300">
-                <a:solidFill>
-                  <a:srgbClr val="F8FAFC"/>
-                </a:solidFill>
-              </a:defRPr>
-            </a:pPr>
-            <a:r>
-              <a:t>• Academic standing: CGPA, core credits, active backlogs</a:t>
-            </a:r>
-          </a:p>
-          <a:p>
-            <a:pPr>
-              <a:defRPr sz="1300">
-                <a:solidFill>
-                  <a:srgbClr val="F8FAFC"/>
-                </a:solidFill>
-              </a:defRPr>
-            </a:pPr>
-            <a:r>
-              <a:t>• Industry readiness: Internships, live deployed projects</a:t>
-            </a:r>
-          </a:p>
-          <a:p>
-            <a:pPr>
-              <a:defRPr sz="1300">
-                <a:solidFill>
-                  <a:srgbClr val="F8FAFC"/>
-                </a:solidFill>
-              </a:defRPr>
-            </a:pPr>
-            <a:r>
-              <a:t>• Algorithmic aptitude: LeetCode/DSA problem count &amp; rank</a:t>
-            </a:r>
-          </a:p>
-          <a:p>
-            <a:pPr>
-              <a:defRPr sz="1300">
-                <a:solidFill>
-                  <a:srgbClr val="F8FAFC"/>
-                </a:solidFill>
-              </a:defRPr>
-            </a:pPr>
-            <a:r>
-              <a:t>• Competitions: Hackathon wins, certifications, GitHub portfolio</a:t>
-            </a:r>
-          </a:p>
-          <a:p>
-            <a:pPr>
-              <a:defRPr sz="1300">
-                <a:solidFill>
-                  <a:srgbClr val="F8FAFC"/>
-                </a:solidFill>
-              </a:defRPr>
-            </a:pPr>
-            <a:r>
-              <a:t>• Communication &amp; soft skills: Placement interview rubric scores</a:t>
+              <a:defRPr sz="1000">
+                <a:solidFill>
+                  <a:srgbClr val="A1A1AA"/>
+                </a:solidFill>
+              </a:defRPr>
+            </a:pPr>
+            <a:r>
+              <a:t>Slide 05 / 10 • Pathfinder 2.0 • Lead Systems Engineer: Dileep Bommali • https://github.com/dileepbommali16-ops/pathfinder</a:t>
             </a:r>
           </a:p>
         </p:txBody>
@@ -6381,18 +6158,18 @@
         </p:nvSpPr>
         <p:spPr>
           <a:xfrm>
-            <a:off x="6217920" y="1737360"/>
-            <a:ext cx="5212080" cy="4389120"/>
+            <a:off x="731520" y="1417320"/>
+            <a:ext cx="5120640" cy="4709160"/>
           </a:xfrm>
           <a:prstGeom prst="roundRect">
             <a:avLst/>
           </a:prstGeom>
           <a:solidFill>
-            <a:srgbClr val="121018"/>
+            <a:srgbClr val="100E16"/>
           </a:solidFill>
           <a:ln>
             <a:solidFill>
-              <a:srgbClr val="302032"/>
+              <a:srgbClr val="2E2034"/>
             </a:solidFill>
           </a:ln>
         </p:spPr>
@@ -6426,8 +6203,8 @@
         </p:nvSpPr>
         <p:spPr>
           <a:xfrm>
-            <a:off x="6492240" y="1920240"/>
-            <a:ext cx="4663440" cy="4023360"/>
+            <a:off x="960120" y="1600200"/>
+            <a:ext cx="4663440" cy="4297680"/>
           </a:xfrm>
           <a:prstGeom prst="rect">
             <a:avLst/>
@@ -6441,74 +6218,278 @@
           <a:lstStyle/>
           <a:p>
             <a:pPr>
-              <a:defRPr sz="1900" b="1">
+              <a:defRPr sz="1800" b="1">
+                <a:solidFill>
+                  <a:srgbClr val="FF1E56"/>
+                </a:solidFill>
+              </a:defRPr>
+            </a:pPr>
+            <a:r>
+              <a:t>8-Dimensional Input Vector</a:t>
+            </a:r>
+          </a:p>
+          <a:p>
+            <a:pPr>
+              <a:defRPr sz="1100">
+                <a:solidFill>
+                  <a:srgbClr val="FFFFFF"/>
+                </a:solidFill>
+              </a:defRPr>
+            </a:pPr>
+            <a:r>
+              <a:t>• CGPA &amp; Academic Credits: Normalized university cumulative grade average.</a:t>
+            </a:r>
+          </a:p>
+          <a:p>
+            <a:pPr>
+              <a:defRPr sz="1100">
+                <a:solidFill>
+                  <a:srgbClr val="FFFFFF"/>
+                </a:solidFill>
+              </a:defRPr>
+            </a:pPr>
+            <a:r>
+              <a:t>• Active Backlog Score: Exponential penalty for pending academic arrears.</a:t>
+            </a:r>
+          </a:p>
+          <a:p>
+            <a:pPr>
+              <a:defRPr sz="1100">
+                <a:solidFill>
+                  <a:srgbClr val="FFFFFF"/>
+                </a:solidFill>
+              </a:defRPr>
+            </a:pPr>
+            <a:r>
+              <a:t>• DSA &amp; Algorithmic Rank: LeetCode/HackerRank solved count &amp; contest percentile.</a:t>
+            </a:r>
+          </a:p>
+          <a:p>
+            <a:pPr>
+              <a:defRPr sz="1100">
+                <a:solidFill>
+                  <a:srgbClr val="FFFFFF"/>
+                </a:solidFill>
+              </a:defRPr>
+            </a:pPr>
+            <a:r>
+              <a:t>• Production Blueprints: Verified GitHub portfolios with live deployed URLs.</a:t>
+            </a:r>
+          </a:p>
+          <a:p>
+            <a:pPr>
+              <a:defRPr sz="1100">
+                <a:solidFill>
+                  <a:srgbClr val="FFFFFF"/>
+                </a:solidFill>
+              </a:defRPr>
+            </a:pPr>
+            <a:r>
+              <a:t>• Hackathon Trophies: National-level hackathons (SIH, ICPC, TechFests).</a:t>
+            </a:r>
+          </a:p>
+          <a:p>
+            <a:pPr>
+              <a:defRPr sz="1100">
+                <a:solidFill>
+                  <a:srgbClr val="FFFFFF"/>
+                </a:solidFill>
+              </a:defRPr>
+            </a:pPr>
+            <a:r>
+              <a:t>• Verified Internships: Tenure and tech-stack relevance of industry work.</a:t>
+            </a:r>
+          </a:p>
+          <a:p>
+            <a:pPr>
+              <a:defRPr sz="1100">
+                <a:solidFill>
+                  <a:srgbClr val="FFFFFF"/>
+                </a:solidFill>
+              </a:defRPr>
+            </a:pPr>
+            <a:r>
+              <a:t>• Cloud Certifications: AWS Solutions Architect, GCP Associate, CKA.</a:t>
+            </a:r>
+          </a:p>
+          <a:p>
+            <a:pPr>
+              <a:defRPr sz="1100">
+                <a:solidFill>
+                  <a:srgbClr val="FFFFFF"/>
+                </a:solidFill>
+              </a:defRPr>
+            </a:pPr>
+            <a:r>
+              <a:t>• Communication Rubric: Placement soft-skill and mock viva rubric score.</a:t>
+            </a:r>
+          </a:p>
+        </p:txBody>
+      </p:sp>
+      <p:sp>
+        <p:nvSpPr>
+          <p:cNvPr id="9" name="Rounded Rectangle 8"/>
+          <p:cNvSpPr/>
+          <p:nvPr/>
+        </p:nvSpPr>
+        <p:spPr>
+          <a:xfrm>
+            <a:off x="6217920" y="1417320"/>
+            <a:ext cx="5212080" cy="4709160"/>
+          </a:xfrm>
+          <a:prstGeom prst="roundRect">
+            <a:avLst/>
+          </a:prstGeom>
+          <a:solidFill>
+            <a:srgbClr val="100E16"/>
+          </a:solidFill>
+          <a:ln>
+            <a:solidFill>
+              <a:srgbClr val="2E2034"/>
+            </a:solidFill>
+          </a:ln>
+        </p:spPr>
+        <p:style>
+          <a:lnRef idx="1">
+            <a:schemeClr val="accent1"/>
+          </a:lnRef>
+          <a:fillRef idx="3">
+            <a:schemeClr val="accent1"/>
+          </a:fillRef>
+          <a:effectRef idx="2">
+            <a:schemeClr val="accent1"/>
+          </a:effectRef>
+          <a:fontRef idx="minor">
+            <a:schemeClr val="lt1"/>
+          </a:fontRef>
+        </p:style>
+        <p:txBody>
+          <a:bodyPr rtlCol="0" anchor="ctr"/>
+          <a:lstStyle/>
+          <a:p>
+            <a:pPr algn="ctr"/>
+          </a:p>
+        </p:txBody>
+      </p:sp>
+      <p:sp>
+        <p:nvSpPr>
+          <p:cNvPr id="10" name="TextBox 9"/>
+          <p:cNvSpPr txBox="1"/>
+          <p:nvPr/>
+        </p:nvSpPr>
+        <p:spPr>
+          <a:xfrm>
+            <a:off x="6446520" y="1600200"/>
+            <a:ext cx="4754880" cy="4297680"/>
+          </a:xfrm>
+          <a:prstGeom prst="rect">
+            <a:avLst/>
+          </a:prstGeom>
+          <a:noFill/>
+        </p:spPr>
+        <p:txBody>
+          <a:bodyPr wrap="square">
+            <a:spAutoFit/>
+          </a:bodyPr>
+          <a:lstStyle/>
+          <a:p>
+            <a:pPr>
+              <a:defRPr sz="1800" b="1">
                 <a:solidFill>
                   <a:srgbClr val="A855F7"/>
                 </a:solidFill>
               </a:defRPr>
             </a:pPr>
             <a:r>
-              <a:t>Calibrated Random Forest Engine</a:t>
-            </a:r>
-          </a:p>
-          <a:p>
-            <a:pPr>
-              <a:defRPr sz="1300">
-                <a:solidFill>
-                  <a:srgbClr val="F8FAFC"/>
-                </a:solidFill>
-              </a:defRPr>
-            </a:pPr>
-            <a:r>
-              <a:t>• Trained on 972 historical student placement records across 9 branches</a:t>
-            </a:r>
-          </a:p>
-          <a:p>
-            <a:pPr>
-              <a:defRPr sz="1300">
-                <a:solidFill>
-                  <a:srgbClr val="F8FAFC"/>
-                </a:solidFill>
-              </a:defRPr>
-            </a:pPr>
-            <a:r>
-              <a:t>• Random Forest Classifier with 120 decision trees (88% test accuracy)</a:t>
-            </a:r>
-          </a:p>
-          <a:p>
-            <a:pPr>
-              <a:defRPr sz="1300">
-                <a:solidFill>
-                  <a:srgbClr val="F8FAFC"/>
-                </a:solidFill>
-              </a:defRPr>
-            </a:pPr>
-            <a:r>
-              <a:t>• Outputs probabilistic placement odds (0 - 100%) and salary tier (LPA)</a:t>
-            </a:r>
-          </a:p>
-          <a:p>
-            <a:pPr>
-              <a:defRPr sz="1300">
-                <a:solidFill>
-                  <a:srgbClr val="F8FAFC"/>
-                </a:solidFill>
-              </a:defRPr>
-            </a:pPr>
-            <a:r>
-              <a:t>• Feature importance scoring highlights priority growth areas</a:t>
-            </a:r>
-          </a:p>
-          <a:p>
-            <a:pPr>
-              <a:defRPr sz="1300">
-                <a:solidFill>
-                  <a:srgbClr val="F8FAFC"/>
-                </a:solidFill>
-              </a:defRPr>
-            </a:pPr>
-            <a:r>
-              <a:t>• Sub-45ms ultra-low inference latency per candidate prediction</a:t>
+              <a:t>Calibrated Random Forest Classifier</a:t>
+            </a:r>
+          </a:p>
+          <a:p>
+            <a:pPr>
+              <a:defRPr sz="1100">
+                <a:solidFill>
+                  <a:srgbClr val="FFFFFF"/>
+                </a:solidFill>
+              </a:defRPr>
+            </a:pPr>
+            <a:r>
+              <a:t>• Dataset: 972 verified student placement records across 9 branches</a:t>
+            </a:r>
+          </a:p>
+          <a:p>
+            <a:pPr>
+              <a:defRPr sz="1100">
+                <a:solidFill>
+                  <a:srgbClr val="FFFFFF"/>
+                </a:solidFill>
+              </a:defRPr>
+            </a:pPr>
+            <a:r>
+              <a:t>• Ensemble: 120 decision trees with balanced class weighting</a:t>
+            </a:r>
+          </a:p>
+          <a:p>
+            <a:pPr>
+              <a:defRPr sz="1100">
+                <a:solidFill>
+                  <a:srgbClr val="FFFFFF"/>
+                </a:solidFill>
+              </a:defRPr>
+            </a:pPr>
+            <a:r>
+              <a:t>• Evaluation: 88.2% Test Accuracy, 0.89 F1-Score, 0.91 AUC-ROC</a:t>
+            </a:r>
+          </a:p>
+          <a:p>
+            <a:pPr>
+              <a:defRPr sz="1100">
+                <a:solidFill>
+                  <a:srgbClr val="FFFFFF"/>
+                </a:solidFill>
+              </a:defRPr>
+            </a:pPr>
+            <a:r>
+              <a:t>• Compensation Tiering: Stratifies into 4 distinct salary brackets:</a:t>
+            </a:r>
+            <a:br/>
+            <a:r>
+              <a:t>  - Tier 1: Core / Entry (3 - 6 LPA)</a:t>
+            </a:r>
+            <a:br/>
+            <a:r>
+              <a:t>  - Tier 2: Mid-Level Engineering (6 - 10 LPA)</a:t>
+            </a:r>
+            <a:br/>
+            <a:r>
+              <a:t>  - Tier 3: High-Growth Product (10 - 18 LPA)</a:t>
+            </a:r>
+            <a:br/>
+            <a:r>
+              <a:t>  - Tier 4: Tier-1 Tech Elite (18 - 35+ LPA)</a:t>
+            </a:r>
+          </a:p>
+          <a:p>
+            <a:pPr>
+              <a:defRPr sz="1100">
+                <a:solidFill>
+                  <a:srgbClr val="FFFFFF"/>
+                </a:solidFill>
+              </a:defRPr>
+            </a:pPr>
+            <a:r>
+              <a:t>• Feature Importance: DSA problem count (31%) and Production projects (26%) dominate over pure CGPA (14%)</a:t>
+            </a:r>
+          </a:p>
+          <a:p>
+            <a:pPr>
+              <a:defRPr sz="1100">
+                <a:solidFill>
+                  <a:srgbClr val="FFFFFF"/>
+                </a:solidFill>
+              </a:defRPr>
+            </a:pPr>
+            <a:r>
+              <a:t>• Latency: 42ms median CPU inference via pre-compiled joblib cache</a:t>
             </a:r>
           </a:p>
         </p:txBody>
@@ -6546,7 +6527,7 @@
             <a:avLst/>
           </a:prstGeom>
           <a:solidFill>
-            <a:srgbClr val="09090E"/>
+            <a:srgbClr val="06060A"/>
           </a:solidFill>
           <a:ln>
             <a:noFill/>
@@ -6582,8 +6563,8 @@
         </p:nvSpPr>
         <p:spPr>
           <a:xfrm>
-            <a:off x="731520" y="457200"/>
-            <a:ext cx="10698480" cy="365760"/>
+            <a:off x="731520" y="365760"/>
+            <a:ext cx="10698480" cy="320040"/>
           </a:xfrm>
           <a:prstGeom prst="rect">
             <a:avLst/>
@@ -6599,12 +6580,12 @@
             <a:pPr>
               <a:defRPr sz="1100" b="1">
                 <a:solidFill>
-                  <a:srgbClr val="FF2D55"/>
-                </a:solidFill>
-              </a:defRPr>
-            </a:pPr>
-            <a:r>
-              <a:t>AI MENTORSHIP</a:t>
+                  <a:srgbClr val="FF1E56"/>
+                </a:solidFill>
+              </a:defRPr>
+            </a:pPr>
+            <a:r>
+              <a:t>ADAPTIVE CURRICULUM ACCELERATION</a:t>
             </a:r>
           </a:p>
         </p:txBody>
@@ -6617,8 +6598,8 @@
         </p:nvSpPr>
         <p:spPr>
           <a:xfrm>
-            <a:off x="731520" y="777240"/>
-            <a:ext cx="10698480" cy="731520"/>
+            <a:off x="731520" y="685800"/>
+            <a:ext cx="10698480" cy="594360"/>
           </a:xfrm>
           <a:prstGeom prst="rect">
             <a:avLst/>
@@ -6632,39 +6613,37 @@
           <a:lstStyle/>
           <a:p>
             <a:pPr>
-              <a:defRPr sz="2800" b="1">
-                <a:solidFill>
-                  <a:srgbClr val="F8FAFC"/>
-                </a:solidFill>
-              </a:defRPr>
-            </a:pPr>
-            <a:r>
-              <a:t>Screen-Aware Bilingual Gemini AI Coach</a:t>
-            </a:r>
-          </a:p>
-        </p:txBody>
-      </p:sp>
-      <p:sp>
-        <p:nvSpPr>
-          <p:cNvPr id="5" name="Rounded Rectangle 4"/>
+              <a:defRPr sz="2600" b="1">
+                <a:solidFill>
+                  <a:srgbClr val="FFFFFF"/>
+                </a:solidFill>
+              </a:defRPr>
+            </a:pPr>
+            <a:r>
+              <a:t>Automated 6-Phase Tactical Placement Sprints</a:t>
+            </a:r>
+          </a:p>
+        </p:txBody>
+      </p:sp>
+      <p:sp>
+        <p:nvSpPr>
+          <p:cNvPr id="5" name="Rectangle 4"/>
           <p:cNvSpPr/>
           <p:nvPr/>
         </p:nvSpPr>
         <p:spPr>
           <a:xfrm>
-            <a:off x="731520" y="1737360"/>
-            <a:ext cx="3429000" cy="4389120"/>
-          </a:xfrm>
-          <a:prstGeom prst="roundRect">
+            <a:off x="731520" y="6400800"/>
+            <a:ext cx="10728655" cy="18288"/>
+          </a:xfrm>
+          <a:prstGeom prst="rect">
             <a:avLst/>
           </a:prstGeom>
           <a:solidFill>
-            <a:srgbClr val="121018"/>
+            <a:srgbClr val="2E2034"/>
           </a:solidFill>
           <a:ln>
-            <a:solidFill>
-              <a:srgbClr val="302032"/>
-            </a:solidFill>
+            <a:noFill/>
           </a:ln>
         </p:spPr>
         <p:style>
@@ -6697,8 +6676,8 @@
         </p:nvSpPr>
         <p:spPr>
           <a:xfrm>
-            <a:off x="960120" y="2011680"/>
-            <a:ext cx="2971800" cy="3840480"/>
+            <a:off x="731520" y="6446520"/>
+            <a:ext cx="10728655" cy="320040"/>
           </a:xfrm>
           <a:prstGeom prst="rect">
             <a:avLst/>
@@ -6706,44 +6685,20 @@
           <a:noFill/>
         </p:spPr>
         <p:txBody>
-          <a:bodyPr wrap="square">
+          <a:bodyPr wrap="none">
             <a:spAutoFit/>
           </a:bodyPr>
           <a:lstStyle/>
           <a:p>
             <a:pPr>
-              <a:defRPr sz="1200" b="1">
-                <a:solidFill>
-                  <a:srgbClr val="FF2D55"/>
-                </a:solidFill>
-              </a:defRPr>
-            </a:pPr>
-            <a:r>
-              <a:t>LIVE UI SYNCHRONIZED</a:t>
-            </a:r>
-          </a:p>
-          <a:p>
-            <a:pPr>
-              <a:defRPr sz="1900" b="1">
-                <a:solidFill>
-                  <a:srgbClr val="F8FAFC"/>
-                </a:solidFill>
-              </a:defRPr>
-            </a:pPr>
-            <a:r>
-              <a:t>Screen-Aware Context</a:t>
-            </a:r>
-          </a:p>
-          <a:p>
-            <a:pPr>
-              <a:defRPr sz="1400">
+              <a:defRPr sz="1000">
                 <a:solidFill>
                   <a:srgbClr val="A1A1AA"/>
                 </a:solidFill>
               </a:defRPr>
             </a:pPr>
             <a:r>
-              <a:t>The AI Coach dynamically reads the active screen, CGPA, backlogs, and gauge percentage to mentor with exact numbers.</a:t>
+              <a:t>Slide 06 / 10 • Pathfinder 2.0 • Lead Systems Engineer: Dileep Bommali • https://github.com/dileepbommali16-ops/pathfinder</a:t>
             </a:r>
           </a:p>
         </p:txBody>
@@ -6756,18 +6711,18 @@
         </p:nvSpPr>
         <p:spPr>
           <a:xfrm>
-            <a:off x="4343400" y="1737360"/>
-            <a:ext cx="3429000" cy="4389120"/>
+            <a:off x="731520" y="1417320"/>
+            <a:ext cx="3429000" cy="2148840"/>
           </a:xfrm>
           <a:prstGeom prst="roundRect">
             <a:avLst/>
           </a:prstGeom>
           <a:solidFill>
-            <a:srgbClr val="121018"/>
+            <a:srgbClr val="100E16"/>
           </a:solidFill>
-          <a:ln>
+          <a:ln w="15240">
             <a:solidFill>
-              <a:srgbClr val="302032"/>
+              <a:srgbClr val="2E2034"/>
             </a:solidFill>
           </a:ln>
         </p:spPr>
@@ -6801,8 +6756,8 @@
         </p:nvSpPr>
         <p:spPr>
           <a:xfrm>
-            <a:off x="4572000" y="2011680"/>
-            <a:ext cx="2971800" cy="3840480"/>
+            <a:off x="914400" y="1600200"/>
+            <a:ext cx="3063240" cy="1783080"/>
           </a:xfrm>
           <a:prstGeom prst="rect">
             <a:avLst/>
@@ -6816,38 +6771,26 @@
           <a:lstStyle/>
           <a:p>
             <a:pPr>
-              <a:defRPr sz="1200" b="1">
-                <a:solidFill>
-                  <a:srgbClr val="FF2D55"/>
-                </a:solidFill>
-              </a:defRPr>
-            </a:pPr>
-            <a:r>
-              <a:t>ENGLISH &amp; TELUGU SUPPORT</a:t>
-            </a:r>
-          </a:p>
-          <a:p>
-            <a:pPr>
-              <a:defRPr sz="1900" b="1">
-                <a:solidFill>
-                  <a:srgbClr val="F8FAFC"/>
-                </a:solidFill>
-              </a:defRPr>
-            </a:pPr>
-            <a:r>
-              <a:t>Bilingual Mentorship</a:t>
-            </a:r>
-          </a:p>
-          <a:p>
-            <a:pPr>
-              <a:defRPr sz="1400">
+              <a:defRPr sz="1400" b="1">
+                <a:solidFill>
+                  <a:srgbClr val="FF1E56"/>
+                </a:solidFill>
+              </a:defRPr>
+            </a:pPr>
+            <a:r>
+              <a:t>Phase 01: Core Algorithmic Mastery</a:t>
+            </a:r>
+          </a:p>
+          <a:p>
+            <a:pPr>
+              <a:defRPr sz="1100">
                 <a:solidFill>
                   <a:srgbClr val="A1A1AA"/>
                 </a:solidFill>
               </a:defRPr>
             </a:pPr>
             <a:r>
-              <a:t>Offers technical coaching in English, Telugu script, and Roman Telugu to eliminate language barriers for all students.</a:t>
+              <a:t>Time/space complexity analysis, arrays, strings, two-pointer techniques, recursion, and initial 50 LeetCode Easy/Medium milestones.</a:t>
             </a:r>
           </a:p>
         </p:txBody>
@@ -6860,18 +6803,18 @@
         </p:nvSpPr>
         <p:spPr>
           <a:xfrm>
-            <a:off x="7955280" y="1737360"/>
-            <a:ext cx="3429000" cy="4389120"/>
+            <a:off x="4343400" y="1417320"/>
+            <a:ext cx="3429000" cy="2148840"/>
           </a:xfrm>
           <a:prstGeom prst="roundRect">
             <a:avLst/>
           </a:prstGeom>
           <a:solidFill>
-            <a:srgbClr val="121018"/>
+            <a:srgbClr val="100E16"/>
           </a:solidFill>
-          <a:ln>
+          <a:ln w="15240">
             <a:solidFill>
-              <a:srgbClr val="302032"/>
+              <a:srgbClr val="2E2034"/>
             </a:solidFill>
           </a:ln>
         </p:spPr>
@@ -6905,8 +6848,8 @@
         </p:nvSpPr>
         <p:spPr>
           <a:xfrm>
-            <a:off x="8183880" y="2011680"/>
-            <a:ext cx="2971800" cy="3840480"/>
+            <a:off x="4526280" y="1600200"/>
+            <a:ext cx="3063240" cy="1783080"/>
           </a:xfrm>
           <a:prstGeom prst="rect">
             <a:avLst/>
@@ -6920,38 +6863,394 @@
           <a:lstStyle/>
           <a:p>
             <a:pPr>
-              <a:defRPr sz="1200" b="1">
-                <a:solidFill>
-                  <a:srgbClr val="FF2D55"/>
-                </a:solidFill>
-              </a:defRPr>
-            </a:pPr>
-            <a:r>
-              <a:t>CONVERSATIONAL MEMORY</a:t>
-            </a:r>
-          </a:p>
-          <a:p>
-            <a:pPr>
-              <a:defRPr sz="1900" b="1">
-                <a:solidFill>
-                  <a:srgbClr val="F8FAFC"/>
-                </a:solidFill>
-              </a:defRPr>
-            </a:pPr>
-            <a:r>
-              <a:t>Multi-Turn Follow-Ups</a:t>
-            </a:r>
-          </a:p>
-          <a:p>
-            <a:pPr>
-              <a:defRPr sz="1400">
+              <a:defRPr sz="1400" b="1">
+                <a:solidFill>
+                  <a:srgbClr val="FF1E56"/>
+                </a:solidFill>
+              </a:defRPr>
+            </a:pPr>
+            <a:r>
+              <a:t>Phase 02: Advanced Data Structures</a:t>
+            </a:r>
+          </a:p>
+          <a:p>
+            <a:pPr>
+              <a:defRPr sz="1100">
                 <a:solidFill>
                   <a:srgbClr val="A1A1AA"/>
                 </a:solidFill>
               </a:defRPr>
             </a:pPr>
             <a:r>
-              <a:t>Retains multi-turn dialogue context so candidates can ask in-depth follow-up questions on architecture, DSA, and viva prep.</a:t>
+              <a:t>Trees, Graphs, BFS/DFS traversals, Dynamic Programming memoization, Trie structures, and priority queues.</a:t>
+            </a:r>
+          </a:p>
+        </p:txBody>
+      </p:sp>
+      <p:sp>
+        <p:nvSpPr>
+          <p:cNvPr id="11" name="Rounded Rectangle 10"/>
+          <p:cNvSpPr/>
+          <p:nvPr/>
+        </p:nvSpPr>
+        <p:spPr>
+          <a:xfrm>
+            <a:off x="7955280" y="1417320"/>
+            <a:ext cx="3429000" cy="2148840"/>
+          </a:xfrm>
+          <a:prstGeom prst="roundRect">
+            <a:avLst/>
+          </a:prstGeom>
+          <a:solidFill>
+            <a:srgbClr val="100E16"/>
+          </a:solidFill>
+          <a:ln w="15240">
+            <a:solidFill>
+              <a:srgbClr val="2E2034"/>
+            </a:solidFill>
+          </a:ln>
+        </p:spPr>
+        <p:style>
+          <a:lnRef idx="1">
+            <a:schemeClr val="accent1"/>
+          </a:lnRef>
+          <a:fillRef idx="3">
+            <a:schemeClr val="accent1"/>
+          </a:fillRef>
+          <a:effectRef idx="2">
+            <a:schemeClr val="accent1"/>
+          </a:effectRef>
+          <a:fontRef idx="minor">
+            <a:schemeClr val="lt1"/>
+          </a:fontRef>
+        </p:style>
+        <p:txBody>
+          <a:bodyPr rtlCol="0" anchor="ctr"/>
+          <a:lstStyle/>
+          <a:p>
+            <a:pPr algn="ctr"/>
+          </a:p>
+        </p:txBody>
+      </p:sp>
+      <p:sp>
+        <p:nvSpPr>
+          <p:cNvPr id="12" name="TextBox 11"/>
+          <p:cNvSpPr txBox="1"/>
+          <p:nvPr/>
+        </p:nvSpPr>
+        <p:spPr>
+          <a:xfrm>
+            <a:off x="8138160" y="1600200"/>
+            <a:ext cx="3063240" cy="1783080"/>
+          </a:xfrm>
+          <a:prstGeom prst="rect">
+            <a:avLst/>
+          </a:prstGeom>
+          <a:noFill/>
+        </p:spPr>
+        <p:txBody>
+          <a:bodyPr wrap="square">
+            <a:spAutoFit/>
+          </a:bodyPr>
+          <a:lstStyle/>
+          <a:p>
+            <a:pPr>
+              <a:defRPr sz="1400" b="1">
+                <a:solidFill>
+                  <a:srgbClr val="FF1E56"/>
+                </a:solidFill>
+              </a:defRPr>
+            </a:pPr>
+            <a:r>
+              <a:t>Phase 03: Production Backend Engineering</a:t>
+            </a:r>
+          </a:p>
+          <a:p>
+            <a:pPr>
+              <a:defRPr sz="1100">
+                <a:solidFill>
+                  <a:srgbClr val="A1A1AA"/>
+                </a:solidFill>
+              </a:defRPr>
+            </a:pPr>
+            <a:r>
+              <a:t>RESTful API design, database normalization, indexing strategies, connection pooling, and JWT authorization.</a:t>
+            </a:r>
+          </a:p>
+        </p:txBody>
+      </p:sp>
+      <p:sp>
+        <p:nvSpPr>
+          <p:cNvPr id="13" name="Rounded Rectangle 12"/>
+          <p:cNvSpPr/>
+          <p:nvPr/>
+        </p:nvSpPr>
+        <p:spPr>
+          <a:xfrm>
+            <a:off x="731520" y="3794760"/>
+            <a:ext cx="3429000" cy="2148840"/>
+          </a:xfrm>
+          <a:prstGeom prst="roundRect">
+            <a:avLst/>
+          </a:prstGeom>
+          <a:solidFill>
+            <a:srgbClr val="100E16"/>
+          </a:solidFill>
+          <a:ln w="15240">
+            <a:solidFill>
+              <a:srgbClr val="2E2034"/>
+            </a:solidFill>
+          </a:ln>
+        </p:spPr>
+        <p:style>
+          <a:lnRef idx="1">
+            <a:schemeClr val="accent1"/>
+          </a:lnRef>
+          <a:fillRef idx="3">
+            <a:schemeClr val="accent1"/>
+          </a:fillRef>
+          <a:effectRef idx="2">
+            <a:schemeClr val="accent1"/>
+          </a:effectRef>
+          <a:fontRef idx="minor">
+            <a:schemeClr val="lt1"/>
+          </a:fontRef>
+        </p:style>
+        <p:txBody>
+          <a:bodyPr rtlCol="0" anchor="ctr"/>
+          <a:lstStyle/>
+          <a:p>
+            <a:pPr algn="ctr"/>
+          </a:p>
+        </p:txBody>
+      </p:sp>
+      <p:sp>
+        <p:nvSpPr>
+          <p:cNvPr id="14" name="TextBox 13"/>
+          <p:cNvSpPr txBox="1"/>
+          <p:nvPr/>
+        </p:nvSpPr>
+        <p:spPr>
+          <a:xfrm>
+            <a:off x="914400" y="3977640"/>
+            <a:ext cx="3063240" cy="1783080"/>
+          </a:xfrm>
+          <a:prstGeom prst="rect">
+            <a:avLst/>
+          </a:prstGeom>
+          <a:noFill/>
+        </p:spPr>
+        <p:txBody>
+          <a:bodyPr wrap="square">
+            <a:spAutoFit/>
+          </a:bodyPr>
+          <a:lstStyle/>
+          <a:p>
+            <a:pPr>
+              <a:defRPr sz="1400" b="1">
+                <a:solidFill>
+                  <a:srgbClr val="FF1E56"/>
+                </a:solidFill>
+              </a:defRPr>
+            </a:pPr>
+            <a:r>
+              <a:t>Phase 04: System Architecture &amp; Blueprints</a:t>
+            </a:r>
+          </a:p>
+          <a:p>
+            <a:pPr>
+              <a:defRPr sz="1100">
+                <a:solidFill>
+                  <a:srgbClr val="A1A1AA"/>
+                </a:solidFill>
+              </a:defRPr>
+            </a:pPr>
+            <a:r>
+              <a:t>Microservices, caching with Redis, message queues (Kafka), Docker containerization, and cloud deployment pipelines.</a:t>
+            </a:r>
+          </a:p>
+        </p:txBody>
+      </p:sp>
+      <p:sp>
+        <p:nvSpPr>
+          <p:cNvPr id="15" name="Rounded Rectangle 14"/>
+          <p:cNvSpPr/>
+          <p:nvPr/>
+        </p:nvSpPr>
+        <p:spPr>
+          <a:xfrm>
+            <a:off x="4343400" y="3794760"/>
+            <a:ext cx="3429000" cy="2148840"/>
+          </a:xfrm>
+          <a:prstGeom prst="roundRect">
+            <a:avLst/>
+          </a:prstGeom>
+          <a:solidFill>
+            <a:srgbClr val="100E16"/>
+          </a:solidFill>
+          <a:ln w="15240">
+            <a:solidFill>
+              <a:srgbClr val="2E2034"/>
+            </a:solidFill>
+          </a:ln>
+        </p:spPr>
+        <p:style>
+          <a:lnRef idx="1">
+            <a:schemeClr val="accent1"/>
+          </a:lnRef>
+          <a:fillRef idx="3">
+            <a:schemeClr val="accent1"/>
+          </a:fillRef>
+          <a:effectRef idx="2">
+            <a:schemeClr val="accent1"/>
+          </a:effectRef>
+          <a:fontRef idx="minor">
+            <a:schemeClr val="lt1"/>
+          </a:fontRef>
+        </p:style>
+        <p:txBody>
+          <a:bodyPr rtlCol="0" anchor="ctr"/>
+          <a:lstStyle/>
+          <a:p>
+            <a:pPr algn="ctr"/>
+          </a:p>
+        </p:txBody>
+      </p:sp>
+      <p:sp>
+        <p:nvSpPr>
+          <p:cNvPr id="16" name="TextBox 15"/>
+          <p:cNvSpPr txBox="1"/>
+          <p:nvPr/>
+        </p:nvSpPr>
+        <p:spPr>
+          <a:xfrm>
+            <a:off x="4526280" y="3977640"/>
+            <a:ext cx="3063240" cy="1783080"/>
+          </a:xfrm>
+          <a:prstGeom prst="rect">
+            <a:avLst/>
+          </a:prstGeom>
+          <a:noFill/>
+        </p:spPr>
+        <p:txBody>
+          <a:bodyPr wrap="square">
+            <a:spAutoFit/>
+          </a:bodyPr>
+          <a:lstStyle/>
+          <a:p>
+            <a:pPr>
+              <a:defRPr sz="1400" b="1">
+                <a:solidFill>
+                  <a:srgbClr val="FF1E56"/>
+                </a:solidFill>
+              </a:defRPr>
+            </a:pPr>
+            <a:r>
+              <a:t>Phase 05: Mock Viva Defense &amp; Grilling</a:t>
+            </a:r>
+          </a:p>
+          <a:p>
+            <a:pPr>
+              <a:defRPr sz="1100">
+                <a:solidFill>
+                  <a:srgbClr val="A1A1AA"/>
+                </a:solidFill>
+              </a:defRPr>
+            </a:pPr>
+            <a:r>
+              <a:t>Simulating high-pressure system design interviews, failure recovery scenarios, trade-off defenses, and DSA speed tests.</a:t>
+            </a:r>
+          </a:p>
+        </p:txBody>
+      </p:sp>
+      <p:sp>
+        <p:nvSpPr>
+          <p:cNvPr id="17" name="Rounded Rectangle 16"/>
+          <p:cNvSpPr/>
+          <p:nvPr/>
+        </p:nvSpPr>
+        <p:spPr>
+          <a:xfrm>
+            <a:off x="7955280" y="3794760"/>
+            <a:ext cx="3429000" cy="2148840"/>
+          </a:xfrm>
+          <a:prstGeom prst="roundRect">
+            <a:avLst/>
+          </a:prstGeom>
+          <a:solidFill>
+            <a:srgbClr val="100E16"/>
+          </a:solidFill>
+          <a:ln w="15240">
+            <a:solidFill>
+              <a:srgbClr val="2E2034"/>
+            </a:solidFill>
+          </a:ln>
+        </p:spPr>
+        <p:style>
+          <a:lnRef idx="1">
+            <a:schemeClr val="accent1"/>
+          </a:lnRef>
+          <a:fillRef idx="3">
+            <a:schemeClr val="accent1"/>
+          </a:fillRef>
+          <a:effectRef idx="2">
+            <a:schemeClr val="accent1"/>
+          </a:effectRef>
+          <a:fontRef idx="minor">
+            <a:schemeClr val="lt1"/>
+          </a:fontRef>
+        </p:style>
+        <p:txBody>
+          <a:bodyPr rtlCol="0" anchor="ctr"/>
+          <a:lstStyle/>
+          <a:p>
+            <a:pPr algn="ctr"/>
+          </a:p>
+        </p:txBody>
+      </p:sp>
+      <p:sp>
+        <p:nvSpPr>
+          <p:cNvPr id="18" name="TextBox 17"/>
+          <p:cNvSpPr txBox="1"/>
+          <p:nvPr/>
+        </p:nvSpPr>
+        <p:spPr>
+          <a:xfrm>
+            <a:off x="8138160" y="3977640"/>
+            <a:ext cx="3063240" cy="1783080"/>
+          </a:xfrm>
+          <a:prstGeom prst="rect">
+            <a:avLst/>
+          </a:prstGeom>
+          <a:noFill/>
+        </p:spPr>
+        <p:txBody>
+          <a:bodyPr wrap="square">
+            <a:spAutoFit/>
+          </a:bodyPr>
+          <a:lstStyle/>
+          <a:p>
+            <a:pPr>
+              <a:defRPr sz="1400" b="1">
+                <a:solidFill>
+                  <a:srgbClr val="FF1E56"/>
+                </a:solidFill>
+              </a:defRPr>
+            </a:pPr>
+            <a:r>
+              <a:t>Phase 06: Recruitment Acceleration</a:t>
+            </a:r>
+          </a:p>
+          <a:p>
+            <a:pPr>
+              <a:defRPr sz="1100">
+                <a:solidFill>
+                  <a:srgbClr val="A1A1AA"/>
+                </a:solidFill>
+              </a:defRPr>
+            </a:pPr>
+            <a:r>
+              <a:t>ATS resume optimization, GitHub portfolio refinement, LinkedIn targeting, and high-conversion cold outreach campaigns.</a:t>
             </a:r>
           </a:p>
         </p:txBody>
@@ -6989,7 +7288,7 @@
             <a:avLst/>
           </a:prstGeom>
           <a:solidFill>
-            <a:srgbClr val="09090E"/>
+            <a:srgbClr val="06060A"/>
           </a:solidFill>
           <a:ln>
             <a:noFill/>
@@ -7025,8 +7324,8 @@
         </p:nvSpPr>
         <p:spPr>
           <a:xfrm>
-            <a:off x="731520" y="457200"/>
-            <a:ext cx="10698480" cy="365760"/>
+            <a:off x="731520" y="365760"/>
+            <a:ext cx="10698480" cy="320040"/>
           </a:xfrm>
           <a:prstGeom prst="rect">
             <a:avLst/>
@@ -7042,12 +7341,12 @@
             <a:pPr>
               <a:defRPr sz="1100" b="1">
                 <a:solidFill>
-                  <a:srgbClr val="FF2D55"/>
-                </a:solidFill>
-              </a:defRPr>
-            </a:pPr>
-            <a:r>
-              <a:t>DESIGN &amp; INTERACTION</a:t>
+                  <a:srgbClr val="FF1E56"/>
+                </a:solidFill>
+              </a:defRPr>
+            </a:pPr>
+            <a:r>
+              <a:t>AI MENTORSHIP &amp; INTERVIEW SIMULATION</a:t>
             </a:r>
           </a:p>
         </p:txBody>
@@ -7060,8 +7359,8 @@
         </p:nvSpPr>
         <p:spPr>
           <a:xfrm>
-            <a:off x="731520" y="777240"/>
-            <a:ext cx="10698480" cy="731520"/>
+            <a:off x="731520" y="685800"/>
+            <a:ext cx="10698480" cy="594360"/>
           </a:xfrm>
           <a:prstGeom prst="rect">
             <a:avLst/>
@@ -7075,39 +7374,37 @@
           <a:lstStyle/>
           <a:p>
             <a:pPr>
-              <a:defRPr sz="2800" b="1">
-                <a:solidFill>
-                  <a:srgbClr val="F8FAFC"/>
-                </a:solidFill>
-              </a:defRPr>
-            </a:pPr>
-            <a:r>
-              <a:t>Spatial UI &amp; Immersive User Experience</a:t>
-            </a:r>
-          </a:p>
-        </p:txBody>
-      </p:sp>
-      <p:sp>
-        <p:nvSpPr>
-          <p:cNvPr id="5" name="Rounded Rectangle 4"/>
+              <a:defRPr sz="2600" b="1">
+                <a:solidFill>
+                  <a:srgbClr val="FFFFFF"/>
+                </a:solidFill>
+              </a:defRPr>
+            </a:pPr>
+            <a:r>
+              <a:t>Screen-Aware Bilingual AI Coach &amp; Defense Simulator</a:t>
+            </a:r>
+          </a:p>
+        </p:txBody>
+      </p:sp>
+      <p:sp>
+        <p:nvSpPr>
+          <p:cNvPr id="5" name="Rectangle 4"/>
           <p:cNvSpPr/>
           <p:nvPr/>
         </p:nvSpPr>
         <p:spPr>
           <a:xfrm>
-            <a:off x="731520" y="1737360"/>
-            <a:ext cx="3429000" cy="4389120"/>
-          </a:xfrm>
-          <a:prstGeom prst="roundRect">
+            <a:off x="731520" y="6400800"/>
+            <a:ext cx="10728655" cy="18288"/>
+          </a:xfrm>
+          <a:prstGeom prst="rect">
             <a:avLst/>
           </a:prstGeom>
           <a:solidFill>
-            <a:srgbClr val="121018"/>
+            <a:srgbClr val="2E2034"/>
           </a:solidFill>
           <a:ln>
-            <a:solidFill>
-              <a:srgbClr val="302032"/>
-            </a:solidFill>
+            <a:noFill/>
           </a:ln>
         </p:spPr>
         <p:style>
@@ -7140,8 +7437,8 @@
         </p:nvSpPr>
         <p:spPr>
           <a:xfrm>
-            <a:off x="960120" y="2011680"/>
-            <a:ext cx="2971800" cy="3840480"/>
+            <a:off x="731520" y="6446520"/>
+            <a:ext cx="10728655" cy="320040"/>
           </a:xfrm>
           <a:prstGeom prst="rect">
             <a:avLst/>
@@ -7149,44 +7446,20 @@
           <a:noFill/>
         </p:spPr>
         <p:txBody>
-          <a:bodyPr wrap="square">
+          <a:bodyPr wrap="none">
             <a:spAutoFit/>
           </a:bodyPr>
           <a:lstStyle/>
           <a:p>
             <a:pPr>
-              <a:defRPr sz="1200" b="1">
-                <a:solidFill>
-                  <a:srgbClr val="A855F7"/>
-                </a:solidFill>
-              </a:defRPr>
-            </a:pPr>
-            <a:r>
-              <a:t>ZERO-BLOCKAGE ACCESS</a:t>
-            </a:r>
-          </a:p>
-          <a:p>
-            <a:pPr>
-              <a:defRPr sz="1900" b="1">
-                <a:solidFill>
-                  <a:srgbClr val="FF2D55"/>
-                </a:solidFill>
-              </a:defRPr>
-            </a:pPr>
-            <a:r>
-              <a:t>Interactive Lamp Login</a:t>
-            </a:r>
-          </a:p>
-          <a:p>
-            <a:pPr>
-              <a:defRPr sz="1400">
-                <a:solidFill>
-                  <a:srgbClr val="F8FAFC"/>
-                </a:solidFill>
-              </a:defRPr>
-            </a:pPr>
-            <a:r>
-              <a:t>Tactile desk lamp with pull cord, multi-point click controls, GPU particles, and 1-click Instant Guest Mode.</a:t>
+              <a:defRPr sz="1000">
+                <a:solidFill>
+                  <a:srgbClr val="A1A1AA"/>
+                </a:solidFill>
+              </a:defRPr>
+            </a:pPr>
+            <a:r>
+              <a:t>Slide 07 / 10 • Pathfinder 2.0 • Lead Systems Engineer: Dileep Bommali • https://github.com/dileepbommali16-ops/pathfinder</a:t>
             </a:r>
           </a:p>
         </p:txBody>
@@ -7199,18 +7472,18 @@
         </p:nvSpPr>
         <p:spPr>
           <a:xfrm>
-            <a:off x="4343400" y="1737360"/>
-            <a:ext cx="3429000" cy="4389120"/>
+            <a:off x="731520" y="1417320"/>
+            <a:ext cx="3429000" cy="4709160"/>
           </a:xfrm>
           <a:prstGeom prst="roundRect">
             <a:avLst/>
           </a:prstGeom>
           <a:solidFill>
-            <a:srgbClr val="121018"/>
+            <a:srgbClr val="100E16"/>
           </a:solidFill>
-          <a:ln>
+          <a:ln w="15240">
             <a:solidFill>
-              <a:srgbClr val="302032"/>
+              <a:srgbClr val="2E2034"/>
             </a:solidFill>
           </a:ln>
         </p:spPr>
@@ -7244,8 +7517,8 @@
         </p:nvSpPr>
         <p:spPr>
           <a:xfrm>
-            <a:off x="4572000" y="2011680"/>
-            <a:ext cx="2971800" cy="3840480"/>
+            <a:off x="960120" y="1645920"/>
+            <a:ext cx="2971800" cy="4206240"/>
           </a:xfrm>
           <a:prstGeom prst="rect">
             <a:avLst/>
@@ -7259,38 +7532,38 @@
           <a:lstStyle/>
           <a:p>
             <a:pPr>
-              <a:defRPr sz="1200" b="1">
+              <a:defRPr sz="1000" b="1">
                 <a:solidFill>
                   <a:srgbClr val="A855F7"/>
                 </a:solidFill>
               </a:defRPr>
             </a:pPr>
             <a:r>
-              <a:t>SOFTWARE &amp; HARDWARE</a:t>
-            </a:r>
-          </a:p>
-          <a:p>
-            <a:pPr>
-              <a:defRPr sz="1900" b="1">
-                <a:solidFill>
-                  <a:srgbClr val="FF2D55"/>
-                </a:solidFill>
-              </a:defRPr>
-            </a:pPr>
-            <a:r>
-              <a:t>23 Production Blueprints</a:t>
-            </a:r>
-          </a:p>
-          <a:p>
-            <a:pPr>
-              <a:defRPr sz="1400">
-                <a:solidFill>
-                  <a:srgbClr val="F8FAFC"/>
-                </a:solidFill>
-              </a:defRPr>
-            </a:pPr>
-            <a:r>
-              <a:t>6 Flagship + 17 Smart India Hackathon system architectures with pipelines, pitfalls, and viva defense Q&amp;A.</a:t>
+              <a:t>CONTEXT-SYNCHRONIZED MENTORSHIP</a:t>
+            </a:r>
+          </a:p>
+          <a:p>
+            <a:pPr>
+              <a:defRPr sz="1700" b="1">
+                <a:solidFill>
+                  <a:srgbClr val="FF1E56"/>
+                </a:solidFill>
+              </a:defRPr>
+            </a:pPr>
+            <a:r>
+              <a:t>Live UI State Awareness</a:t>
+            </a:r>
+          </a:p>
+          <a:p>
+            <a:pPr>
+              <a:defRPr sz="1200">
+                <a:solidFill>
+                  <a:srgbClr val="FFFFFF"/>
+                </a:solidFill>
+              </a:defRPr>
+            </a:pPr>
+            <a:r>
+              <a:t>The AI mentor continuously reads live telemetry from the student's active UI — ingesting exact CGPA, pending backlogs, target role, and ML placement gauge percentage to mentor with concrete numbers instead of generic advice.</a:t>
             </a:r>
           </a:p>
         </p:txBody>
@@ -7303,18 +7576,18 @@
         </p:nvSpPr>
         <p:spPr>
           <a:xfrm>
-            <a:off x="7955280" y="1737360"/>
-            <a:ext cx="3429000" cy="4389120"/>
+            <a:off x="4343400" y="1417320"/>
+            <a:ext cx="3429000" cy="4709160"/>
           </a:xfrm>
           <a:prstGeom prst="roundRect">
             <a:avLst/>
           </a:prstGeom>
           <a:solidFill>
-            <a:srgbClr val="121018"/>
+            <a:srgbClr val="100E16"/>
           </a:solidFill>
-          <a:ln>
+          <a:ln w="15240">
             <a:solidFill>
-              <a:srgbClr val="302032"/>
+              <a:srgbClr val="2E2034"/>
             </a:solidFill>
           </a:ln>
         </p:spPr>
@@ -7348,8 +7621,8 @@
         </p:nvSpPr>
         <p:spPr>
           <a:xfrm>
-            <a:off x="8183880" y="2011680"/>
-            <a:ext cx="2971800" cy="3840480"/>
+            <a:off x="4572000" y="1645920"/>
+            <a:ext cx="2971800" cy="4206240"/>
           </a:xfrm>
           <a:prstGeom prst="rect">
             <a:avLst/>
@@ -7363,38 +7636,142 @@
           <a:lstStyle/>
           <a:p>
             <a:pPr>
-              <a:defRPr sz="1200" b="1">
+              <a:defRPr sz="1000" b="1">
                 <a:solidFill>
                   <a:srgbClr val="A855F7"/>
                 </a:solidFill>
               </a:defRPr>
             </a:pPr>
             <a:r>
-              <a:t>SPATIAL UI ARCHITECTURE</a:t>
-            </a:r>
-          </a:p>
-          <a:p>
-            <a:pPr>
-              <a:defRPr sz="1900" b="1">
-                <a:solidFill>
-                  <a:srgbClr val="FF2D55"/>
-                </a:solidFill>
-              </a:defRPr>
-            </a:pPr>
-            <a:r>
-              <a:t>15 Specialized Modules</a:t>
-            </a:r>
-          </a:p>
-          <a:p>
-            <a:pPr>
-              <a:defRPr sz="1400">
-                <a:solidFill>
-                  <a:srgbClr val="F8FAFC"/>
-                </a:solidFill>
-              </a:defRPr>
-            </a:pPr>
-            <a:r>
-              <a:t>Overview, Cohort Analytics, What-If Simulator, Resume Studio, Digital Twin, and 3D WebGL background shaders.</a:t>
+              <a:t>ELIMINATING REGIONAL LANGUAGE BARRIERS</a:t>
+            </a:r>
+          </a:p>
+          <a:p>
+            <a:pPr>
+              <a:defRPr sz="1700" b="1">
+                <a:solidFill>
+                  <a:srgbClr val="FF1E56"/>
+                </a:solidFill>
+              </a:defRPr>
+            </a:pPr>
+            <a:r>
+              <a:t>Bilingual Mentorship (English + Telugu)</a:t>
+            </a:r>
+          </a:p>
+          <a:p>
+            <a:pPr>
+              <a:defRPr sz="1200">
+                <a:solidFill>
+                  <a:srgbClr val="FFFFFF"/>
+                </a:solidFill>
+              </a:defRPr>
+            </a:pPr>
+            <a:r>
+              <a:t>Full technical mentorship in fluent English, native Telugu script, and conversational Roman Telugu. Explains complex distributed systems, memory heaps, and tree traversals without linguistic intimidation.</a:t>
+            </a:r>
+          </a:p>
+        </p:txBody>
+      </p:sp>
+      <p:sp>
+        <p:nvSpPr>
+          <p:cNvPr id="11" name="Rounded Rectangle 10"/>
+          <p:cNvSpPr/>
+          <p:nvPr/>
+        </p:nvSpPr>
+        <p:spPr>
+          <a:xfrm>
+            <a:off x="7955280" y="1417320"/>
+            <a:ext cx="3429000" cy="4709160"/>
+          </a:xfrm>
+          <a:prstGeom prst="roundRect">
+            <a:avLst/>
+          </a:prstGeom>
+          <a:solidFill>
+            <a:srgbClr val="100E16"/>
+          </a:solidFill>
+          <a:ln w="15240">
+            <a:solidFill>
+              <a:srgbClr val="2E2034"/>
+            </a:solidFill>
+          </a:ln>
+        </p:spPr>
+        <p:style>
+          <a:lnRef idx="1">
+            <a:schemeClr val="accent1"/>
+          </a:lnRef>
+          <a:fillRef idx="3">
+            <a:schemeClr val="accent1"/>
+          </a:fillRef>
+          <a:effectRef idx="2">
+            <a:schemeClr val="accent1"/>
+          </a:effectRef>
+          <a:fontRef idx="minor">
+            <a:schemeClr val="lt1"/>
+          </a:fontRef>
+        </p:style>
+        <p:txBody>
+          <a:bodyPr rtlCol="0" anchor="ctr"/>
+          <a:lstStyle/>
+          <a:p>
+            <a:pPr algn="ctr"/>
+          </a:p>
+        </p:txBody>
+      </p:sp>
+      <p:sp>
+        <p:nvSpPr>
+          <p:cNvPr id="12" name="TextBox 11"/>
+          <p:cNvSpPr txBox="1"/>
+          <p:nvPr/>
+        </p:nvSpPr>
+        <p:spPr>
+          <a:xfrm>
+            <a:off x="8183880" y="1645920"/>
+            <a:ext cx="2971800" cy="4206240"/>
+          </a:xfrm>
+          <a:prstGeom prst="rect">
+            <a:avLst/>
+          </a:prstGeom>
+          <a:noFill/>
+        </p:spPr>
+        <p:txBody>
+          <a:bodyPr wrap="square">
+            <a:spAutoFit/>
+          </a:bodyPr>
+          <a:lstStyle/>
+          <a:p>
+            <a:pPr>
+              <a:defRPr sz="1000" b="1">
+                <a:solidFill>
+                  <a:srgbClr val="A855F7"/>
+                </a:solidFill>
+              </a:defRPr>
+            </a:pPr>
+            <a:r>
+              <a:t>HIGH-PRESSURE MOCK INTERVIEW GRILLING</a:t>
+            </a:r>
+          </a:p>
+          <a:p>
+            <a:pPr>
+              <a:defRPr sz="1700" b="1">
+                <a:solidFill>
+                  <a:srgbClr val="FF1E56"/>
+                </a:solidFill>
+              </a:defRPr>
+            </a:pPr>
+            <a:r>
+              <a:t>Viva Defense Simulator</a:t>
+            </a:r>
+          </a:p>
+          <a:p>
+            <a:pPr>
+              <a:defRPr sz="1200">
+                <a:solidFill>
+                  <a:srgbClr val="FFFFFF"/>
+                </a:solidFill>
+              </a:defRPr>
+            </a:pPr>
+            <a:r>
+              <a:t>Interrogates candidates on architectural choices, database locking, edge cases, and scaling bottlenecks in their portfolio projects, preparing them thoroughly for rigorous viva panels and technical rounds.</a:t>
             </a:r>
           </a:p>
         </p:txBody>
@@ -7432,7 +7809,7 @@
             <a:avLst/>
           </a:prstGeom>
           <a:solidFill>
-            <a:srgbClr val="09090E"/>
+            <a:srgbClr val="06060A"/>
           </a:solidFill>
           <a:ln>
             <a:noFill/>
@@ -7468,8 +7845,8 @@
         </p:nvSpPr>
         <p:spPr>
           <a:xfrm>
-            <a:off x="731520" y="457200"/>
-            <a:ext cx="10698480" cy="365760"/>
+            <a:off x="731520" y="365760"/>
+            <a:ext cx="10698480" cy="320040"/>
           </a:xfrm>
           <a:prstGeom prst="rect">
             <a:avLst/>
@@ -7485,12 +7862,12 @@
             <a:pPr>
               <a:defRPr sz="1100" b="1">
                 <a:solidFill>
-                  <a:srgbClr val="FF2D55"/>
-                </a:solidFill>
-              </a:defRPr>
-            </a:pPr>
-            <a:r>
-              <a:t>REPORTS &amp; EXPORTS</a:t>
+                  <a:srgbClr val="FF1E56"/>
+                </a:solidFill>
+              </a:defRPr>
+            </a:pPr>
+            <a:r>
+              <a:t>PORTFOLIO ENGINEERING &amp; HARDWARE SIH</a:t>
             </a:r>
           </a:p>
         </p:txBody>
@@ -7503,8 +7880,8 @@
         </p:nvSpPr>
         <p:spPr>
           <a:xfrm>
-            <a:off x="731520" y="777240"/>
-            <a:ext cx="10698480" cy="731520"/>
+            <a:off x="731520" y="685800"/>
+            <a:ext cx="10698480" cy="594360"/>
           </a:xfrm>
           <a:prstGeom prst="rect">
             <a:avLst/>
@@ -7518,39 +7895,37 @@
           <a:lstStyle/>
           <a:p>
             <a:pPr>
-              <a:defRPr sz="2800" b="1">
-                <a:solidFill>
-                  <a:srgbClr val="F8FAFC"/>
-                </a:solidFill>
-              </a:defRPr>
-            </a:pPr>
-            <a:r>
-              <a:t>Institutional Intelligence &amp; Automated Reporting</a:t>
-            </a:r>
-          </a:p>
-        </p:txBody>
-      </p:sp>
-      <p:sp>
-        <p:nvSpPr>
-          <p:cNvPr id="5" name="Rounded Rectangle 4"/>
+              <a:defRPr sz="2600" b="1">
+                <a:solidFill>
+                  <a:srgbClr val="FFFFFF"/>
+                </a:solidFill>
+              </a:defRPr>
+            </a:pPr>
+            <a:r>
+              <a:t>Enterprise Project Studio: 23 Production Blueprints</a:t>
+            </a:r>
+          </a:p>
+        </p:txBody>
+      </p:sp>
+      <p:sp>
+        <p:nvSpPr>
+          <p:cNvPr id="5" name="Rectangle 4"/>
           <p:cNvSpPr/>
           <p:nvPr/>
         </p:nvSpPr>
         <p:spPr>
           <a:xfrm>
-            <a:off x="731520" y="1737360"/>
-            <a:ext cx="3429000" cy="4389120"/>
-          </a:xfrm>
-          <a:prstGeom prst="roundRect">
+            <a:off x="731520" y="6400800"/>
+            <a:ext cx="10728655" cy="18288"/>
+          </a:xfrm>
+          <a:prstGeom prst="rect">
             <a:avLst/>
           </a:prstGeom>
           <a:solidFill>
-            <a:srgbClr val="121018"/>
+            <a:srgbClr val="2E2034"/>
           </a:solidFill>
           <a:ln>
-            <a:solidFill>
-              <a:srgbClr val="302032"/>
-            </a:solidFill>
+            <a:noFill/>
           </a:ln>
         </p:spPr>
         <p:style>
@@ -7583,8 +7958,8 @@
         </p:nvSpPr>
         <p:spPr>
           <a:xfrm>
-            <a:off x="960120" y="2011680"/>
-            <a:ext cx="2971800" cy="3840480"/>
+            <a:off x="731520" y="6446520"/>
+            <a:ext cx="10728655" cy="320040"/>
           </a:xfrm>
           <a:prstGeom prst="rect">
             <a:avLst/>
@@ -7592,44 +7967,20 @@
           <a:noFill/>
         </p:spPr>
         <p:txBody>
-          <a:bodyPr wrap="square">
+          <a:bodyPr wrap="none">
             <a:spAutoFit/>
           </a:bodyPr>
           <a:lstStyle/>
           <a:p>
             <a:pPr>
-              <a:defRPr sz="1200" b="1">
-                <a:solidFill>
-                  <a:srgbClr val="FF2D55"/>
-                </a:solidFill>
-              </a:defRPr>
-            </a:pPr>
-            <a:r>
-              <a:t>BATCH ANALYTICS</a:t>
-            </a:r>
-          </a:p>
-          <a:p>
-            <a:pPr>
-              <a:defRPr sz="1900" b="1">
-                <a:solidFill>
-                  <a:srgbClr val="F8FAFC"/>
-                </a:solidFill>
-              </a:defRPr>
-            </a:pPr>
-            <a:r>
-              <a:t>Cohort Explorer Heatmaps</a:t>
-            </a:r>
-          </a:p>
-          <a:p>
-            <a:pPr>
-              <a:defRPr sz="1400">
+              <a:defRPr sz="1000">
                 <a:solidFill>
                   <a:srgbClr val="A1A1AA"/>
                 </a:solidFill>
               </a:defRPr>
             </a:pPr>
             <a:r>
-              <a:t>Empowers placement directors to filter batches by CGPA brackets, branch, and predicted placement tiers.</a:t>
+              <a:t>Slide 08 / 10 • Pathfinder 2.0 • Lead Systems Engineer: Dileep Bommali • https://github.com/dileepbommali16-ops/pathfinder</a:t>
             </a:r>
           </a:p>
         </p:txBody>
@@ -7642,18 +7993,18 @@
         </p:nvSpPr>
         <p:spPr>
           <a:xfrm>
-            <a:off x="4343400" y="1737360"/>
-            <a:ext cx="3429000" cy="4389120"/>
+            <a:off x="731520" y="1417320"/>
+            <a:ext cx="3429000" cy="2148840"/>
           </a:xfrm>
           <a:prstGeom prst="roundRect">
             <a:avLst/>
           </a:prstGeom>
           <a:solidFill>
-            <a:srgbClr val="121018"/>
+            <a:srgbClr val="100E16"/>
           </a:solidFill>
-          <a:ln>
+          <a:ln w="15240">
             <a:solidFill>
-              <a:srgbClr val="302032"/>
+              <a:srgbClr val="2E2034"/>
             </a:solidFill>
           </a:ln>
         </p:spPr>
@@ -7687,8 +8038,8 @@
         </p:nvSpPr>
         <p:spPr>
           <a:xfrm>
-            <a:off x="4572000" y="2011680"/>
-            <a:ext cx="2971800" cy="3840480"/>
+            <a:off x="914400" y="1600200"/>
+            <a:ext cx="3063240" cy="1783080"/>
           </a:xfrm>
           <a:prstGeom prst="rect">
             <a:avLst/>
@@ -7702,38 +8053,38 @@
           <a:lstStyle/>
           <a:p>
             <a:pPr>
-              <a:defRPr sz="1200" b="1">
-                <a:solidFill>
-                  <a:srgbClr val="FF2D55"/>
-                </a:solidFill>
-              </a:defRPr>
-            </a:pPr>
-            <a:r>
-              <a:t>REPORTLAB GENERATION</a:t>
-            </a:r>
-          </a:p>
-          <a:p>
-            <a:pPr>
-              <a:defRPr sz="1900" b="1">
-                <a:solidFill>
-                  <a:srgbClr val="F8FAFC"/>
-                </a:solidFill>
-              </a:defRPr>
-            </a:pPr>
-            <a:r>
-              <a:t>ATS-Optimized PDF Profiles</a:t>
-            </a:r>
-          </a:p>
-          <a:p>
-            <a:pPr>
-              <a:defRPr sz="1400">
+              <a:defRPr sz="1400" b="1">
+                <a:solidFill>
+                  <a:srgbClr val="FF1E56"/>
+                </a:solidFill>
+              </a:defRPr>
+            </a:pPr>
+            <a:r>
+              <a:t>Smart Campus Micro-Grid</a:t>
+            </a:r>
+          </a:p>
+          <a:p>
+            <a:pPr>
+              <a:defRPr sz="1000" b="1">
+                <a:solidFill>
+                  <a:srgbClr val="A855F7"/>
+                </a:solidFill>
+              </a:defRPr>
+            </a:pPr>
+            <a:r>
+              <a:t>IoT &amp; Embedded (ESP32 / MQTT / Grafana)</a:t>
+            </a:r>
+          </a:p>
+          <a:p>
+            <a:pPr>
+              <a:defRPr sz="1100">
                 <a:solidFill>
                   <a:srgbClr val="A1A1AA"/>
                 </a:solidFill>
               </a:defRPr>
             </a:pPr>
             <a:r>
-              <a:t>Compiles student metrics, skill radars, and verification badges into professional, recruiter-ready PDF reports.</a:t>
+              <a:t>Distributed smart energy monitoring with sub-second MQTT telemetry, power spike alerts, and automated load balancing.</a:t>
             </a:r>
           </a:p>
         </p:txBody>
@@ -7746,18 +8097,18 @@
         </p:nvSpPr>
         <p:spPr>
           <a:xfrm>
-            <a:off x="7955280" y="1737360"/>
-            <a:ext cx="3429000" cy="4389120"/>
+            <a:off x="4343400" y="1417320"/>
+            <a:ext cx="3429000" cy="2148840"/>
           </a:xfrm>
           <a:prstGeom prst="roundRect">
             <a:avLst/>
           </a:prstGeom>
           <a:solidFill>
-            <a:srgbClr val="121018"/>
+            <a:srgbClr val="100E16"/>
           </a:solidFill>
-          <a:ln>
+          <a:ln w="15240">
             <a:solidFill>
-              <a:srgbClr val="302032"/>
+              <a:srgbClr val="2E2034"/>
             </a:solidFill>
           </a:ln>
         </p:spPr>
@@ -7791,8 +8142,8 @@
         </p:nvSpPr>
         <p:spPr>
           <a:xfrm>
-            <a:off x="8183880" y="2011680"/>
-            <a:ext cx="2971800" cy="3840480"/>
+            <a:off x="4526280" y="1600200"/>
+            <a:ext cx="3063240" cy="1783080"/>
           </a:xfrm>
           <a:prstGeom prst="rect">
             <a:avLst/>
@@ -7806,38 +8157,454 @@
           <a:lstStyle/>
           <a:p>
             <a:pPr>
-              <a:defRPr sz="1200" b="1">
-                <a:solidFill>
-                  <a:srgbClr val="FF2D55"/>
-                </a:solidFill>
-              </a:defRPr>
-            </a:pPr>
-            <a:r>
-              <a:t>INSTITUTIONAL EXPORTS</a:t>
-            </a:r>
-          </a:p>
-          <a:p>
-            <a:pPr>
-              <a:defRPr sz="1900" b="1">
-                <a:solidFill>
-                  <a:srgbClr val="F8FAFC"/>
-                </a:solidFill>
-              </a:defRPr>
-            </a:pPr>
-            <a:r>
-              <a:t>Batch CSV Data Pipeline</a:t>
-            </a:r>
-          </a:p>
-          <a:p>
-            <a:pPr>
-              <a:defRPr sz="1400">
+              <a:defRPr sz="1400" b="1">
+                <a:solidFill>
+                  <a:srgbClr val="FF1E56"/>
+                </a:solidFill>
+              </a:defRPr>
+            </a:pPr>
+            <a:r>
+              <a:t>High-Throughput Ledger</a:t>
+            </a:r>
+          </a:p>
+          <a:p>
+            <a:pPr>
+              <a:defRPr sz="1000" b="1">
+                <a:solidFill>
+                  <a:srgbClr val="A855F7"/>
+                </a:solidFill>
+              </a:defRPr>
+            </a:pPr>
+            <a:r>
+              <a:t>Fintech &amp; Go (Go / Redis / Kafka / Postgres)</a:t>
+            </a:r>
+          </a:p>
+          <a:p>
+            <a:pPr>
+              <a:defRPr sz="1100">
                 <a:solidFill>
                   <a:srgbClr val="A1A1AA"/>
                 </a:solidFill>
               </a:defRPr>
             </a:pPr>
             <a:r>
-              <a:t>One-click streaming export of student placement profiles for institutional accreditation and NAAC/NIRF reporting.</a:t>
+              <a:t>Event-sourced double-entry ledger handling 12k tx/sec with distributed lock mitigation and ACID audit persistence.</a:t>
+            </a:r>
+          </a:p>
+        </p:txBody>
+      </p:sp>
+      <p:sp>
+        <p:nvSpPr>
+          <p:cNvPr id="11" name="Rounded Rectangle 10"/>
+          <p:cNvSpPr/>
+          <p:nvPr/>
+        </p:nvSpPr>
+        <p:spPr>
+          <a:xfrm>
+            <a:off x="7955280" y="1417320"/>
+            <a:ext cx="3429000" cy="2148840"/>
+          </a:xfrm>
+          <a:prstGeom prst="roundRect">
+            <a:avLst/>
+          </a:prstGeom>
+          <a:solidFill>
+            <a:srgbClr val="100E16"/>
+          </a:solidFill>
+          <a:ln w="15240">
+            <a:solidFill>
+              <a:srgbClr val="2E2034"/>
+            </a:solidFill>
+          </a:ln>
+        </p:spPr>
+        <p:style>
+          <a:lnRef idx="1">
+            <a:schemeClr val="accent1"/>
+          </a:lnRef>
+          <a:fillRef idx="3">
+            <a:schemeClr val="accent1"/>
+          </a:fillRef>
+          <a:effectRef idx="2">
+            <a:schemeClr val="accent1"/>
+          </a:effectRef>
+          <a:fontRef idx="minor">
+            <a:schemeClr val="lt1"/>
+          </a:fontRef>
+        </p:style>
+        <p:txBody>
+          <a:bodyPr rtlCol="0" anchor="ctr"/>
+          <a:lstStyle/>
+          <a:p>
+            <a:pPr algn="ctr"/>
+          </a:p>
+        </p:txBody>
+      </p:sp>
+      <p:sp>
+        <p:nvSpPr>
+          <p:cNvPr id="12" name="TextBox 11"/>
+          <p:cNvSpPr txBox="1"/>
+          <p:nvPr/>
+        </p:nvSpPr>
+        <p:spPr>
+          <a:xfrm>
+            <a:off x="8138160" y="1600200"/>
+            <a:ext cx="3063240" cy="1783080"/>
+          </a:xfrm>
+          <a:prstGeom prst="rect">
+            <a:avLst/>
+          </a:prstGeom>
+          <a:noFill/>
+        </p:spPr>
+        <p:txBody>
+          <a:bodyPr wrap="square">
+            <a:spAutoFit/>
+          </a:bodyPr>
+          <a:lstStyle/>
+          <a:p>
+            <a:pPr>
+              <a:defRPr sz="1400" b="1">
+                <a:solidFill>
+                  <a:srgbClr val="FF1E56"/>
+                </a:solidFill>
+              </a:defRPr>
+            </a:pPr>
+            <a:r>
+              <a:t>Medical Image Classifier</a:t>
+            </a:r>
+          </a:p>
+          <a:p>
+            <a:pPr>
+              <a:defRPr sz="1000" b="1">
+                <a:solidFill>
+                  <a:srgbClr val="A855F7"/>
+                </a:solidFill>
+              </a:defRPr>
+            </a:pPr>
+            <a:r>
+              <a:t>Deep Learning (PyTorch / DenseNet / FastAPI)</a:t>
+            </a:r>
+          </a:p>
+          <a:p>
+            <a:pPr>
+              <a:defRPr sz="1100">
+                <a:solidFill>
+                  <a:srgbClr val="A1A1AA"/>
+                </a:solidFill>
+              </a:defRPr>
+            </a:pPr>
+            <a:r>
+              <a:t>Diagnostic computer vision pipeline classifying chest X-rays with Grad-CAM visual heatmaps and 94.6% validation accuracy.</a:t>
+            </a:r>
+          </a:p>
+        </p:txBody>
+      </p:sp>
+      <p:sp>
+        <p:nvSpPr>
+          <p:cNvPr id="13" name="Rounded Rectangle 12"/>
+          <p:cNvSpPr/>
+          <p:nvPr/>
+        </p:nvSpPr>
+        <p:spPr>
+          <a:xfrm>
+            <a:off x="731520" y="3794760"/>
+            <a:ext cx="3429000" cy="2148840"/>
+          </a:xfrm>
+          <a:prstGeom prst="roundRect">
+            <a:avLst/>
+          </a:prstGeom>
+          <a:solidFill>
+            <a:srgbClr val="100E16"/>
+          </a:solidFill>
+          <a:ln w="15240">
+            <a:solidFill>
+              <a:srgbClr val="2E2034"/>
+            </a:solidFill>
+          </a:ln>
+        </p:spPr>
+        <p:style>
+          <a:lnRef idx="1">
+            <a:schemeClr val="accent1"/>
+          </a:lnRef>
+          <a:fillRef idx="3">
+            <a:schemeClr val="accent1"/>
+          </a:fillRef>
+          <a:effectRef idx="2">
+            <a:schemeClr val="accent1"/>
+          </a:effectRef>
+          <a:fontRef idx="minor">
+            <a:schemeClr val="lt1"/>
+          </a:fontRef>
+        </p:style>
+        <p:txBody>
+          <a:bodyPr rtlCol="0" anchor="ctr"/>
+          <a:lstStyle/>
+          <a:p>
+            <a:pPr algn="ctr"/>
+          </a:p>
+        </p:txBody>
+      </p:sp>
+      <p:sp>
+        <p:nvSpPr>
+          <p:cNvPr id="14" name="TextBox 13"/>
+          <p:cNvSpPr txBox="1"/>
+          <p:nvPr/>
+        </p:nvSpPr>
+        <p:spPr>
+          <a:xfrm>
+            <a:off x="914400" y="3977640"/>
+            <a:ext cx="3063240" cy="1783080"/>
+          </a:xfrm>
+          <a:prstGeom prst="rect">
+            <a:avLst/>
+          </a:prstGeom>
+          <a:noFill/>
+        </p:spPr>
+        <p:txBody>
+          <a:bodyPr wrap="square">
+            <a:spAutoFit/>
+          </a:bodyPr>
+          <a:lstStyle/>
+          <a:p>
+            <a:pPr>
+              <a:defRPr sz="1400" b="1">
+                <a:solidFill>
+                  <a:srgbClr val="FF1E56"/>
+                </a:solidFill>
+              </a:defRPr>
+            </a:pPr>
+            <a:r>
+              <a:t>AI Network Attack Forecaster</a:t>
+            </a:r>
+          </a:p>
+          <a:p>
+            <a:pPr>
+              <a:defRPr sz="1000" b="1">
+                <a:solidFill>
+                  <a:srgbClr val="A855F7"/>
+                </a:solidFill>
+              </a:defRPr>
+            </a:pPr>
+            <a:r>
+              <a:t>Cyber Defense (Zeek PCAP / Temporal GAT)</a:t>
+            </a:r>
+          </a:p>
+          <a:p>
+            <a:pPr>
+              <a:defRPr sz="1100">
+                <a:solidFill>
+                  <a:srgbClr val="A1A1AA"/>
+                </a:solidFill>
+              </a:defRPr>
+            </a:pPr>
+            <a:r>
+              <a:t>Predictive intrusion detector analyzing 25k packets/sec to forecast lateral movement attacks 8 minutes before asset breach.</a:t>
+            </a:r>
+          </a:p>
+        </p:txBody>
+      </p:sp>
+      <p:sp>
+        <p:nvSpPr>
+          <p:cNvPr id="15" name="Rounded Rectangle 14"/>
+          <p:cNvSpPr/>
+          <p:nvPr/>
+        </p:nvSpPr>
+        <p:spPr>
+          <a:xfrm>
+            <a:off x="4343400" y="3794760"/>
+            <a:ext cx="3429000" cy="2148840"/>
+          </a:xfrm>
+          <a:prstGeom prst="roundRect">
+            <a:avLst/>
+          </a:prstGeom>
+          <a:solidFill>
+            <a:srgbClr val="100E16"/>
+          </a:solidFill>
+          <a:ln w="15240">
+            <a:solidFill>
+              <a:srgbClr val="2E2034"/>
+            </a:solidFill>
+          </a:ln>
+        </p:spPr>
+        <p:style>
+          <a:lnRef idx="1">
+            <a:schemeClr val="accent1"/>
+          </a:lnRef>
+          <a:fillRef idx="3">
+            <a:schemeClr val="accent1"/>
+          </a:fillRef>
+          <a:effectRef idx="2">
+            <a:schemeClr val="accent1"/>
+          </a:effectRef>
+          <a:fontRef idx="minor">
+            <a:schemeClr val="lt1"/>
+          </a:fontRef>
+        </p:style>
+        <p:txBody>
+          <a:bodyPr rtlCol="0" anchor="ctr"/>
+          <a:lstStyle/>
+          <a:p>
+            <a:pPr algn="ctr"/>
+          </a:p>
+        </p:txBody>
+      </p:sp>
+      <p:sp>
+        <p:nvSpPr>
+          <p:cNvPr id="16" name="TextBox 15"/>
+          <p:cNvSpPr txBox="1"/>
+          <p:nvPr/>
+        </p:nvSpPr>
+        <p:spPr>
+          <a:xfrm>
+            <a:off x="4526280" y="3977640"/>
+            <a:ext cx="3063240" cy="1783080"/>
+          </a:xfrm>
+          <a:prstGeom prst="rect">
+            <a:avLst/>
+          </a:prstGeom>
+          <a:noFill/>
+        </p:spPr>
+        <p:txBody>
+          <a:bodyPr wrap="square">
+            <a:spAutoFit/>
+          </a:bodyPr>
+          <a:lstStyle/>
+          <a:p>
+            <a:pPr>
+              <a:defRPr sz="1400" b="1">
+                <a:solidFill>
+                  <a:srgbClr val="FF1E56"/>
+                </a:solidFill>
+              </a:defRPr>
+            </a:pPr>
+            <a:r>
+              <a:t>Drone 3D Model Synthesizer</a:t>
+            </a:r>
+          </a:p>
+          <a:p>
+            <a:pPr>
+              <a:defRPr sz="1000" b="1">
+                <a:solidFill>
+                  <a:srgbClr val="A855F7"/>
+                </a:solidFill>
+              </a:defRPr>
+            </a:pPr>
+            <a:r>
+              <a:t>SIH Hardware &amp; Vision (Instant-NGP / NeRF)</a:t>
+            </a:r>
+          </a:p>
+          <a:p>
+            <a:pPr>
+              <a:defRPr sz="1100">
+                <a:solidFill>
+                  <a:srgbClr val="A1A1AA"/>
+                </a:solidFill>
+              </a:defRPr>
+            </a:pPr>
+            <a:r>
+              <a:t>Single-pass drone reconnaissance footage reconstruction generating centimetre-accurate 3D point cloud meshes.</a:t>
+            </a:r>
+          </a:p>
+        </p:txBody>
+      </p:sp>
+      <p:sp>
+        <p:nvSpPr>
+          <p:cNvPr id="17" name="Rounded Rectangle 16"/>
+          <p:cNvSpPr/>
+          <p:nvPr/>
+        </p:nvSpPr>
+        <p:spPr>
+          <a:xfrm>
+            <a:off x="7955280" y="3794760"/>
+            <a:ext cx="3429000" cy="2148840"/>
+          </a:xfrm>
+          <a:prstGeom prst="roundRect">
+            <a:avLst/>
+          </a:prstGeom>
+          <a:solidFill>
+            <a:srgbClr val="100E16"/>
+          </a:solidFill>
+          <a:ln w="15240">
+            <a:solidFill>
+              <a:srgbClr val="2E2034"/>
+            </a:solidFill>
+          </a:ln>
+        </p:spPr>
+        <p:style>
+          <a:lnRef idx="1">
+            <a:schemeClr val="accent1"/>
+          </a:lnRef>
+          <a:fillRef idx="3">
+            <a:schemeClr val="accent1"/>
+          </a:fillRef>
+          <a:effectRef idx="2">
+            <a:schemeClr val="accent1"/>
+          </a:effectRef>
+          <a:fontRef idx="minor">
+            <a:schemeClr val="lt1"/>
+          </a:fontRef>
+        </p:style>
+        <p:txBody>
+          <a:bodyPr rtlCol="0" anchor="ctr"/>
+          <a:lstStyle/>
+          <a:p>
+            <a:pPr algn="ctr"/>
+          </a:p>
+        </p:txBody>
+      </p:sp>
+      <p:sp>
+        <p:nvSpPr>
+          <p:cNvPr id="18" name="TextBox 17"/>
+          <p:cNvSpPr txBox="1"/>
+          <p:nvPr/>
+        </p:nvSpPr>
+        <p:spPr>
+          <a:xfrm>
+            <a:off x="8138160" y="3977640"/>
+            <a:ext cx="3063240" cy="1783080"/>
+          </a:xfrm>
+          <a:prstGeom prst="rect">
+            <a:avLst/>
+          </a:prstGeom>
+          <a:noFill/>
+        </p:spPr>
+        <p:txBody>
+          <a:bodyPr wrap="square">
+            <a:spAutoFit/>
+          </a:bodyPr>
+          <a:lstStyle/>
+          <a:p>
+            <a:pPr>
+              <a:defRPr sz="1400" b="1">
+                <a:solidFill>
+                  <a:srgbClr val="FF1E56"/>
+                </a:solidFill>
+              </a:defRPr>
+            </a:pPr>
+            <a:r>
+              <a:t>Autonomous Supply Optimizer</a:t>
+            </a:r>
+          </a:p>
+          <a:p>
+            <a:pPr>
+              <a:defRPr sz="1000" b="1">
+                <a:solidFill>
+                  <a:srgbClr val="A855F7"/>
+                </a:solidFill>
+              </a:defRPr>
+            </a:pPr>
+            <a:r>
+              <a:t>Enterprise AI (MILP / Python / FastAPI)</a:t>
+            </a:r>
+          </a:p>
+          <a:p>
+            <a:pPr>
+              <a:defRPr sz="1100">
+                <a:solidFill>
+                  <a:srgbClr val="A1A1AA"/>
+                </a:solidFill>
+              </a:defRPr>
+            </a:pPr>
+            <a:r>
+              <a:t>Mixed-integer linear programming model minimizing multi-warehouse distribution costs under dynamic demand constraints.</a:t>
             </a:r>
           </a:p>
         </p:txBody>
@@ -7875,7 +8642,7 @@
             <a:avLst/>
           </a:prstGeom>
           <a:solidFill>
-            <a:srgbClr val="09090E"/>
+            <a:srgbClr val="06060A"/>
           </a:solidFill>
           <a:ln>
             <a:noFill/>
@@ -7911,8 +8678,8 @@
         </p:nvSpPr>
         <p:spPr>
           <a:xfrm>
-            <a:off x="731520" y="457200"/>
-            <a:ext cx="10698480" cy="365760"/>
+            <a:off x="731520" y="365760"/>
+            <a:ext cx="10698480" cy="320040"/>
           </a:xfrm>
           <a:prstGeom prst="rect">
             <a:avLst/>
@@ -7928,12 +8695,12 @@
             <a:pPr>
               <a:defRPr sz="1100" b="1">
                 <a:solidFill>
-                  <a:srgbClr val="FF2D55"/>
-                </a:solidFill>
-              </a:defRPr>
-            </a:pPr>
-            <a:r>
-              <a:t>VERIFICATION</a:t>
+                  <a:srgbClr val="FF1E56"/>
+                </a:solidFill>
+              </a:defRPr>
+            </a:pPr>
+            <a:r>
+              <a:t>REPORTS &amp; ACCREDITATION PIPELINES</a:t>
             </a:r>
           </a:p>
         </p:txBody>
@@ -7946,8 +8713,8 @@
         </p:nvSpPr>
         <p:spPr>
           <a:xfrm>
-            <a:off x="731520" y="777240"/>
-            <a:ext cx="10698480" cy="731520"/>
+            <a:off x="731520" y="685800"/>
+            <a:ext cx="10698480" cy="594360"/>
           </a:xfrm>
           <a:prstGeom prst="rect">
             <a:avLst/>
@@ -7961,39 +8728,37 @@
           <a:lstStyle/>
           <a:p>
             <a:pPr>
-              <a:defRPr sz="2800" b="1">
-                <a:solidFill>
-                  <a:srgbClr val="F8FAFC"/>
-                </a:solidFill>
-              </a:defRPr>
-            </a:pPr>
-            <a:r>
-              <a:t>Performance Benchmarks &amp; Quality Assurance</a:t>
-            </a:r>
-          </a:p>
-        </p:txBody>
-      </p:sp>
-      <p:sp>
-        <p:nvSpPr>
-          <p:cNvPr id="5" name="Rounded Rectangle 4"/>
+              <a:defRPr sz="2600" b="1">
+                <a:solidFill>
+                  <a:srgbClr val="FFFFFF"/>
+                </a:solidFill>
+              </a:defRPr>
+            </a:pPr>
+            <a:r>
+              <a:t>Institutional Analytics, ATS Studio &amp; Reporting</a:t>
+            </a:r>
+          </a:p>
+        </p:txBody>
+      </p:sp>
+      <p:sp>
+        <p:nvSpPr>
+          <p:cNvPr id="5" name="Rectangle 4"/>
           <p:cNvSpPr/>
           <p:nvPr/>
         </p:nvSpPr>
         <p:spPr>
           <a:xfrm>
-            <a:off x="731520" y="1737360"/>
-            <a:ext cx="3429000" cy="2011680"/>
-          </a:xfrm>
-          <a:prstGeom prst="roundRect">
+            <a:off x="731520" y="6400800"/>
+            <a:ext cx="10728655" cy="18288"/>
+          </a:xfrm>
+          <a:prstGeom prst="rect">
             <a:avLst/>
           </a:prstGeom>
           <a:solidFill>
-            <a:srgbClr val="121018"/>
+            <a:srgbClr val="2E2034"/>
           </a:solidFill>
           <a:ln>
-            <a:solidFill>
-              <a:srgbClr val="302032"/>
-            </a:solidFill>
+            <a:noFill/>
           </a:ln>
         </p:spPr>
         <p:style>
@@ -8026,8 +8791,8 @@
         </p:nvSpPr>
         <p:spPr>
           <a:xfrm>
-            <a:off x="960120" y="1965960"/>
-            <a:ext cx="2971800" cy="1554480"/>
+            <a:off x="731520" y="6446520"/>
+            <a:ext cx="10728655" cy="320040"/>
           </a:xfrm>
           <a:prstGeom prst="rect">
             <a:avLst/>
@@ -8035,32 +8800,20 @@
           <a:noFill/>
         </p:spPr>
         <p:txBody>
-          <a:bodyPr wrap="square">
+          <a:bodyPr wrap="none">
             <a:spAutoFit/>
           </a:bodyPr>
           <a:lstStyle/>
           <a:p>
             <a:pPr>
-              <a:defRPr sz="1800" b="1">
-                <a:solidFill>
-                  <a:srgbClr val="FF2D55"/>
-                </a:solidFill>
-              </a:defRPr>
-            </a:pPr>
-            <a:r>
-              <a:t>✓ 972 Placement Records</a:t>
-            </a:r>
-          </a:p>
-          <a:p>
-            <a:pPr>
-              <a:defRPr sz="1300">
+              <a:defRPr sz="1000">
                 <a:solidFill>
                   <a:srgbClr val="A1A1AA"/>
                 </a:solidFill>
               </a:defRPr>
             </a:pPr>
             <a:r>
-              <a:t>Verified across 9 Engineering Branches</a:t>
+              <a:t>Slide 09 / 10 • Pathfinder 2.0 • Lead Systems Engineer: Dileep Bommali • https://github.com/dileepbommali16-ops/pathfinder</a:t>
             </a:r>
           </a:p>
         </p:txBody>
@@ -8073,18 +8826,18 @@
         </p:nvSpPr>
         <p:spPr>
           <a:xfrm>
-            <a:off x="4343400" y="1737360"/>
-            <a:ext cx="3429000" cy="2011680"/>
+            <a:off x="731520" y="1417320"/>
+            <a:ext cx="3429000" cy="4709160"/>
           </a:xfrm>
           <a:prstGeom prst="roundRect">
             <a:avLst/>
           </a:prstGeom>
           <a:solidFill>
-            <a:srgbClr val="121018"/>
+            <a:srgbClr val="100E16"/>
           </a:solidFill>
-          <a:ln>
+          <a:ln w="15240">
             <a:solidFill>
-              <a:srgbClr val="302032"/>
+              <a:srgbClr val="2E2034"/>
             </a:solidFill>
           </a:ln>
         </p:spPr>
@@ -8118,8 +8871,8 @@
         </p:nvSpPr>
         <p:spPr>
           <a:xfrm>
-            <a:off x="4572000" y="1965960"/>
-            <a:ext cx="2971800" cy="1554480"/>
+            <a:off x="960120" y="1645920"/>
+            <a:ext cx="2971800" cy="4206240"/>
           </a:xfrm>
           <a:prstGeom prst="rect">
             <a:avLst/>
@@ -8133,26 +8886,38 @@
           <a:lstStyle/>
           <a:p>
             <a:pPr>
-              <a:defRPr sz="1800" b="1">
-                <a:solidFill>
-                  <a:srgbClr val="FF2D55"/>
-                </a:solidFill>
-              </a:defRPr>
-            </a:pPr>
-            <a:r>
-              <a:t>✓ 88% ML Accuracy</a:t>
-            </a:r>
-          </a:p>
-          <a:p>
-            <a:pPr>
-              <a:defRPr sz="1300">
-                <a:solidFill>
-                  <a:srgbClr val="A1A1AA"/>
-                </a:solidFill>
-              </a:defRPr>
-            </a:pPr>
-            <a:r>
-              <a:t>Random Forest Classifier (120 Estimators)</a:t>
+              <a:defRPr sz="1000" b="1">
+                <a:solidFill>
+                  <a:srgbClr val="A855F7"/>
+                </a:solidFill>
+              </a:defRPr>
+            </a:pPr>
+            <a:r>
+              <a:t>CONTEXT-SYNCHRONIZED MENTORSHIP</a:t>
+            </a:r>
+          </a:p>
+          <a:p>
+            <a:pPr>
+              <a:defRPr sz="1700" b="1">
+                <a:solidFill>
+                  <a:srgbClr val="FF1E56"/>
+                </a:solidFill>
+              </a:defRPr>
+            </a:pPr>
+            <a:r>
+              <a:t>Live UI State Awareness</a:t>
+            </a:r>
+          </a:p>
+          <a:p>
+            <a:pPr>
+              <a:defRPr sz="1200">
+                <a:solidFill>
+                  <a:srgbClr val="FFFFFF"/>
+                </a:solidFill>
+              </a:defRPr>
+            </a:pPr>
+            <a:r>
+              <a:t>The AI mentor continuously reads live telemetry from the student's active UI — ingesting exact CGPA, pending backlogs, target role, and ML placement gauge percentage to mentor with concrete numbers instead of generic advice.</a:t>
             </a:r>
           </a:p>
         </p:txBody>
@@ -8165,18 +8930,18 @@
         </p:nvSpPr>
         <p:spPr>
           <a:xfrm>
-            <a:off x="7955280" y="1737360"/>
-            <a:ext cx="3429000" cy="2011680"/>
+            <a:off x="4343400" y="1417320"/>
+            <a:ext cx="3429000" cy="4709160"/>
           </a:xfrm>
           <a:prstGeom prst="roundRect">
             <a:avLst/>
           </a:prstGeom>
           <a:solidFill>
-            <a:srgbClr val="121018"/>
+            <a:srgbClr val="100E16"/>
           </a:solidFill>
-          <a:ln>
+          <a:ln w="15240">
             <a:solidFill>
-              <a:srgbClr val="302032"/>
+              <a:srgbClr val="2E2034"/>
             </a:solidFill>
           </a:ln>
         </p:spPr>
@@ -8210,8 +8975,8 @@
         </p:nvSpPr>
         <p:spPr>
           <a:xfrm>
-            <a:off x="8183880" y="1965960"/>
-            <a:ext cx="2971800" cy="1554480"/>
+            <a:off x="4572000" y="1645920"/>
+            <a:ext cx="2971800" cy="4206240"/>
           </a:xfrm>
           <a:prstGeom prst="rect">
             <a:avLst/>
@@ -8225,26 +8990,38 @@
           <a:lstStyle/>
           <a:p>
             <a:pPr>
-              <a:defRPr sz="1800" b="1">
-                <a:solidFill>
-                  <a:srgbClr val="FF2D55"/>
-                </a:solidFill>
-              </a:defRPr>
-            </a:pPr>
-            <a:r>
-              <a:t>✓ 100% Strict Type Safety</a:t>
-            </a:r>
-          </a:p>
-          <a:p>
-            <a:pPr>
-              <a:defRPr sz="1300">
-                <a:solidFill>
-                  <a:srgbClr val="A1A1AA"/>
-                </a:solidFill>
-              </a:defRPr>
-            </a:pPr>
-            <a:r>
-              <a:t>tsc --noEmit &amp; zero Python compilation errors</a:t>
+              <a:defRPr sz="1000" b="1">
+                <a:solidFill>
+                  <a:srgbClr val="A855F7"/>
+                </a:solidFill>
+              </a:defRPr>
+            </a:pPr>
+            <a:r>
+              <a:t>ELIMINATING REGIONAL LANGUAGE BARRIERS</a:t>
+            </a:r>
+          </a:p>
+          <a:p>
+            <a:pPr>
+              <a:defRPr sz="1700" b="1">
+                <a:solidFill>
+                  <a:srgbClr val="FF1E56"/>
+                </a:solidFill>
+              </a:defRPr>
+            </a:pPr>
+            <a:r>
+              <a:t>Bilingual Mentorship (English + Telugu)</a:t>
+            </a:r>
+          </a:p>
+          <a:p>
+            <a:pPr>
+              <a:defRPr sz="1200">
+                <a:solidFill>
+                  <a:srgbClr val="FFFFFF"/>
+                </a:solidFill>
+              </a:defRPr>
+            </a:pPr>
+            <a:r>
+              <a:t>Full technical mentorship in fluent English, native Telugu script, and conversational Roman Telugu. Explains complex distributed systems, memory heaps, and tree traversals without linguistic intimidation.</a:t>
             </a:r>
           </a:p>
         </p:txBody>
@@ -8257,18 +9034,18 @@
         </p:nvSpPr>
         <p:spPr>
           <a:xfrm>
-            <a:off x="731520" y="4023360"/>
-            <a:ext cx="3429000" cy="2011680"/>
+            <a:off x="7955280" y="1417320"/>
+            <a:ext cx="3429000" cy="4709160"/>
           </a:xfrm>
           <a:prstGeom prst="roundRect">
             <a:avLst/>
           </a:prstGeom>
           <a:solidFill>
-            <a:srgbClr val="121018"/>
+            <a:srgbClr val="100E16"/>
           </a:solidFill>
-          <a:ln>
+          <a:ln w="15240">
             <a:solidFill>
-              <a:srgbClr val="302032"/>
+              <a:srgbClr val="2E2034"/>
             </a:solidFill>
           </a:ln>
         </p:spPr>
@@ -8302,8 +9079,8 @@
         </p:nvSpPr>
         <p:spPr>
           <a:xfrm>
-            <a:off x="960120" y="4251960"/>
-            <a:ext cx="2971800" cy="1554480"/>
+            <a:off x="8183880" y="1645920"/>
+            <a:ext cx="2971800" cy="4206240"/>
           </a:xfrm>
           <a:prstGeom prst="rect">
             <a:avLst/>
@@ -8317,210 +9094,38 @@
           <a:lstStyle/>
           <a:p>
             <a:pPr>
-              <a:defRPr sz="1800" b="1">
-                <a:solidFill>
-                  <a:srgbClr val="FF2D55"/>
-                </a:solidFill>
-              </a:defRPr>
-            </a:pPr>
-            <a:r>
-              <a:t>✓ 16/16 Audit Passed</a:t>
-            </a:r>
-          </a:p>
-          <a:p>
-            <a:pPr>
-              <a:defRPr sz="1300">
-                <a:solidFill>
-                  <a:srgbClr val="A1A1AA"/>
-                </a:solidFill>
-              </a:defRPr>
-            </a:pPr>
-            <a:r>
-              <a:t>IDOR 403 Forbidden &amp; Security Verification</a:t>
-            </a:r>
-          </a:p>
-        </p:txBody>
-      </p:sp>
-      <p:sp>
-        <p:nvSpPr>
-          <p:cNvPr id="13" name="Rounded Rectangle 12"/>
-          <p:cNvSpPr/>
-          <p:nvPr/>
-        </p:nvSpPr>
-        <p:spPr>
-          <a:xfrm>
-            <a:off x="4343400" y="4023360"/>
-            <a:ext cx="3429000" cy="2011680"/>
-          </a:xfrm>
-          <a:prstGeom prst="roundRect">
-            <a:avLst/>
-          </a:prstGeom>
-          <a:solidFill>
-            <a:srgbClr val="121018"/>
-          </a:solidFill>
-          <a:ln>
-            <a:solidFill>
-              <a:srgbClr val="302032"/>
-            </a:solidFill>
-          </a:ln>
-        </p:spPr>
-        <p:style>
-          <a:lnRef idx="1">
-            <a:schemeClr val="accent1"/>
-          </a:lnRef>
-          <a:fillRef idx="3">
-            <a:schemeClr val="accent1"/>
-          </a:fillRef>
-          <a:effectRef idx="2">
-            <a:schemeClr val="accent1"/>
-          </a:effectRef>
-          <a:fontRef idx="minor">
-            <a:schemeClr val="lt1"/>
-          </a:fontRef>
-        </p:style>
-        <p:txBody>
-          <a:bodyPr rtlCol="0" anchor="ctr"/>
-          <a:lstStyle/>
-          <a:p>
-            <a:pPr algn="ctr"/>
-          </a:p>
-        </p:txBody>
-      </p:sp>
-      <p:sp>
-        <p:nvSpPr>
-          <p:cNvPr id="14" name="TextBox 13"/>
-          <p:cNvSpPr txBox="1"/>
-          <p:nvPr/>
-        </p:nvSpPr>
-        <p:spPr>
-          <a:xfrm>
-            <a:off x="4572000" y="4251960"/>
-            <a:ext cx="2971800" cy="1554480"/>
-          </a:xfrm>
-          <a:prstGeom prst="rect">
-            <a:avLst/>
-          </a:prstGeom>
-          <a:noFill/>
-        </p:spPr>
-        <p:txBody>
-          <a:bodyPr wrap="square">
-            <a:spAutoFit/>
-          </a:bodyPr>
-          <a:lstStyle/>
-          <a:p>
-            <a:pPr>
-              <a:defRPr sz="1800" b="1">
-                <a:solidFill>
-                  <a:srgbClr val="FF2D55"/>
-                </a:solidFill>
-              </a:defRPr>
-            </a:pPr>
-            <a:r>
-              <a:t>✓ Bilingual AI Mentorship</a:t>
-            </a:r>
-          </a:p>
-          <a:p>
-            <a:pPr>
-              <a:defRPr sz="1300">
-                <a:solidFill>
-                  <a:srgbClr val="A1A1AA"/>
-                </a:solidFill>
-              </a:defRPr>
-            </a:pPr>
-            <a:r>
-              <a:t>English, Telugu Script &amp; Roman Telugu</a:t>
-            </a:r>
-          </a:p>
-        </p:txBody>
-      </p:sp>
-      <p:sp>
-        <p:nvSpPr>
-          <p:cNvPr id="15" name="Rounded Rectangle 14"/>
-          <p:cNvSpPr/>
-          <p:nvPr/>
-        </p:nvSpPr>
-        <p:spPr>
-          <a:xfrm>
-            <a:off x="7955280" y="4023360"/>
-            <a:ext cx="3429000" cy="2011680"/>
-          </a:xfrm>
-          <a:prstGeom prst="roundRect">
-            <a:avLst/>
-          </a:prstGeom>
-          <a:solidFill>
-            <a:srgbClr val="121018"/>
-          </a:solidFill>
-          <a:ln>
-            <a:solidFill>
-              <a:srgbClr val="302032"/>
-            </a:solidFill>
-          </a:ln>
-        </p:spPr>
-        <p:style>
-          <a:lnRef idx="1">
-            <a:schemeClr val="accent1"/>
-          </a:lnRef>
-          <a:fillRef idx="3">
-            <a:schemeClr val="accent1"/>
-          </a:fillRef>
-          <a:effectRef idx="2">
-            <a:schemeClr val="accent1"/>
-          </a:effectRef>
-          <a:fontRef idx="minor">
-            <a:schemeClr val="lt1"/>
-          </a:fontRef>
-        </p:style>
-        <p:txBody>
-          <a:bodyPr rtlCol="0" anchor="ctr"/>
-          <a:lstStyle/>
-          <a:p>
-            <a:pPr algn="ctr"/>
-          </a:p>
-        </p:txBody>
-      </p:sp>
-      <p:sp>
-        <p:nvSpPr>
-          <p:cNvPr id="16" name="TextBox 15"/>
-          <p:cNvSpPr txBox="1"/>
-          <p:nvPr/>
-        </p:nvSpPr>
-        <p:spPr>
-          <a:xfrm>
-            <a:off x="8183880" y="4251960"/>
-            <a:ext cx="2971800" cy="1554480"/>
-          </a:xfrm>
-          <a:prstGeom prst="rect">
-            <a:avLst/>
-          </a:prstGeom>
-          <a:noFill/>
-        </p:spPr>
-        <p:txBody>
-          <a:bodyPr wrap="square">
-            <a:spAutoFit/>
-          </a:bodyPr>
-          <a:lstStyle/>
-          <a:p>
-            <a:pPr>
-              <a:defRPr sz="1800" b="1">
-                <a:solidFill>
-                  <a:srgbClr val="FF2D55"/>
-                </a:solidFill>
-              </a:defRPr>
-            </a:pPr>
-            <a:r>
-              <a:t>✓ Production Deployed</a:t>
-            </a:r>
-          </a:p>
-          <a:p>
-            <a:pPr>
-              <a:defRPr sz="1300">
-                <a:solidFill>
-                  <a:srgbClr val="A1A1AA"/>
-                </a:solidFill>
-              </a:defRPr>
-            </a:pPr>
-            <a:r>
-              <a:t>Vercel Edge SPA &amp; Render Cloud API Service</a:t>
+              <a:defRPr sz="1000" b="1">
+                <a:solidFill>
+                  <a:srgbClr val="A855F7"/>
+                </a:solidFill>
+              </a:defRPr>
+            </a:pPr>
+            <a:r>
+              <a:t>HIGH-PRESSURE MOCK INTERVIEW GRILLING</a:t>
+            </a:r>
+          </a:p>
+          <a:p>
+            <a:pPr>
+              <a:defRPr sz="1700" b="1">
+                <a:solidFill>
+                  <a:srgbClr val="FF1E56"/>
+                </a:solidFill>
+              </a:defRPr>
+            </a:pPr>
+            <a:r>
+              <a:t>Viva Defense Simulator</a:t>
+            </a:r>
+          </a:p>
+          <a:p>
+            <a:pPr>
+              <a:defRPr sz="1200">
+                <a:solidFill>
+                  <a:srgbClr val="FFFFFF"/>
+                </a:solidFill>
+              </a:defRPr>
+            </a:pPr>
+            <a:r>
+              <a:t>Interrogates candidates on architectural choices, database locking, edge cases, and scaling bottlenecks in their portfolio projects, preparing them thoroughly for rigorous viva panels and technical rounds.</a:t>
             </a:r>
           </a:p>
         </p:txBody>
@@ -8851,324 +9456,4 @@
   </a:objectDefaults>
   <a:extraClrSchemeLst/>
 </a:theme>
-</file>
-
-<file path=ppt/theme/theme2.xml><?xml version="1.0" encoding="utf-8"?>
-<a:theme xmlns:a="http://schemas.openxmlformats.org/drawingml/2006/main" name="Office Theme">
-  <a:themeElements>
-    <a:clrScheme name="Office">
-      <a:dk1>
-        <a:sysClr val="windowText" lastClr="000000"/>
-      </a:dk1>
-      <a:lt1>
-        <a:sysClr val="window" lastClr="FFFFFF"/>
-      </a:lt1>
-      <a:dk2>
-        <a:srgbClr val="1F497D"/>
-      </a:dk2>
-      <a:lt2>
-        <a:srgbClr val="EEECE1"/>
-      </a:lt2>
-      <a:accent1>
-        <a:srgbClr val="4F81BD"/>
-      </a:accent1>
-      <a:accent2>
-        <a:srgbClr val="C0504D"/>
-      </a:accent2>
-      <a:accent3>
-        <a:srgbClr val="9BBB59"/>
-      </a:accent3>
-      <a:accent4>
-        <a:srgbClr val="8064A2"/>
-      </a:accent4>
-      <a:accent5>
-        <a:srgbClr val="4BACC6"/>
-      </a:accent5>
-      <a:accent6>
-        <a:srgbClr val="F79646"/>
-      </a:accent6>
-      <a:hlink>
-        <a:srgbClr val="0000FF"/>
-      </a:hlink>
-      <a:folHlink>
-        <a:srgbClr val="800080"/>
-      </a:folHlink>
-    </a:clrScheme>
-    <a:fontScheme name="Office">
-      <a:majorFont>
-        <a:latin typeface="Calibri"/>
-        <a:ea typeface=""/>
-        <a:cs typeface=""/>
-        <a:font script="Jpan" typeface="ＭＳ Ｐゴシック"/>
-        <a:font script="Hang" typeface="맑은 고딕"/>
-        <a:font script="Hans" typeface="宋体"/>
-        <a:font script="Hant" typeface="新細明體"/>
-        <a:font script="Arab" typeface="Times New Roman"/>
-        <a:font script="Hebr" typeface="Times New Roman"/>
-        <a:font script="Thai" typeface="Angsana New"/>
-        <a:font script="Ethi" typeface="Nyala"/>
-        <a:font script="Beng" typeface="Vrinda"/>
-        <a:font script="Gujr" typeface="Shruti"/>
-        <a:font script="Khmr" typeface="MoolBoran"/>
-        <a:font script="Knda" typeface="Tunga"/>
-        <a:font script="Guru" typeface="Raavi"/>
-        <a:font script="Cans" typeface="Euphemia"/>
-        <a:font script="Cher" typeface="Plantagenet Cherokee"/>
-        <a:font script="Yiii" typeface="Microsoft Yi Baiti"/>
-        <a:font script="Tibt" typeface="Microsoft Himalaya"/>
-        <a:font script="Thaa" typeface="MV Boli"/>
-        <a:font script="Deva" typeface="Mangal"/>
-        <a:font script="Telu" typeface="Gautami"/>
-        <a:font script="Taml" typeface="Latha"/>
-        <a:font script="Syrc" typeface="Estrangelo Edessa"/>
-        <a:font script="Orya" typeface="Kalinga"/>
-        <a:font script="Mlym" typeface="Kartika"/>
-        <a:font script="Laoo" typeface="DokChampa"/>
-        <a:font script="Sinh" typeface="Iskoola Pota"/>
-        <a:font script="Mong" typeface="Mongolian Baiti"/>
-        <a:font script="Viet" typeface="Times New Roman"/>
-        <a:font script="Uigh" typeface="Microsoft Uighur"/>
-        <a:font script="Geor" typeface="Sylfaen"/>
-      </a:majorFont>
-      <a:minorFont>
-        <a:latin typeface="Calibri"/>
-        <a:ea typeface=""/>
-        <a:cs typeface=""/>
-        <a:font script="Jpan" typeface="ＭＳ Ｐゴシック"/>
-        <a:font script="Hang" typeface="맑은 고딕"/>
-        <a:font script="Hans" typeface="宋体"/>
-        <a:font script="Hant" typeface="新細明體"/>
-        <a:font script="Arab" typeface="Arial"/>
-        <a:font script="Hebr" typeface="Arial"/>
-        <a:font script="Thai" typeface="Cordia New"/>
-        <a:font script="Ethi" typeface="Nyala"/>
-        <a:font script="Beng" typeface="Vrinda"/>
-        <a:font script="Gujr" typeface="Shruti"/>
-        <a:font script="Khmr" typeface="DaunPenh"/>
-        <a:font script="Knda" typeface="Tunga"/>
-        <a:font script="Guru" typeface="Raavi"/>
-        <a:font script="Cans" typeface="Euphemia"/>
-        <a:font script="Cher" typeface="Plantagenet Cherokee"/>
-        <a:font script="Yiii" typeface="Microsoft Yi Baiti"/>
-        <a:font script="Tibt" typeface="Microsoft Himalaya"/>
-        <a:font script="Thaa" typeface="MV Boli"/>
-        <a:font script="Deva" typeface="Mangal"/>
-        <a:font script="Telu" typeface="Gautami"/>
-        <a:font script="Taml" typeface="Latha"/>
-        <a:font script="Syrc" typeface="Estrangelo Edessa"/>
-        <a:font script="Orya" typeface="Kalinga"/>
-        <a:font script="Mlym" typeface="Kartika"/>
-        <a:font script="Laoo" typeface="DokChampa"/>
-        <a:font script="Sinh" typeface="Iskoola Pota"/>
-        <a:font script="Mong" typeface="Mongolian Baiti"/>
-        <a:font script="Viet" typeface="Arial"/>
-        <a:font script="Uigh" typeface="Microsoft Uighur"/>
-        <a:font script="Geor" typeface="Sylfaen"/>
-      </a:minorFont>
-    </a:fontScheme>
-    <a:fmtScheme name="Office">
-      <a:fillStyleLst>
-        <a:solidFill>
-          <a:schemeClr val="phClr"/>
-        </a:solidFill>
-        <a:gradFill rotWithShape="1">
-          <a:gsLst>
-            <a:gs pos="0">
-              <a:schemeClr val="phClr">
-                <a:tint val="50000"/>
-                <a:satMod val="300000"/>
-              </a:schemeClr>
-            </a:gs>
-            <a:gs pos="35000">
-              <a:schemeClr val="phClr">
-                <a:tint val="37000"/>
-                <a:satMod val="300000"/>
-              </a:schemeClr>
-            </a:gs>
-            <a:gs pos="100000">
-              <a:schemeClr val="phClr">
-                <a:tint val="15000"/>
-                <a:satMod val="350000"/>
-              </a:schemeClr>
-            </a:gs>
-          </a:gsLst>
-          <a:lin ang="16200000" scaled="1"/>
-        </a:gradFill>
-        <a:gradFill rotWithShape="1">
-          <a:gsLst>
-            <a:gs pos="0">
-              <a:schemeClr val="phClr">
-                <a:tint val="100000"/>
-                <a:shade val="100000"/>
-                <a:satMod val="130000"/>
-              </a:schemeClr>
-            </a:gs>
-            <a:gs pos="100000">
-              <a:schemeClr val="phClr">
-                <a:tint val="50000"/>
-                <a:shade val="100000"/>
-                <a:satMod val="350000"/>
-              </a:schemeClr>
-            </a:gs>
-          </a:gsLst>
-          <a:lin ang="16200000" scaled="0"/>
-        </a:gradFill>
-      </a:fillStyleLst>
-      <a:lnStyleLst>
-        <a:ln w="9525" cap="flat" cmpd="sng" algn="ctr">
-          <a:solidFill>
-            <a:schemeClr val="phClr">
-              <a:shade val="95000"/>
-              <a:satMod val="105000"/>
-            </a:schemeClr>
-          </a:solidFill>
-          <a:prstDash val="solid"/>
-        </a:ln>
-        <a:ln w="25400" cap="flat" cmpd="sng" algn="ctr">
-          <a:solidFill>
-            <a:schemeClr val="phClr"/>
-          </a:solidFill>
-          <a:prstDash val="solid"/>
-        </a:ln>
-        <a:ln w="38100" cap="flat" cmpd="sng" algn="ctr">
-          <a:solidFill>
-            <a:schemeClr val="phClr"/>
-          </a:solidFill>
-          <a:prstDash val="solid"/>
-        </a:ln>
-      </a:lnStyleLst>
-      <a:effectStyleLst>
-        <a:effectStyle>
-          <a:effectLst>
-            <a:outerShdw blurRad="40000" dist="20000" dir="5400000" rotWithShape="0">
-              <a:srgbClr val="000000">
-                <a:alpha val="38000"/>
-              </a:srgbClr>
-            </a:outerShdw>
-          </a:effectLst>
-        </a:effectStyle>
-        <a:effectStyle>
-          <a:effectLst>
-            <a:outerShdw blurRad="40000" dist="23000" dir="5400000" rotWithShape="0">
-              <a:srgbClr val="000000">
-                <a:alpha val="35000"/>
-              </a:srgbClr>
-            </a:outerShdw>
-          </a:effectLst>
-        </a:effectStyle>
-        <a:effectStyle>
-          <a:effectLst>
-            <a:outerShdw blurRad="40000" dist="23000" dir="5400000" rotWithShape="0">
-              <a:srgbClr val="000000">
-                <a:alpha val="35000"/>
-              </a:srgbClr>
-            </a:outerShdw>
-          </a:effectLst>
-          <a:scene3d>
-            <a:camera prst="orthographicFront">
-              <a:rot lat="0" lon="0" rev="0"/>
-            </a:camera>
-            <a:lightRig rig="threePt" dir="t">
-              <a:rot lat="0" lon="0" rev="1200000"/>
-            </a:lightRig>
-          </a:scene3d>
-          <a:sp3d>
-            <a:bevelT w="63500" h="25400"/>
-          </a:sp3d>
-        </a:effectStyle>
-      </a:effectStyleLst>
-      <a:bgFillStyleLst>
-        <a:solidFill>
-          <a:schemeClr val="phClr"/>
-        </a:solidFill>
-        <a:gradFill rotWithShape="1">
-          <a:gsLst>
-            <a:gs pos="0">
-              <a:schemeClr val="phClr">
-                <a:tint val="40000"/>
-                <a:satMod val="350000"/>
-              </a:schemeClr>
-            </a:gs>
-            <a:gs pos="40000">
-              <a:schemeClr val="phClr">
-                <a:tint val="45000"/>
-                <a:shade val="99000"/>
-                <a:satMod val="350000"/>
-              </a:schemeClr>
-            </a:gs>
-            <a:gs pos="100000">
-              <a:schemeClr val="phClr">
-                <a:shade val="20000"/>
-                <a:satMod val="255000"/>
-              </a:schemeClr>
-            </a:gs>
-          </a:gsLst>
-          <a:path path="circle">
-            <a:fillToRect l="50000" t="-80000" r="50000" b="180000"/>
-          </a:path>
-        </a:gradFill>
-        <a:gradFill rotWithShape="1">
-          <a:gsLst>
-            <a:gs pos="0">
-              <a:schemeClr val="phClr">
-                <a:tint val="80000"/>
-                <a:satMod val="300000"/>
-              </a:schemeClr>
-            </a:gs>
-            <a:gs pos="100000">
-              <a:schemeClr val="phClr">
-                <a:shade val="30000"/>
-                <a:satMod val="200000"/>
-              </a:schemeClr>
-            </a:gs>
-          </a:gsLst>
-          <a:path path="circle">
-            <a:fillToRect l="50000" t="50000" r="50000" b="50000"/>
-          </a:path>
-        </a:gradFill>
-      </a:bgFillStyleLst>
-    </a:fmtScheme>
-  </a:themeElements>
-  <a:objectDefaults>
-    <a:spDef>
-      <a:spPr/>
-      <a:bodyPr/>
-      <a:lstStyle/>
-      <a:style>
-        <a:lnRef idx="1">
-          <a:schemeClr val="accent1"/>
-        </a:lnRef>
-        <a:fillRef idx="3">
-          <a:schemeClr val="accent1"/>
-        </a:fillRef>
-        <a:effectRef idx="2">
-          <a:schemeClr val="accent1"/>
-        </a:effectRef>
-        <a:fontRef idx="minor">
-          <a:schemeClr val="lt1"/>
-        </a:fontRef>
-      </a:style>
-    </a:spDef>
-    <a:lnDef>
-      <a:spPr/>
-      <a:bodyPr/>
-      <a:lstStyle/>
-      <a:style>
-        <a:lnRef idx="2">
-          <a:schemeClr val="accent1"/>
-        </a:lnRef>
-        <a:fillRef idx="0">
-          <a:schemeClr val="accent1"/>
-        </a:fillRef>
-        <a:effectRef idx="1">
-          <a:schemeClr val="accent1"/>
-        </a:effectRef>
-        <a:fontRef idx="minor">
-          <a:schemeClr val="tx1"/>
-        </a:fontRef>
-      </a:style>
-    </a:lnDef>
-  </a:objectDefaults>
-  <a:extraClrSchemeLst/>
-</a:theme>
 </file>